--- a/deck/Eco-Loop_Building_Agents_Idea.pptx
+++ b/deck/Eco-Loop_Building_Agents_Idea.pptx
@@ -4667,6 +4667,14 @@
 <file path=ppt/slides/slide2.xml><?xml version="1.0" encoding="utf-8"?>
 <p:sld xmlns:a="http://schemas.openxmlformats.org/drawingml/2006/main" xmlns:r="http://schemas.openxmlformats.org/officeDocument/2006/relationships" xmlns:p="http://schemas.openxmlformats.org/presentationml/2006/main">
   <p:cSld>
+    <p:bg>
+      <p:bgPr>
+        <a:solidFill>
+          <a:srgbClr val="0E1A2B"/>
+        </a:solidFill>
+        <a:effectLst/>
+      </p:bgPr>
+    </p:bg>
     <p:spTree>
       <p:nvGrpSpPr>
         <p:cNvPr id="1" name=""/>
@@ -4683,6 +4691,182 @@
       </p:grpSpPr>
       <p:sp>
         <p:nvSpPr>
+          <p:cNvPr id="14" name="Rounded Rectangle 13"/>
+          <p:cNvSpPr/>
+          <p:nvPr/>
+        </p:nvSpPr>
+        <p:spPr>
+          <a:xfrm>
+            <a:off x="6537960" y="5175504"/>
+            <a:ext cx="5212080" cy="978408"/>
+          </a:xfrm>
+          <a:prstGeom prst="roundRect">
+            <a:avLst>
+              <a:gd name="adj" fmla="val 3500"/>
+            </a:avLst>
+          </a:prstGeom>
+          <a:solidFill>
+            <a:srgbClr val="1B2A3F"/>
+          </a:solidFill>
+          <a:ln>
+            <a:noFill/>
+          </a:ln>
+          <a:effectLst/>
+        </p:spPr>
+        <p:style>
+          <a:lnRef idx="1">
+            <a:schemeClr val="accent1"/>
+          </a:lnRef>
+          <a:fillRef idx="3">
+            <a:schemeClr val="accent1"/>
+          </a:fillRef>
+          <a:effectRef idx="2">
+            <a:schemeClr val="accent1"/>
+          </a:effectRef>
+          <a:fontRef idx="minor">
+            <a:schemeClr val="lt1"/>
+          </a:fontRef>
+        </p:style>
+        <p:txBody>
+          <a:bodyPr rtlCol="0" anchor="ctr"/>
+          <a:lstStyle/>
+          <a:p/>
+        </p:txBody>
+      </p:sp>
+      <p:sp>
+        <p:nvSpPr>
+          <p:cNvPr id="12" name="Rounded Rectangle 11"/>
+          <p:cNvSpPr/>
+          <p:nvPr/>
+        </p:nvSpPr>
+        <p:spPr>
+          <a:xfrm>
+            <a:off x="6537960" y="4087368"/>
+            <a:ext cx="5212080" cy="978408"/>
+          </a:xfrm>
+          <a:prstGeom prst="roundRect">
+            <a:avLst>
+              <a:gd name="adj" fmla="val 3500"/>
+            </a:avLst>
+          </a:prstGeom>
+          <a:solidFill>
+            <a:srgbClr val="1B2A3F"/>
+          </a:solidFill>
+          <a:ln>
+            <a:noFill/>
+          </a:ln>
+          <a:effectLst/>
+        </p:spPr>
+        <p:style>
+          <a:lnRef idx="1">
+            <a:schemeClr val="accent1"/>
+          </a:lnRef>
+          <a:fillRef idx="3">
+            <a:schemeClr val="accent1"/>
+          </a:fillRef>
+          <a:effectRef idx="2">
+            <a:schemeClr val="accent1"/>
+          </a:effectRef>
+          <a:fontRef idx="minor">
+            <a:schemeClr val="lt1"/>
+          </a:fontRef>
+        </p:style>
+        <p:txBody>
+          <a:bodyPr rtlCol="0" anchor="ctr"/>
+          <a:lstStyle/>
+          <a:p/>
+        </p:txBody>
+      </p:sp>
+      <p:sp>
+        <p:nvSpPr>
+          <p:cNvPr id="10" name="Rounded Rectangle 9"/>
+          <p:cNvSpPr/>
+          <p:nvPr/>
+        </p:nvSpPr>
+        <p:spPr>
+          <a:xfrm>
+            <a:off x="6537960" y="2999232"/>
+            <a:ext cx="5212080" cy="978408"/>
+          </a:xfrm>
+          <a:prstGeom prst="roundRect">
+            <a:avLst>
+              <a:gd name="adj" fmla="val 3500"/>
+            </a:avLst>
+          </a:prstGeom>
+          <a:solidFill>
+            <a:srgbClr val="1B2A3F"/>
+          </a:solidFill>
+          <a:ln>
+            <a:noFill/>
+          </a:ln>
+          <a:effectLst/>
+        </p:spPr>
+        <p:style>
+          <a:lnRef idx="1">
+            <a:schemeClr val="accent1"/>
+          </a:lnRef>
+          <a:fillRef idx="3">
+            <a:schemeClr val="accent1"/>
+          </a:fillRef>
+          <a:effectRef idx="2">
+            <a:schemeClr val="accent1"/>
+          </a:effectRef>
+          <a:fontRef idx="minor">
+            <a:schemeClr val="lt1"/>
+          </a:fontRef>
+        </p:style>
+        <p:txBody>
+          <a:bodyPr rtlCol="0" anchor="ctr"/>
+          <a:lstStyle/>
+          <a:p/>
+        </p:txBody>
+      </p:sp>
+      <p:sp>
+        <p:nvSpPr>
+          <p:cNvPr id="8" name="Rounded Rectangle 7"/>
+          <p:cNvSpPr/>
+          <p:nvPr/>
+        </p:nvSpPr>
+        <p:spPr>
+          <a:xfrm>
+            <a:off x="384048" y="1188720"/>
+            <a:ext cx="5852160" cy="3310128"/>
+          </a:xfrm>
+          <a:prstGeom prst="roundRect">
+            <a:avLst>
+              <a:gd name="adj" fmla="val 3500"/>
+            </a:avLst>
+          </a:prstGeom>
+          <a:solidFill>
+            <a:srgbClr val="1B2A3F"/>
+          </a:solidFill>
+          <a:ln>
+            <a:noFill/>
+          </a:ln>
+          <a:effectLst/>
+        </p:spPr>
+        <p:style>
+          <a:lnRef idx="1">
+            <a:schemeClr val="accent1"/>
+          </a:lnRef>
+          <a:fillRef idx="3">
+            <a:schemeClr val="accent1"/>
+          </a:fillRef>
+          <a:effectRef idx="2">
+            <a:schemeClr val="accent1"/>
+          </a:effectRef>
+          <a:fontRef idx="minor">
+            <a:schemeClr val="lt1"/>
+          </a:fontRef>
+        </p:style>
+        <p:txBody>
+          <a:bodyPr rtlCol="0" anchor="ctr"/>
+          <a:lstStyle/>
+          <a:p/>
+        </p:txBody>
+      </p:sp>
+      <p:sp>
+        <p:nvSpPr>
           <p:cNvPr id="4" name="Footer Placeholder 3">
             <a:extLst>
               <a:ext uri="{FF2B5EF4-FFF2-40B4-BE49-F238E27FC236}">
@@ -4706,7 +4890,12 @@
               <a:defRPr/>
             </a:pPr>
             <a:r>
-              <a:rPr lang="en-US"/>
+              <a:rPr lang="en-US" sz="1000">
+                <a:solidFill>
+                  <a:srgbClr val="A8BACE"/>
+                </a:solidFill>
+                <a:latin typeface="Calibri"/>
+              </a:rPr>
               <a:t>@SIH Idea submission- Template</a:t>
             </a:r>
           </a:p>
@@ -4961,9 +5150,9 @@
             <a:r>
               <a:rPr lang="en-US" b="1" dirty="0">
                 <a:solidFill>
-                  <a:schemeClr val="tx1"/>
-                </a:solidFill>
-                <a:latin typeface="Times New Roman" panose="02020603050405020304" pitchFamily="18" charset="0"/>
+                  <a:srgbClr val="F4F7FA"/>
+                </a:solidFill>
+                <a:latin typeface="Cambria" panose="02020603050405020304" pitchFamily="18" charset="0"/>
                 <a:cs typeface="Times New Roman" panose="02020603050405020304" pitchFamily="18" charset="0"/>
               </a:rPr>
               <a:t>TITLE PAGE</a:t>
@@ -4992,8 +5181,8 @@
         </p:nvSpPr>
         <p:spPr>
           <a:xfrm>
-            <a:off x="397274" y="1203454"/>
-            <a:ext cx="5924550" cy="4686668"/>
+            <a:off x="658368" y="1371600"/>
+            <a:ext cx="5349240" cy="3337560"/>
           </a:xfrm>
           <a:prstGeom prst="rect">
             <a:avLst/>
@@ -5008,118 +5197,118 @@
           <a:p>
             <a:pPr algn="l" marL="0" indent="0">
               <a:spcAft>
-                <a:spcPts val="1300"/>
+                <a:spcPts val="1000"/>
               </a:spcAft>
               <a:buNone/>
             </a:pPr>
             <a:r>
-              <a:rPr sz="1500" b="1">
-                <a:solidFill>
-                  <a:srgbClr val="121B2B"/>
-                </a:solidFill>
-                <a:latin typeface="Arial"/>
-              </a:rPr>
-              <a:t>Problem Statement ID  –  &lt;&lt;FILL IN&gt;&gt;</a:t>
+              <a:rPr sz="1350" b="1">
+                <a:solidFill>
+                  <a:srgbClr val="F28A4C"/>
+                </a:solidFill>
+                <a:latin typeface="Calibri"/>
+              </a:rPr>
+              <a:t>Problem Statement ID   &lt;&lt;FILL IN&gt;&gt;</a:t>
             </a:r>
             <a:endParaRPr lang="en-US" dirty="0"/>
           </a:p>
           <a:p>
             <a:pPr algn="l" marL="0" indent="0">
               <a:spcAft>
-                <a:spcPts val="1300"/>
+                <a:spcPts val="1000"/>
               </a:spcAft>
               <a:buNone/>
             </a:pPr>
             <a:r>
-              <a:rPr sz="1500" b="0">
-                <a:solidFill>
-                  <a:srgbClr val="121B2B"/>
-                </a:solidFill>
-                <a:latin typeface="Arial"/>
-              </a:rPr>
-              <a:t>Problem Statement Title  –  Eco-Loop Building Agents: autonomous closed-loop HVAC control using EnergyPlus, MCP and a local open-source LLM</a:t>
+              <a:rPr sz="1350" b="0">
+                <a:solidFill>
+                  <a:srgbClr val="F4F7FA"/>
+                </a:solidFill>
+                <a:latin typeface="Calibri"/>
+              </a:rPr>
+              <a:t>Problem Statement Title   Eco-Loop Building Agents — autonomous closed-loop HVAC control using EnergyPlus, MCP and a local open-source LLM</a:t>
             </a:r>
           </a:p>
           <a:p>
             <a:pPr algn="l" marL="0" indent="0">
               <a:spcAft>
-                <a:spcPts val="1300"/>
+                <a:spcPts val="1000"/>
               </a:spcAft>
               <a:buNone/>
             </a:pPr>
             <a:r>
-              <a:rPr sz="1500" b="0">
-                <a:solidFill>
-                  <a:srgbClr val="121B2B"/>
-                </a:solidFill>
-                <a:latin typeface="Arial"/>
-              </a:rPr>
-              <a:t>Theme  –  &lt;&lt;FILL IN&gt;&gt;   (Smart Automation / Sustainability)</a:t>
+              <a:rPr sz="1350" b="0">
+                <a:solidFill>
+                  <a:srgbClr val="F4F7FA"/>
+                </a:solidFill>
+                <a:latin typeface="Calibri"/>
+              </a:rPr>
+              <a:t>Theme   &lt;&lt;FILL IN&gt;&gt;</a:t>
             </a:r>
           </a:p>
           <a:p>
             <a:pPr algn="l" marL="0" indent="0">
               <a:spcAft>
-                <a:spcPts val="1300"/>
+                <a:spcPts val="1000"/>
               </a:spcAft>
               <a:buNone/>
             </a:pPr>
             <a:r>
-              <a:rPr sz="1500" b="0">
-                <a:solidFill>
-                  <a:srgbClr val="121B2B"/>
-                </a:solidFill>
-                <a:latin typeface="Arial"/>
-              </a:rPr>
-              <a:t>PS Category  –  Software</a:t>
+              <a:rPr sz="1350" b="0">
+                <a:solidFill>
+                  <a:srgbClr val="F4F7FA"/>
+                </a:solidFill>
+                <a:latin typeface="Calibri"/>
+              </a:rPr>
+              <a:t>PS Category   Software</a:t>
             </a:r>
           </a:p>
           <a:p>
             <a:pPr algn="l" marL="0" indent="0">
               <a:spcAft>
-                <a:spcPts val="1300"/>
+                <a:spcPts val="1000"/>
               </a:spcAft>
               <a:buNone/>
             </a:pPr>
             <a:r>
-              <a:rPr sz="1500" b="0">
-                <a:solidFill>
-                  <a:srgbClr val="121B2B"/>
-                </a:solidFill>
-                <a:latin typeface="Arial"/>
-              </a:rPr>
-              <a:t>Student Name  –  Ayush Yadav</a:t>
+              <a:rPr sz="1350" b="0">
+                <a:solidFill>
+                  <a:srgbClr val="F4F7FA"/>
+                </a:solidFill>
+                <a:latin typeface="Calibri"/>
+              </a:rPr>
+              <a:t>Student Name   Ayush Yadav</a:t>
             </a:r>
           </a:p>
           <a:p>
             <a:pPr algn="l" marL="0" indent="0">
               <a:spcAft>
-                <a:spcPts val="1300"/>
+                <a:spcPts val="1000"/>
               </a:spcAft>
               <a:buNone/>
             </a:pPr>
             <a:r>
-              <a:rPr sz="1500" b="0">
-                <a:solidFill>
-                  <a:srgbClr val="121B2B"/>
-                </a:solidFill>
-                <a:latin typeface="Arial"/>
-              </a:rPr>
-              <a:t>Student ID  –  &lt;&lt;FILL IN&gt;&gt;</a:t>
-            </a:r>
-          </a:p>
-        </p:txBody>
-      </p:sp>
-      <p:sp>
-        <p:nvSpPr>
-          <p:cNvPr id="8" name="TextBox 7"/>
+              <a:rPr sz="1350" b="0">
+                <a:solidFill>
+                  <a:srgbClr val="F4F7FA"/>
+                </a:solidFill>
+                <a:latin typeface="Calibri"/>
+              </a:rPr>
+              <a:t>Student ID   &lt;&lt;FILL IN&gt;&gt;</a:t>
+            </a:r>
+          </a:p>
+        </p:txBody>
+      </p:sp>
+      <p:sp>
+        <p:nvSpPr>
+          <p:cNvPr id="9" name="TextBox 8"/>
           <p:cNvSpPr txBox="1"/>
           <p:nvPr/>
         </p:nvSpPr>
         <p:spPr>
           <a:xfrm>
-            <a:off x="6537960" y="1371600"/>
-            <a:ext cx="5120640" cy="1737360"/>
+            <a:off x="6537960" y="1298448"/>
+            <a:ext cx="5212080" cy="1783080"/>
           </a:xfrm>
           <a:prstGeom prst="rect">
             <a:avLst/>
@@ -5134,16 +5323,16 @@
           <a:p>
             <a:pPr algn="l" marL="0" indent="0">
               <a:spcAft>
-                <a:spcPts val="900"/>
+                <a:spcPts val="800"/>
               </a:spcAft>
               <a:buNone/>
             </a:pPr>
             <a:r>
-              <a:rPr sz="2100" b="1">
-                <a:solidFill>
-                  <a:srgbClr val="C24A18"/>
-                </a:solidFill>
-                <a:latin typeface="Arial"/>
+              <a:rPr sz="2200" b="1">
+                <a:solidFill>
+                  <a:srgbClr val="F28A4C"/>
+                </a:solidFill>
+                <a:latin typeface="Calibri"/>
               </a:rPr>
               <a:t>A building that runs itself.</a:t>
             </a:r>
@@ -5151,16 +5340,16 @@
           <a:p>
             <a:pPr algn="l" marL="0" indent="0">
               <a:spcAft>
-                <a:spcPts val="900"/>
+                <a:spcPts val="800"/>
               </a:spcAft>
               <a:buNone/>
             </a:pPr>
             <a:r>
-              <a:rPr sz="1300" b="0">
-                <a:solidFill>
-                  <a:srgbClr val="121B2B"/>
-                </a:solidFill>
-                <a:latin typeface="Arial"/>
+              <a:rPr sz="1250" b="0">
+                <a:solidFill>
+                  <a:srgbClr val="F4F7FA"/>
+                </a:solidFill>
+                <a:latin typeface="Calibri"/>
               </a:rPr>
               <a:t>EnergyPlus supplies the physics, a local open-source LLM supplies the judgement, and the Model Context Protocol carries every reading and every command between them — while the simulation is still running.</a:t>
             </a:r>
@@ -5169,14 +5358,14 @@
       </p:sp>
       <p:sp>
         <p:nvSpPr>
-          <p:cNvPr id="9" name="TextBox 8"/>
+          <p:cNvPr id="11" name="TextBox 10"/>
           <p:cNvSpPr txBox="1"/>
           <p:nvPr/>
         </p:nvSpPr>
         <p:spPr>
           <a:xfrm>
-            <a:off x="6537960" y="3200400"/>
-            <a:ext cx="5120640" cy="1051560"/>
+            <a:off x="6757416" y="3099815"/>
+            <a:ext cx="4773168" cy="777240"/>
           </a:xfrm>
           <a:prstGeom prst="rect">
             <a:avLst/>
@@ -5196,13 +5385,13 @@
               <a:buNone/>
             </a:pPr>
             <a:r>
-              <a:rPr sz="3400" b="1">
-                <a:solidFill>
-                  <a:srgbClr val="C24A18"/>
-                </a:solidFill>
-                <a:latin typeface="Arial"/>
-              </a:rPr>
-              <a:t>-8.5%</a:t>
+              <a:rPr sz="2600" b="1">
+                <a:solidFill>
+                  <a:srgbClr val="F28A4C"/>
+                </a:solidFill>
+                <a:latin typeface="Calibri"/>
+              </a:rPr>
+              <a:t>−8.5%</a:t>
             </a:r>
           </a:p>
           <a:p>
@@ -5213,11 +5402,11 @@
               <a:buNone/>
             </a:pPr>
             <a:r>
-              <a:rPr sz="1100" b="0">
-                <a:solidFill>
-                  <a:srgbClr val="4A5768"/>
-                </a:solidFill>
-                <a:latin typeface="Arial"/>
+              <a:rPr sz="1050" b="0">
+                <a:solidFill>
+                  <a:srgbClr val="A8BACE"/>
+                </a:solidFill>
+                <a:latin typeface="Calibri"/>
               </a:rPr>
               <a:t>HVAC energy, summer week</a:t>
             </a:r>
@@ -5226,14 +5415,14 @@
       </p:sp>
       <p:sp>
         <p:nvSpPr>
-          <p:cNvPr id="10" name="TextBox 9"/>
+          <p:cNvPr id="13" name="TextBox 12"/>
           <p:cNvSpPr txBox="1"/>
           <p:nvPr/>
         </p:nvSpPr>
         <p:spPr>
           <a:xfrm>
-            <a:off x="6537960" y="4160520"/>
-            <a:ext cx="5120640" cy="1051560"/>
+            <a:off x="6757416" y="4187952"/>
+            <a:ext cx="4773168" cy="777240"/>
           </a:xfrm>
           <a:prstGeom prst="rect">
             <a:avLst/>
@@ -5253,13 +5442,13 @@
               <a:buNone/>
             </a:pPr>
             <a:r>
-              <a:rPr sz="3400" b="1">
-                <a:solidFill>
-                  <a:srgbClr val="0D7A4F"/>
-                </a:solidFill>
-                <a:latin typeface="Arial"/>
-              </a:rPr>
-              <a:t>336/336</a:t>
+              <a:rPr sz="2600" b="1">
+                <a:solidFill>
+                  <a:srgbClr val="3FC18B"/>
+                </a:solidFill>
+                <a:latin typeface="Calibri"/>
+              </a:rPr>
+              <a:t>336 / 336</a:t>
             </a:r>
           </a:p>
           <a:p>
@@ -5270,27 +5459,27 @@
               <a:buNone/>
             </a:pPr>
             <a:r>
-              <a:rPr sz="1100" b="0">
-                <a:solidFill>
-                  <a:srgbClr val="4A5768"/>
-                </a:solidFill>
-                <a:latin typeface="Arial"/>
-              </a:rPr>
-              <a:t>agent turns, zero failures</a:t>
-            </a:r>
-          </a:p>
-        </p:txBody>
-      </p:sp>
-      <p:sp>
-        <p:nvSpPr>
-          <p:cNvPr id="11" name="TextBox 10"/>
+              <a:rPr sz="1050" b="0">
+                <a:solidFill>
+                  <a:srgbClr val="A8BACE"/>
+                </a:solidFill>
+                <a:latin typeface="Calibri"/>
+              </a:rPr>
+              <a:t>agent turns — zero failures</a:t>
+            </a:r>
+          </a:p>
+        </p:txBody>
+      </p:sp>
+      <p:sp>
+        <p:nvSpPr>
+          <p:cNvPr id="15" name="TextBox 14"/>
           <p:cNvSpPr txBox="1"/>
           <p:nvPr/>
         </p:nvSpPr>
         <p:spPr>
           <a:xfrm>
-            <a:off x="6537960" y="5120640"/>
-            <a:ext cx="5120640" cy="1051560"/>
+            <a:off x="6757416" y="5276088"/>
+            <a:ext cx="4773168" cy="777240"/>
           </a:xfrm>
           <a:prstGeom prst="rect">
             <a:avLst/>
@@ -5310,11 +5499,11 @@
               <a:buNone/>
             </a:pPr>
             <a:r>
-              <a:rPr sz="3400" b="1">
-                <a:solidFill>
-                  <a:srgbClr val="0D7A4F"/>
-                </a:solidFill>
-                <a:latin typeface="Arial"/>
+              <a:rPr sz="2600" b="1">
+                <a:solidFill>
+                  <a:srgbClr val="F4F7FA"/>
+                </a:solidFill>
+                <a:latin typeface="Calibri"/>
               </a:rPr>
               <a:t>100%</a:t>
             </a:r>
@@ -5327,11 +5516,11 @@
               <a:buNone/>
             </a:pPr>
             <a:r>
-              <a:rPr sz="1100" b="0">
-                <a:solidFill>
-                  <a:srgbClr val="4A5768"/>
-                </a:solidFill>
-                <a:latin typeface="Arial"/>
+              <a:rPr sz="1050" b="0">
+                <a:solidFill>
+                  <a:srgbClr val="A8BACE"/>
+                </a:solidFill>
+                <a:latin typeface="Calibri"/>
               </a:rPr>
               <a:t>open source, runs on a laptop</a:t>
             </a:r>
@@ -5340,14 +5529,14 @@
       </p:sp>
       <p:sp>
         <p:nvSpPr>
-          <p:cNvPr id="12" name="TextBox 11"/>
+          <p:cNvPr id="16" name="TextBox 15"/>
           <p:cNvSpPr txBox="1"/>
           <p:nvPr/>
         </p:nvSpPr>
         <p:spPr>
           <a:xfrm>
-            <a:off x="502920" y="4709160"/>
-            <a:ext cx="5486400" cy="1554480"/>
+            <a:off x="658368" y="4709160"/>
+            <a:ext cx="5577840" cy="914400"/>
           </a:xfrm>
           <a:prstGeom prst="rect">
             <a:avLst/>
@@ -5362,52 +5551,18 @@
           <a:p>
             <a:pPr algn="l" marL="0" indent="0">
               <a:spcAft>
-                <a:spcPts val="600"/>
+                <a:spcPts val="200"/>
               </a:spcAft>
               <a:buNone/>
             </a:pPr>
             <a:r>
-              <a:rPr sz="1200" b="1">
-                <a:solidFill>
-                  <a:srgbClr val="C24A18"/>
-                </a:solidFill>
-                <a:latin typeface="Arial"/>
-              </a:rPr>
-              <a:t>Built with</a:t>
-            </a:r>
-          </a:p>
-          <a:p>
-            <a:pPr algn="l" marL="0" indent="0">
-              <a:spcAft>
-                <a:spcPts val="600"/>
-              </a:spcAft>
-              <a:buNone/>
-            </a:pPr>
-            <a:r>
-              <a:rPr sz="1200" b="0">
-                <a:solidFill>
-                  <a:srgbClr val="4A5768"/>
-                </a:solidFill>
-                <a:latin typeface="Arial"/>
-              </a:rPr>
-              <a:t>EnergyPlus 26.1  ·  pyenergyplus  ·  FastMCP  ·  Model Context Protocol  ·  Ollama + Llama 3.2 3B  ·  Pydantic  ·  Streamlit</a:t>
-            </a:r>
-          </a:p>
-          <a:p>
-            <a:pPr algn="l" marL="0" indent="0">
-              <a:spcAft>
-                <a:spcPts val="600"/>
-              </a:spcAft>
-              <a:buNone/>
-            </a:pPr>
-            <a:r>
-              <a:rPr sz="1200" b="0">
-                <a:solidFill>
-                  <a:srgbClr val="4A5768"/>
-                </a:solidFill>
-                <a:latin typeface="Arial"/>
-              </a:rPr>
-              <a:t>Everything runs locally. No cloud inference, no API keys, no per-query cost.</a:t>
+              <a:rPr sz="1050" b="0">
+                <a:solidFill>
+                  <a:srgbClr val="A8BACE"/>
+                </a:solidFill>
+                <a:latin typeface="Calibri"/>
+              </a:rPr>
+              <a:t>EnergyPlus 26.1 · pyenergyplus · FastMCP · Model Context Protocol · Ollama + Llama 3.2 3B · Pydantic · Streamlit</a:t>
             </a:r>
           </a:p>
         </p:txBody>
@@ -5428,6 +5583,14 @@
 <file path=ppt/slides/slide3.xml><?xml version="1.0" encoding="utf-8"?>
 <p:sld xmlns:a="http://schemas.openxmlformats.org/drawingml/2006/main" xmlns:r="http://schemas.openxmlformats.org/officeDocument/2006/relationships" xmlns:p="http://schemas.openxmlformats.org/presentationml/2006/main">
   <p:cSld>
+    <p:bg>
+      <p:bgPr>
+        <a:solidFill>
+          <a:srgbClr val="FAF7F2"/>
+        </a:solidFill>
+        <a:effectLst/>
+      </p:bgPr>
+    </p:bg>
     <p:spTree>
       <p:nvGrpSpPr>
         <p:cNvPr id="1" name=""/>
@@ -5444,6 +5607,138 @@
       </p:grpSpPr>
       <p:sp>
         <p:nvSpPr>
+          <p:cNvPr id="15368" name="Rounded Rectangle 15367"/>
+          <p:cNvSpPr/>
+          <p:nvPr/>
+        </p:nvSpPr>
+        <p:spPr>
+          <a:xfrm>
+            <a:off x="6309360" y="4700016"/>
+            <a:ext cx="5532120" cy="1481328"/>
+          </a:xfrm>
+          <a:prstGeom prst="roundRect">
+            <a:avLst>
+              <a:gd name="adj" fmla="val 3500"/>
+            </a:avLst>
+          </a:prstGeom>
+          <a:solidFill>
+            <a:srgbClr val="F2ECE2"/>
+          </a:solidFill>
+          <a:ln>
+            <a:noFill/>
+          </a:ln>
+          <a:effectLst/>
+        </p:spPr>
+        <p:style>
+          <a:lnRef idx="1">
+            <a:schemeClr val="accent1"/>
+          </a:lnRef>
+          <a:fillRef idx="3">
+            <a:schemeClr val="accent1"/>
+          </a:fillRef>
+          <a:effectRef idx="2">
+            <a:schemeClr val="accent1"/>
+          </a:effectRef>
+          <a:fontRef idx="minor">
+            <a:schemeClr val="lt1"/>
+          </a:fontRef>
+        </p:style>
+        <p:txBody>
+          <a:bodyPr rtlCol="0" anchor="ctr"/>
+          <a:lstStyle/>
+          <a:p/>
+        </p:txBody>
+      </p:sp>
+      <p:sp>
+        <p:nvSpPr>
+          <p:cNvPr id="15366" name="Rounded Rectangle 15365"/>
+          <p:cNvSpPr/>
+          <p:nvPr/>
+        </p:nvSpPr>
+        <p:spPr>
+          <a:xfrm>
+            <a:off x="6309360" y="3163824"/>
+            <a:ext cx="5532120" cy="1389888"/>
+          </a:xfrm>
+          <a:prstGeom prst="roundRect">
+            <a:avLst>
+              <a:gd name="adj" fmla="val 3500"/>
+            </a:avLst>
+          </a:prstGeom>
+          <a:solidFill>
+            <a:srgbClr val="E9EFF7"/>
+          </a:solidFill>
+          <a:ln>
+            <a:noFill/>
+          </a:ln>
+          <a:effectLst/>
+        </p:spPr>
+        <p:style>
+          <a:lnRef idx="1">
+            <a:schemeClr val="accent1"/>
+          </a:lnRef>
+          <a:fillRef idx="3">
+            <a:schemeClr val="accent1"/>
+          </a:fillRef>
+          <a:effectRef idx="2">
+            <a:schemeClr val="accent1"/>
+          </a:effectRef>
+          <a:fontRef idx="minor">
+            <a:schemeClr val="lt1"/>
+          </a:fontRef>
+        </p:style>
+        <p:txBody>
+          <a:bodyPr rtlCol="0" anchor="ctr"/>
+          <a:lstStyle/>
+          <a:p/>
+        </p:txBody>
+      </p:sp>
+      <p:sp>
+        <p:nvSpPr>
+          <p:cNvPr id="15364" name="Rounded Rectangle 15363"/>
+          <p:cNvSpPr/>
+          <p:nvPr/>
+        </p:nvSpPr>
+        <p:spPr>
+          <a:xfrm>
+            <a:off x="384048" y="1152144"/>
+            <a:ext cx="5760720" cy="4041648"/>
+          </a:xfrm>
+          <a:prstGeom prst="roundRect">
+            <a:avLst>
+              <a:gd name="adj" fmla="val 3500"/>
+            </a:avLst>
+          </a:prstGeom>
+          <a:solidFill>
+            <a:srgbClr val="F2ECE2"/>
+          </a:solidFill>
+          <a:ln>
+            <a:noFill/>
+          </a:ln>
+          <a:effectLst/>
+        </p:spPr>
+        <p:style>
+          <a:lnRef idx="1">
+            <a:schemeClr val="accent1"/>
+          </a:lnRef>
+          <a:fillRef idx="3">
+            <a:schemeClr val="accent1"/>
+          </a:fillRef>
+          <a:effectRef idx="2">
+            <a:schemeClr val="accent1"/>
+          </a:effectRef>
+          <a:fontRef idx="minor">
+            <a:schemeClr val="lt1"/>
+          </a:fontRef>
+        </p:style>
+        <p:txBody>
+          <a:bodyPr rtlCol="0" anchor="ctr"/>
+          <a:lstStyle/>
+          <a:p/>
+        </p:txBody>
+      </p:sp>
+      <p:sp>
+        <p:nvSpPr>
           <p:cNvPr id="15361" name="Title 1"/>
           <p:cNvSpPr>
             <a:spLocks noGrp="1"/>
@@ -5471,8 +5766,11 @@
               </a:rPr>
             </a:br>
             <a:r>
-              <a:rPr lang="en-US" sz="3600" b="1" dirty="0">
-                <a:latin typeface="Times New Roman" panose="02020603050405020304" pitchFamily="18" charset="0"/>
+              <a:rPr lang="en-US" sz="3400" b="1" dirty="0" i="0">
+                <a:solidFill>
+                  <a:srgbClr val="0E1A2B"/>
+                </a:solidFill>
+                <a:latin typeface="Cambria" panose="02020603050405020304" pitchFamily="18" charset="0"/>
                 <a:ea typeface="ＭＳ Ｐゴシック" pitchFamily="1" charset="-128"/>
                 <a:cs typeface="Times New Roman" panose="02020603050405020304" pitchFamily="18" charset="0"/>
               </a:rPr>
@@ -5491,8 +5789,8 @@
         </p:nvSpPr>
         <p:spPr bwMode="auto">
           <a:xfrm>
-            <a:off x="502920" y="1234440"/>
-            <a:ext cx="5623560" cy="4937760"/>
+            <a:off x="932688" y="1188720"/>
+            <a:ext cx="5029200" cy="4937760"/>
           </a:xfrm>
           <a:prstGeom prst="rect">
             <a:avLst/>
@@ -5513,16 +5811,16 @@
           <a:p>
             <a:pPr algn="l" marL="0" indent="0">
               <a:spcAft>
-                <a:spcPts val="600"/>
+                <a:spcPts val="500"/>
               </a:spcAft>
               <a:buNone/>
             </a:pPr>
             <a:r>
-              <a:rPr sz="1600" b="1">
-                <a:solidFill>
-                  <a:srgbClr val="C24A18"/>
-                </a:solidFill>
-                <a:latin typeface="Arial"/>
+              <a:rPr sz="1450" b="1">
+                <a:solidFill>
+                  <a:srgbClr val="D9541F"/>
+                </a:solidFill>
+                <a:latin typeface="Calibri"/>
               </a:rPr>
               <a:t>Proposed Solution</a:t>
             </a:r>
@@ -5534,16 +5832,16 @@
           <a:p>
             <a:pPr algn="l" marL="0" indent="0">
               <a:spcAft>
-                <a:spcPts val="600"/>
+                <a:spcPts val="500"/>
               </a:spcAft>
               <a:buNone/>
             </a:pPr>
             <a:r>
-              <a:rPr sz="1300" b="0">
+              <a:rPr sz="1150" b="0">
                 <a:solidFill>
                   <a:srgbClr val="121B2B"/>
                 </a:solidFill>
-                <a:latin typeface="Arial"/>
+                <a:latin typeface="Calibri"/>
               </a:rPr>
               <a:t>Traditional BMS follow rigid clock schedules. Eco-Loop turns the building into a self-correcting agent.</a:t>
             </a:r>
@@ -5551,70 +5849,70 @@
           <a:p>
             <a:pPr algn="l" marL="0" indent="0">
               <a:spcAft>
-                <a:spcPts val="600"/>
+                <a:spcPts val="500"/>
               </a:spcAft>
               <a:buNone/>
             </a:pPr>
             <a:r>
-              <a:rPr sz="1600" b="1">
-                <a:solidFill>
-                  <a:srgbClr val="C24A18"/>
-                </a:solidFill>
-                <a:latin typeface="Arial"/>
+              <a:rPr sz="1450" b="1">
+                <a:solidFill>
+                  <a:srgbClr val="D9541F"/>
+                </a:solidFill>
+                <a:latin typeface="Calibri"/>
               </a:rPr>
               <a:t>Detailed explanation</a:t>
             </a:r>
           </a:p>
           <a:p>
-            <a:pPr algn="l" marL="182880" indent="-182880">
+            <a:pPr algn="l" marL="165100" indent="-165100">
               <a:spcAft>
-                <a:spcPts val="600"/>
+                <a:spcPts val="500"/>
               </a:spcAft>
-              <a:buFont typeface="Arial"/>
+              <a:buFont typeface="Calibri"/>
               <a:buChar char="•"/>
             </a:pPr>
             <a:r>
-              <a:rPr sz="1250" b="0">
+              <a:rPr sz="1100" b="0">
                 <a:solidFill>
                   <a:srgbClr val="121B2B"/>
                 </a:solidFill>
-                <a:latin typeface="Arial"/>
-              </a:rPr>
-              <a:t>EnergyPlus runs inside the Python process; sensors are read every zone timestep</a:t>
-            </a:r>
-          </a:p>
-          <a:p>
-            <a:pPr algn="l" marL="182880" indent="-182880">
+                <a:latin typeface="Calibri"/>
+              </a:rPr>
+              <a:t>EnergyPlus runs inside the Python process; sensors read every zone timestep</a:t>
+            </a:r>
+          </a:p>
+          <a:p>
+            <a:pPr algn="l" marL="165100" indent="-165100">
               <a:spcAft>
-                <a:spcPts val="600"/>
+                <a:spcPts val="500"/>
               </a:spcAft>
-              <a:buFont typeface="Arial"/>
+              <a:buFont typeface="Calibri"/>
               <a:buChar char="•"/>
             </a:pPr>
             <a:r>
-              <a:rPr sz="1250" b="0">
+              <a:rPr sz="1100" b="0">
                 <a:solidFill>
                   <a:srgbClr val="121B2B"/>
                 </a:solidFill>
-                <a:latin typeface="Arial"/>
+                <a:latin typeface="Calibri"/>
               </a:rPr>
               <a:t>Every 60 simulated minutes the aggregated state goes to a local LLM through six MCP tools</a:t>
             </a:r>
           </a:p>
           <a:p>
-            <a:pPr algn="l" marL="182880" indent="-182880">
+            <a:pPr algn="l" marL="165100" indent="-165100">
               <a:spcAft>
-                <a:spcPts val="600"/>
+                <a:spcPts val="500"/>
               </a:spcAft>
-              <a:buFont typeface="Arial"/>
+              <a:buFont typeface="Calibri"/>
               <a:buChar char="•"/>
             </a:pPr>
             <a:r>
-              <a:rPr sz="1250" b="0">
+              <a:rPr sz="1100" b="0">
                 <a:solidFill>
                   <a:srgbClr val="121B2B"/>
                 </a:solidFill>
-                <a:latin typeface="Arial"/>
+                <a:latin typeface="Calibri"/>
               </a:rPr>
               <a:t>The model reasons over comfort, demand and grid carbon, then returns setpoints</a:t>
             </a:r>
@@ -5622,34 +5920,34 @@
           <a:p>
             <a:pPr algn="l" marL="0" indent="0">
               <a:spcAft>
-                <a:spcPts val="600"/>
+                <a:spcPts val="500"/>
               </a:spcAft>
               <a:buNone/>
             </a:pPr>
             <a:r>
-              <a:rPr sz="1600" b="1">
-                <a:solidFill>
-                  <a:srgbClr val="C24A18"/>
-                </a:solidFill>
-                <a:latin typeface="Arial"/>
+              <a:rPr sz="1450" b="1">
+                <a:solidFill>
+                  <a:srgbClr val="D9541F"/>
+                </a:solidFill>
+                <a:latin typeface="Calibri"/>
               </a:rPr>
               <a:t>How it addresses the problem</a:t>
             </a:r>
           </a:p>
           <a:p>
-            <a:pPr algn="l" marL="182880" indent="-182880">
+            <a:pPr algn="l" marL="165100" indent="-165100">
               <a:spcAft>
-                <a:spcPts val="600"/>
+                <a:spcPts val="500"/>
               </a:spcAft>
-              <a:buFont typeface="Arial"/>
+              <a:buFont typeface="Calibri"/>
               <a:buChar char="•"/>
             </a:pPr>
             <a:r>
-              <a:rPr sz="1250" b="0">
+              <a:rPr sz="1100" b="0">
                 <a:solidFill>
                   <a:srgbClr val="121B2B"/>
                 </a:solidFill>
-                <a:latin typeface="Arial"/>
+                <a:latin typeface="Calibri"/>
               </a:rPr>
               <a:t>Control adapts continuously to weather, occupancy and carbon intensity instead of a fixed schedule</a:t>
             </a:r>
@@ -5657,52 +5955,52 @@
           <a:p>
             <a:pPr algn="l" marL="0" indent="0">
               <a:spcAft>
-                <a:spcPts val="600"/>
+                <a:spcPts val="500"/>
               </a:spcAft>
               <a:buNone/>
             </a:pPr>
             <a:r>
-              <a:rPr sz="1600" b="1">
-                <a:solidFill>
-                  <a:srgbClr val="C24A18"/>
-                </a:solidFill>
-                <a:latin typeface="Arial"/>
+              <a:rPr sz="1450" b="1">
+                <a:solidFill>
+                  <a:srgbClr val="D9541F"/>
+                </a:solidFill>
+                <a:latin typeface="Calibri"/>
               </a:rPr>
               <a:t>Innovation and uniqueness</a:t>
             </a:r>
           </a:p>
           <a:p>
-            <a:pPr algn="l" marL="182880" indent="-182880">
+            <a:pPr algn="l" marL="165100" indent="-165100">
               <a:spcAft>
-                <a:spcPts val="600"/>
+                <a:spcPts val="500"/>
               </a:spcAft>
-              <a:buFont typeface="Arial"/>
+              <a:buFont typeface="Calibri"/>
               <a:buChar char="•"/>
             </a:pPr>
             <a:r>
-              <a:rPr sz="1250" b="0">
+              <a:rPr sz="1100" b="0">
                 <a:solidFill>
                   <a:srgbClr val="121B2B"/>
                 </a:solidFill>
-                <a:latin typeface="Arial"/>
-              </a:rPr>
-              <a:t>Setpoints are injected into the LIVE solver via the actuator API - no IDF rewrite, no restart, so the loop closes within one simulation</a:t>
-            </a:r>
-          </a:p>
-          <a:p>
-            <a:pPr algn="l" marL="182880" indent="-182880">
+                <a:latin typeface="Calibri"/>
+              </a:rPr>
+              <a:t>Setpoints are injected into the LIVE solver via the actuator API — no IDF rewrite, no restart, so the loop closes inside one simulation</a:t>
+            </a:r>
+          </a:p>
+          <a:p>
+            <a:pPr algn="l" marL="165100" indent="-165100">
               <a:spcAft>
-                <a:spcPts val="600"/>
+                <a:spcPts val="500"/>
               </a:spcAft>
-              <a:buFont typeface="Arial"/>
+              <a:buFont typeface="Calibri"/>
               <a:buChar char="•"/>
             </a:pPr>
             <a:r>
-              <a:rPr sz="1250" b="0">
+              <a:rPr sz="1100" b="0">
                 <a:solidFill>
                   <a:srgbClr val="121B2B"/>
                 </a:solidFill>
-                <a:latin typeface="Arial"/>
+                <a:latin typeface="Calibri"/>
               </a:rPr>
               <a:t>MCP is the safety boundary: every command is validated server-side before it can reach an actuator</a:t>
             </a:r>
@@ -5765,10 +6063,11 @@
               <a:defRPr/>
             </a:pPr>
             <a:r>
-              <a:rPr lang="en-US">
-                <a:solidFill>
-                  <a:schemeClr val="bg1"/>
-                </a:solidFill>
+              <a:rPr lang="en-US" sz="1000">
+                <a:solidFill>
+                  <a:srgbClr val="4A5768"/>
+                </a:solidFill>
+                <a:latin typeface="Calibri"/>
               </a:rPr>
               <a:t>@SIH Idea submission- Template</a:t>
             </a:r>
@@ -5780,9 +6079,62 @@
           </a:p>
         </p:txBody>
       </p:sp>
+      <p:sp>
+        <p:nvSpPr>
+          <p:cNvPr id="15363" name="Oval 15362"/>
+          <p:cNvSpPr/>
+          <p:nvPr/>
+        </p:nvSpPr>
+        <p:spPr>
+          <a:xfrm>
+            <a:off x="420624" y="1188720"/>
+            <a:ext cx="384048" cy="384048"/>
+          </a:xfrm>
+          <a:prstGeom prst="ellipse">
+            <a:avLst/>
+          </a:prstGeom>
+          <a:solidFill>
+            <a:srgbClr val="D9541F"/>
+          </a:solidFill>
+          <a:ln>
+            <a:noFill/>
+          </a:ln>
+          <a:effectLst/>
+        </p:spPr>
+        <p:style>
+          <a:lnRef idx="1">
+            <a:schemeClr val="accent1"/>
+          </a:lnRef>
+          <a:fillRef idx="3">
+            <a:schemeClr val="accent1"/>
+          </a:fillRef>
+          <a:effectRef idx="2">
+            <a:schemeClr val="accent1"/>
+          </a:effectRef>
+          <a:fontRef idx="minor">
+            <a:schemeClr val="lt1"/>
+          </a:fontRef>
+        </p:style>
+        <p:txBody>
+          <a:bodyPr rtlCol="0" anchor="ctr" lIns="0" rIns="0" tIns="0" bIns="0"/>
+          <a:lstStyle/>
+          <a:p>
+            <a:pPr algn="ctr"/>
+            <a:r>
+              <a:rPr sz="1300" b="1">
+                <a:solidFill>
+                  <a:srgbClr val="FFFFFF"/>
+                </a:solidFill>
+                <a:latin typeface="Calibri"/>
+              </a:rPr>
+              <a:t>1</a:t>
+            </a:r>
+          </a:p>
+        </p:txBody>
+      </p:sp>
       <p:pic>
         <p:nvPicPr>
-          <p:cNvPr id="15363" name="Picture 15362" descr="results.png"/>
+          <p:cNvPr id="15365" name="Picture 15364" descr="results.png"/>
           <p:cNvPicPr>
             <a:picLocks noChangeAspect="1"/>
           </p:cNvPicPr>
@@ -5796,8 +6148,8 @@
         </p:blipFill>
         <p:spPr>
           <a:xfrm>
-            <a:off x="6309360" y="1325880"/>
-            <a:ext cx="5577840" cy="1889268"/>
+            <a:off x="6355080" y="1280160"/>
+            <a:ext cx="5486400" cy="1858297"/>
           </a:xfrm>
           <a:prstGeom prst="rect">
             <a:avLst/>
@@ -5806,14 +6158,14 @@
       </p:pic>
       <p:sp>
         <p:nvSpPr>
-          <p:cNvPr id="15364" name="TextBox 15363"/>
+          <p:cNvPr id="15367" name="TextBox 15366"/>
           <p:cNvSpPr txBox="1"/>
           <p:nvPr/>
         </p:nvSpPr>
         <p:spPr>
           <a:xfrm>
-            <a:off x="6309360" y="3246120"/>
-            <a:ext cx="5577840" cy="1371600"/>
+            <a:off x="6528816" y="3273552"/>
+            <a:ext cx="5102352" cy="1170432"/>
           </a:xfrm>
           <a:prstGeom prst="rect">
             <a:avLst/>
@@ -5828,16 +6180,16 @@
           <a:p>
             <a:pPr algn="l" marL="0" indent="0">
               <a:spcAft>
-                <a:spcPts val="500"/>
+                <a:spcPts val="400"/>
               </a:spcAft>
               <a:buNone/>
             </a:pPr>
             <a:r>
-              <a:rPr sz="1500" b="1">
+              <a:rPr sz="1350" b="1">
                 <a:solidFill>
                   <a:srgbClr val="0D7A4F"/>
                 </a:solidFill>
-                <a:latin typeface="Arial"/>
+                <a:latin typeface="Calibri"/>
               </a:rPr>
               <a:t>Measured, not projected</a:t>
             </a:r>
@@ -5845,32 +6197,32 @@
           <a:p>
             <a:pPr algn="l" marL="0" indent="0">
               <a:spcAft>
-                <a:spcPts val="500"/>
+                <a:spcPts val="400"/>
               </a:spcAft>
               <a:buNone/>
             </a:pPr>
             <a:r>
-              <a:rPr sz="1250" b="0">
+              <a:rPr sz="1150" b="0">
                 <a:solidFill>
                   <a:srgbClr val="121B2B"/>
                 </a:solidFill>
-                <a:latin typeface="Arial"/>
-              </a:rPr>
-              <a:t>8.5% less HVAC energy across a summer week, while holding occupants closer to thermal neutrality than the baseline schedule (mean PMV -0.43 → -0.02).</a:t>
-            </a:r>
-          </a:p>
-        </p:txBody>
-      </p:sp>
-      <p:sp>
-        <p:nvSpPr>
-          <p:cNvPr id="15365" name="TextBox 15364"/>
+                <a:latin typeface="Calibri"/>
+              </a:rPr>
+              <a:t>8.5% less HVAC energy across a summer week, while holding occupants closer to thermal neutrality than the baseline (mean PMV −0.43 → −0.02).</a:t>
+            </a:r>
+          </a:p>
+        </p:txBody>
+      </p:sp>
+      <p:sp>
+        <p:nvSpPr>
+          <p:cNvPr id="15369" name="TextBox 15368"/>
           <p:cNvSpPr txBox="1"/>
           <p:nvPr/>
         </p:nvSpPr>
         <p:spPr>
           <a:xfrm>
-            <a:off x="6309360" y="4572000"/>
-            <a:ext cx="5577840" cy="1645920"/>
+            <a:off x="6528816" y="4809744"/>
+            <a:ext cx="5102352" cy="1261872"/>
           </a:xfrm>
           <a:prstGeom prst="rect">
             <a:avLst/>
@@ -5885,16 +6237,16 @@
           <a:p>
             <a:pPr algn="l" marL="0" indent="0">
               <a:spcAft>
-                <a:spcPts val="500"/>
+                <a:spcPts val="400"/>
               </a:spcAft>
               <a:buNone/>
             </a:pPr>
             <a:r>
-              <a:rPr sz="1500" b="1">
-                <a:solidFill>
-                  <a:srgbClr val="C24A18"/>
-                </a:solidFill>
-                <a:latin typeface="Arial"/>
+              <a:rPr sz="1350" b="1">
+                <a:solidFill>
+                  <a:srgbClr val="D9541F"/>
+                </a:solidFill>
+                <a:latin typeface="Calibri"/>
               </a:rPr>
               <a:t>Why it is different</a:t>
             </a:r>
@@ -5902,18 +6254,18 @@
           <a:p>
             <a:pPr algn="l" marL="0" indent="0">
               <a:spcAft>
-                <a:spcPts val="500"/>
+                <a:spcPts val="400"/>
               </a:spcAft>
               <a:buNone/>
             </a:pPr>
             <a:r>
-              <a:rPr sz="1250" b="0">
+              <a:rPr sz="1150" b="0">
                 <a:solidFill>
                   <a:srgbClr val="121B2B"/>
                 </a:solidFill>
-                <a:latin typeface="Arial"/>
-              </a:rPr>
-              <a:t>Most LLM-and-simulation work rewrites the model file and re-runs it. That can only compare finished runs — it cannot react to a zone drifting out of comfort at 14:00 on day 3. Eco-Loop closes the loop inside the simulation.</a:t>
+                <a:latin typeface="Calibri"/>
+              </a:rPr>
+              <a:t>Most LLM-and-simulation work rewrites the model file and re-runs it — that can only compare finished runs. It cannot react to a zone drifting out of comfort at 14:00 on day 3.</a:t>
             </a:r>
           </a:p>
         </p:txBody>
@@ -5929,6 +6281,14 @@
 <file path=ppt/slides/slide4.xml><?xml version="1.0" encoding="utf-8"?>
 <p:sld xmlns:a="http://schemas.openxmlformats.org/drawingml/2006/main" xmlns:r="http://schemas.openxmlformats.org/officeDocument/2006/relationships" xmlns:p="http://schemas.openxmlformats.org/presentationml/2006/main">
   <p:cSld>
+    <p:bg>
+      <p:bgPr>
+        <a:solidFill>
+          <a:srgbClr val="FAF7F2"/>
+        </a:solidFill>
+        <a:effectLst/>
+      </p:bgPr>
+    </p:bg>
     <p:spTree>
       <p:nvGrpSpPr>
         <p:cNvPr id="1" name=""/>
@@ -5945,6 +6305,50 @@
       </p:grpSpPr>
       <p:sp>
         <p:nvSpPr>
+          <p:cNvPr id="17412" name="Rounded Rectangle 17411"/>
+          <p:cNvSpPr/>
+          <p:nvPr/>
+        </p:nvSpPr>
+        <p:spPr>
+          <a:xfrm>
+            <a:off x="384048" y="1060704"/>
+            <a:ext cx="11430000" cy="1298448"/>
+          </a:xfrm>
+          <a:prstGeom prst="roundRect">
+            <a:avLst>
+              <a:gd name="adj" fmla="val 3500"/>
+            </a:avLst>
+          </a:prstGeom>
+          <a:solidFill>
+            <a:srgbClr val="F2ECE2"/>
+          </a:solidFill>
+          <a:ln>
+            <a:noFill/>
+          </a:ln>
+          <a:effectLst/>
+        </p:spPr>
+        <p:style>
+          <a:lnRef idx="1">
+            <a:schemeClr val="accent1"/>
+          </a:lnRef>
+          <a:fillRef idx="3">
+            <a:schemeClr val="accent1"/>
+          </a:fillRef>
+          <a:effectRef idx="2">
+            <a:schemeClr val="accent1"/>
+          </a:effectRef>
+          <a:fontRef idx="minor">
+            <a:schemeClr val="lt1"/>
+          </a:fontRef>
+        </p:style>
+        <p:txBody>
+          <a:bodyPr rtlCol="0" anchor="ctr"/>
+          <a:lstStyle/>
+          <a:p/>
+        </p:txBody>
+      </p:sp>
+      <p:sp>
+        <p:nvSpPr>
           <p:cNvPr id="17409" name="Title 1"/>
           <p:cNvSpPr>
             <a:spLocks noGrp="1"/>
@@ -5960,8 +6364,11 @@
           <a:p>
             <a:pPr eaLnBrk="1" hangingPunct="1"/>
             <a:r>
-              <a:rPr lang="en-US" sz="3600" b="1" dirty="0">
-                <a:latin typeface="Times New Roman" panose="02020603050405020304" pitchFamily="18" charset="0"/>
+              <a:rPr lang="en-US" sz="3400" b="1" dirty="0" i="0">
+                <a:solidFill>
+                  <a:srgbClr val="0E1A2B"/>
+                </a:solidFill>
+                <a:latin typeface="Cambria" panose="02020603050405020304" pitchFamily="18" charset="0"/>
                 <a:ea typeface="ＭＳ Ｐゴシック" pitchFamily="1" charset="-128"/>
                 <a:cs typeface="Times New Roman" panose="02020603050405020304" pitchFamily="18" charset="0"/>
               </a:rPr>
@@ -5980,8 +6387,8 @@
         </p:nvSpPr>
         <p:spPr bwMode="auto">
           <a:xfrm>
-            <a:off x="612648" y="1051560"/>
-            <a:ext cx="10972800" cy="1371600"/>
+            <a:off x="932688" y="1133856"/>
+            <a:ext cx="10607040" cy="1188720"/>
           </a:xfrm>
           <a:prstGeom prst="rect">
             <a:avLst/>
@@ -6002,36 +6409,36 @@
           <a:p>
             <a:pPr marL="0" indent="0" algn="l">
               <a:spcAft>
-                <a:spcPts val="700"/>
+                <a:spcPts val="600"/>
               </a:spcAft>
               <a:buFont typeface="Arial" panose="020B0604020202020204" pitchFamily="34" charset="0"/>
               <a:buNone/>
             </a:pPr>
             <a:r>
-              <a:rPr sz="1300" b="0">
+              <a:rPr sz="1150" b="0">
                 <a:solidFill>
                   <a:srgbClr val="121B2B"/>
                 </a:solidFill>
-                <a:latin typeface="Arial"/>
-              </a:rPr>
-              <a:t>Technologies   EnergyPlus 26.1 (pyenergyplus C API)  ·  Python  ·  FastMCP over streamable HTTP  ·  Ollama running Llama 3.2 3B  ·  Pydantic validation  ·  Streamlit + Plotly dashboard</a:t>
+                <a:latin typeface="Calibri"/>
+              </a:rPr>
+              <a:t>Technologies    EnergyPlus 26.1 (pyenergyplus C API) · Python · FastMCP over streamable HTTP · Ollama running Llama 3.2 3B · Pydantic validation · Streamlit + Plotly dashboard</a:t>
             </a:r>
           </a:p>
           <a:p>
             <a:pPr algn="l" marL="0" indent="0">
               <a:spcAft>
-                <a:spcPts val="700"/>
+                <a:spcPts val="600"/>
               </a:spcAft>
               <a:buNone/>
             </a:pPr>
             <a:r>
-              <a:rPr sz="1300" b="0">
+              <a:rPr sz="1150" b="0">
                 <a:solidFill>
                   <a:srgbClr val="121B2B"/>
                 </a:solidFill>
-                <a:latin typeface="Arial"/>
-              </a:rPr>
-              <a:t>Methodology   sample every timestep  →  aggregate per control interval  →  LLM tool-calling turn  →  validate  →  inject into live actuators</a:t>
+                <a:latin typeface="Calibri"/>
+              </a:rPr>
+              <a:t>Methodology    sample every timestep → aggregate per control interval → LLM tool-calling turn → validate → inject into live actuators</a:t>
             </a:r>
           </a:p>
         </p:txBody>
@@ -6092,10 +6499,11 @@
               <a:defRPr/>
             </a:pPr>
             <a:r>
-              <a:rPr lang="en-US">
-                <a:solidFill>
-                  <a:schemeClr val="bg1"/>
-                </a:solidFill>
+              <a:rPr lang="en-US" sz="1000">
+                <a:solidFill>
+                  <a:srgbClr val="4A5768"/>
+                </a:solidFill>
+                <a:latin typeface="Calibri"/>
               </a:rPr>
               <a:t>@SIH Idea submission- Template</a:t>
             </a:r>
@@ -6107,9 +6515,62 @@
           </a:p>
         </p:txBody>
       </p:sp>
+      <p:sp>
+        <p:nvSpPr>
+          <p:cNvPr id="17411" name="Oval 17410"/>
+          <p:cNvSpPr/>
+          <p:nvPr/>
+        </p:nvSpPr>
+        <p:spPr>
+          <a:xfrm>
+            <a:off x="420624" y="1097280"/>
+            <a:ext cx="384048" cy="384048"/>
+          </a:xfrm>
+          <a:prstGeom prst="ellipse">
+            <a:avLst/>
+          </a:prstGeom>
+          <a:solidFill>
+            <a:srgbClr val="D9541F"/>
+          </a:solidFill>
+          <a:ln>
+            <a:noFill/>
+          </a:ln>
+          <a:effectLst/>
+        </p:spPr>
+        <p:style>
+          <a:lnRef idx="1">
+            <a:schemeClr val="accent1"/>
+          </a:lnRef>
+          <a:fillRef idx="3">
+            <a:schemeClr val="accent1"/>
+          </a:fillRef>
+          <a:effectRef idx="2">
+            <a:schemeClr val="accent1"/>
+          </a:effectRef>
+          <a:fontRef idx="minor">
+            <a:schemeClr val="lt1"/>
+          </a:fontRef>
+        </p:style>
+        <p:txBody>
+          <a:bodyPr rtlCol="0" anchor="ctr" lIns="0" rIns="0" tIns="0" bIns="0"/>
+          <a:lstStyle/>
+          <a:p>
+            <a:pPr algn="ctr"/>
+            <a:r>
+              <a:rPr sz="1300" b="1">
+                <a:solidFill>
+                  <a:srgbClr val="FFFFFF"/>
+                </a:solidFill>
+                <a:latin typeface="Calibri"/>
+              </a:rPr>
+              <a:t>2</a:t>
+            </a:r>
+          </a:p>
+        </p:txBody>
+      </p:sp>
       <p:pic>
         <p:nvPicPr>
-          <p:cNvPr id="17411" name="Picture 17410" descr="arch.png"/>
+          <p:cNvPr id="17413" name="Picture 17412" descr="arch.png"/>
           <p:cNvPicPr>
             <a:picLocks noChangeAspect="1"/>
           </p:cNvPicPr>
@@ -6123,8 +6584,8 @@
         </p:blipFill>
         <p:spPr>
           <a:xfrm>
-            <a:off x="822960" y="2514600"/>
-            <a:ext cx="10561320" cy="3913650"/>
+            <a:off x="658368" y="2596896"/>
+            <a:ext cx="10881360" cy="4032246"/>
           </a:xfrm>
           <a:prstGeom prst="rect">
             <a:avLst/>
@@ -6142,6 +6603,14 @@
 <file path=ppt/slides/slide5.xml><?xml version="1.0" encoding="utf-8"?>
 <p:sld xmlns:a="http://schemas.openxmlformats.org/drawingml/2006/main" xmlns:r="http://schemas.openxmlformats.org/officeDocument/2006/relationships" xmlns:p="http://schemas.openxmlformats.org/presentationml/2006/main">
   <p:cSld>
+    <p:bg>
+      <p:bgPr>
+        <a:solidFill>
+          <a:srgbClr val="FAF7F2"/>
+        </a:solidFill>
+        <a:effectLst/>
+      </p:bgPr>
+    </p:bg>
     <p:spTree>
       <p:nvGrpSpPr>
         <p:cNvPr id="1" name=""/>
@@ -6158,6 +6627,270 @@
       </p:grpSpPr>
       <p:sp>
         <p:nvSpPr>
+          <p:cNvPr id="17421" name="Rounded Rectangle 17420"/>
+          <p:cNvSpPr/>
+          <p:nvPr/>
+        </p:nvSpPr>
+        <p:spPr>
+          <a:xfrm>
+            <a:off x="384048" y="5029200"/>
+            <a:ext cx="11420856" cy="1170432"/>
+          </a:xfrm>
+          <a:prstGeom prst="roundRect">
+            <a:avLst>
+              <a:gd name="adj" fmla="val 3500"/>
+            </a:avLst>
+          </a:prstGeom>
+          <a:solidFill>
+            <a:srgbClr val="E9EFF7"/>
+          </a:solidFill>
+          <a:ln>
+            <a:noFill/>
+          </a:ln>
+          <a:effectLst/>
+        </p:spPr>
+        <p:style>
+          <a:lnRef idx="1">
+            <a:schemeClr val="accent1"/>
+          </a:lnRef>
+          <a:fillRef idx="3">
+            <a:schemeClr val="accent1"/>
+          </a:fillRef>
+          <a:effectRef idx="2">
+            <a:schemeClr val="accent1"/>
+          </a:effectRef>
+          <a:fontRef idx="minor">
+            <a:schemeClr val="lt1"/>
+          </a:fontRef>
+        </p:style>
+        <p:txBody>
+          <a:bodyPr rtlCol="0" anchor="ctr"/>
+          <a:lstStyle/>
+          <a:p/>
+        </p:txBody>
+      </p:sp>
+      <p:sp>
+        <p:nvSpPr>
+          <p:cNvPr id="17419" name="Rounded Rectangle 17418"/>
+          <p:cNvSpPr/>
+          <p:nvPr/>
+        </p:nvSpPr>
+        <p:spPr>
+          <a:xfrm>
+            <a:off x="6172200" y="2487168"/>
+            <a:ext cx="5632704" cy="2395728"/>
+          </a:xfrm>
+          <a:prstGeom prst="roundRect">
+            <a:avLst>
+              <a:gd name="adj" fmla="val 3500"/>
+            </a:avLst>
+          </a:prstGeom>
+          <a:solidFill>
+            <a:srgbClr val="E9EFF7"/>
+          </a:solidFill>
+          <a:ln>
+            <a:noFill/>
+          </a:ln>
+          <a:effectLst/>
+        </p:spPr>
+        <p:style>
+          <a:lnRef idx="1">
+            <a:schemeClr val="accent1"/>
+          </a:lnRef>
+          <a:fillRef idx="3">
+            <a:schemeClr val="accent1"/>
+          </a:fillRef>
+          <a:effectRef idx="2">
+            <a:schemeClr val="accent1"/>
+          </a:effectRef>
+          <a:fontRef idx="minor">
+            <a:schemeClr val="lt1"/>
+          </a:fontRef>
+        </p:style>
+        <p:txBody>
+          <a:bodyPr rtlCol="0" anchor="ctr"/>
+          <a:lstStyle/>
+          <a:p/>
+        </p:txBody>
+      </p:sp>
+      <p:sp>
+        <p:nvSpPr>
+          <p:cNvPr id="17418" name="Rounded Rectangle 17417"/>
+          <p:cNvSpPr/>
+          <p:nvPr/>
+        </p:nvSpPr>
+        <p:spPr>
+          <a:xfrm>
+            <a:off x="384048" y="2487168"/>
+            <a:ext cx="5669280" cy="2395728"/>
+          </a:xfrm>
+          <a:prstGeom prst="roundRect">
+            <a:avLst>
+              <a:gd name="adj" fmla="val 3500"/>
+            </a:avLst>
+          </a:prstGeom>
+          <a:solidFill>
+            <a:srgbClr val="F2ECE2"/>
+          </a:solidFill>
+          <a:ln>
+            <a:noFill/>
+          </a:ln>
+          <a:effectLst/>
+        </p:spPr>
+        <p:style>
+          <a:lnRef idx="1">
+            <a:schemeClr val="accent1"/>
+          </a:lnRef>
+          <a:fillRef idx="3">
+            <a:schemeClr val="accent1"/>
+          </a:fillRef>
+          <a:effectRef idx="2">
+            <a:schemeClr val="accent1"/>
+          </a:effectRef>
+          <a:fontRef idx="minor">
+            <a:schemeClr val="lt1"/>
+          </a:fontRef>
+        </p:style>
+        <p:txBody>
+          <a:bodyPr rtlCol="0" anchor="ctr"/>
+          <a:lstStyle/>
+          <a:p/>
+        </p:txBody>
+      </p:sp>
+      <p:sp>
+        <p:nvSpPr>
+          <p:cNvPr id="17416" name="Rounded Rectangle 17415"/>
+          <p:cNvSpPr/>
+          <p:nvPr/>
+        </p:nvSpPr>
+        <p:spPr>
+          <a:xfrm>
+            <a:off x="8247888" y="1005840"/>
+            <a:ext cx="3456432" cy="1133856"/>
+          </a:xfrm>
+          <a:prstGeom prst="roundRect">
+            <a:avLst>
+              <a:gd name="adj" fmla="val 3500"/>
+            </a:avLst>
+          </a:prstGeom>
+          <a:solidFill>
+            <a:srgbClr val="F2ECE2"/>
+          </a:solidFill>
+          <a:ln>
+            <a:noFill/>
+          </a:ln>
+          <a:effectLst/>
+        </p:spPr>
+        <p:style>
+          <a:lnRef idx="1">
+            <a:schemeClr val="accent1"/>
+          </a:lnRef>
+          <a:fillRef idx="3">
+            <a:schemeClr val="accent1"/>
+          </a:fillRef>
+          <a:effectRef idx="2">
+            <a:schemeClr val="accent1"/>
+          </a:effectRef>
+          <a:fontRef idx="minor">
+            <a:schemeClr val="lt1"/>
+          </a:fontRef>
+        </p:style>
+        <p:txBody>
+          <a:bodyPr rtlCol="0" anchor="ctr"/>
+          <a:lstStyle/>
+          <a:p/>
+        </p:txBody>
+      </p:sp>
+      <p:sp>
+        <p:nvSpPr>
+          <p:cNvPr id="17414" name="Rounded Rectangle 17413"/>
+          <p:cNvSpPr/>
+          <p:nvPr/>
+        </p:nvSpPr>
+        <p:spPr>
+          <a:xfrm>
+            <a:off x="4590288" y="1005840"/>
+            <a:ext cx="3456432" cy="1133856"/>
+          </a:xfrm>
+          <a:prstGeom prst="roundRect">
+            <a:avLst>
+              <a:gd name="adj" fmla="val 3500"/>
+            </a:avLst>
+          </a:prstGeom>
+          <a:solidFill>
+            <a:srgbClr val="F2ECE2"/>
+          </a:solidFill>
+          <a:ln>
+            <a:noFill/>
+          </a:ln>
+          <a:effectLst/>
+        </p:spPr>
+        <p:style>
+          <a:lnRef idx="1">
+            <a:schemeClr val="accent1"/>
+          </a:lnRef>
+          <a:fillRef idx="3">
+            <a:schemeClr val="accent1"/>
+          </a:fillRef>
+          <a:effectRef idx="2">
+            <a:schemeClr val="accent1"/>
+          </a:effectRef>
+          <a:fontRef idx="minor">
+            <a:schemeClr val="lt1"/>
+          </a:fontRef>
+        </p:style>
+        <p:txBody>
+          <a:bodyPr rtlCol="0" anchor="ctr"/>
+          <a:lstStyle/>
+          <a:p/>
+        </p:txBody>
+      </p:sp>
+      <p:sp>
+        <p:nvSpPr>
+          <p:cNvPr id="17412" name="Rounded Rectangle 17411"/>
+          <p:cNvSpPr/>
+          <p:nvPr/>
+        </p:nvSpPr>
+        <p:spPr>
+          <a:xfrm>
+            <a:off x="932688" y="1005840"/>
+            <a:ext cx="3456432" cy="1133856"/>
+          </a:xfrm>
+          <a:prstGeom prst="roundRect">
+            <a:avLst>
+              <a:gd name="adj" fmla="val 3500"/>
+            </a:avLst>
+          </a:prstGeom>
+          <a:solidFill>
+            <a:srgbClr val="F2ECE2"/>
+          </a:solidFill>
+          <a:ln>
+            <a:noFill/>
+          </a:ln>
+          <a:effectLst/>
+        </p:spPr>
+        <p:style>
+          <a:lnRef idx="1">
+            <a:schemeClr val="accent1"/>
+          </a:lnRef>
+          <a:fillRef idx="3">
+            <a:schemeClr val="accent1"/>
+          </a:fillRef>
+          <a:effectRef idx="2">
+            <a:schemeClr val="accent1"/>
+          </a:effectRef>
+          <a:fontRef idx="minor">
+            <a:schemeClr val="lt1"/>
+          </a:fontRef>
+        </p:style>
+        <p:txBody>
+          <a:bodyPr rtlCol="0" anchor="ctr"/>
+          <a:lstStyle/>
+          <a:p/>
+        </p:txBody>
+      </p:sp>
+      <p:sp>
+        <p:nvSpPr>
           <p:cNvPr id="17409" name="Title 1"/>
           <p:cNvSpPr>
             <a:spLocks noGrp="1"/>
@@ -6173,8 +6906,11 @@
           <a:p>
             <a:pPr eaLnBrk="1" hangingPunct="1"/>
             <a:r>
-              <a:rPr lang="en-US" sz="3600" b="1" dirty="0">
-                <a:latin typeface="Times New Roman" panose="02020603050405020304" pitchFamily="18" charset="0"/>
+              <a:rPr lang="en-US" sz="3400" b="1" dirty="0" i="0">
+                <a:solidFill>
+                  <a:srgbClr val="0E1A2B"/>
+                </a:solidFill>
+                <a:latin typeface="Cambria" panose="02020603050405020304" pitchFamily="18" charset="0"/>
                 <a:ea typeface="ＭＳ Ｐゴシック" pitchFamily="1" charset="-128"/>
                 <a:cs typeface="Times New Roman" panose="02020603050405020304" pitchFamily="18" charset="0"/>
               </a:rPr>
@@ -6193,8 +6929,8 @@
         </p:nvSpPr>
         <p:spPr bwMode="auto">
           <a:xfrm>
-            <a:off x="612648" y="2423160"/>
-            <a:ext cx="5486400" cy="4023360"/>
+            <a:off x="658368" y="2596896"/>
+            <a:ext cx="5120640" cy="3474720"/>
           </a:xfrm>
           <a:prstGeom prst="rect">
             <a:avLst/>
@@ -6221,7 +6957,7 @@
                 <a:spcPct val="0"/>
               </a:spcBef>
               <a:spcAft>
-                <a:spcPts val="500"/>
+                <a:spcPts val="600"/>
               </a:spcAft>
               <a:buClrTx/>
               <a:buSzTx/>
@@ -6231,11 +6967,11 @@
               <a:buNone/>
             </a:pPr>
             <a:r>
-              <a:rPr sz="1600" b="1">
-                <a:solidFill>
-                  <a:srgbClr val="C24A18"/>
-                </a:solidFill>
-                <a:latin typeface="Arial"/>
+              <a:rPr sz="1400" b="1">
+                <a:solidFill>
+                  <a:srgbClr val="D9541F"/>
+                </a:solidFill>
+                <a:latin typeface="Calibri"/>
               </a:rPr>
               <a:t>Feasibility</a:t>
             </a:r>
@@ -6255,37 +6991,37 @@
             </a:endParaRPr>
           </a:p>
           <a:p>
-            <a:pPr algn="l" marL="182880" indent="-182880">
+            <a:pPr algn="l" marL="165100" indent="-165100">
               <a:spcAft>
-                <a:spcPts val="500"/>
+                <a:spcPts val="600"/>
               </a:spcAft>
-              <a:buFont typeface="Arial"/>
+              <a:buFont typeface="Calibri"/>
               <a:buChar char="•"/>
             </a:pPr>
             <a:r>
-              <a:rPr sz="1250" b="0">
+              <a:rPr sz="1100" b="0">
                 <a:solidFill>
                   <a:srgbClr val="121B2B"/>
                 </a:solidFill>
-                <a:latin typeface="Arial"/>
-              </a:rPr>
-              <a:t>Runs end to end on one consumer laptop - 4 GB VRAM, no cloud, no API cost</a:t>
-            </a:r>
-          </a:p>
-          <a:p>
-            <a:pPr algn="l" marL="182880" indent="-182880">
+                <a:latin typeface="Calibri"/>
+              </a:rPr>
+              <a:t>Runs end to end on one consumer laptop — 4 GB VRAM, no cloud, no API cost</a:t>
+            </a:r>
+          </a:p>
+          <a:p>
+            <a:pPr algn="l" marL="165100" indent="-165100">
               <a:spcAft>
-                <a:spcPts val="500"/>
+                <a:spcPts val="600"/>
               </a:spcAft>
-              <a:buFont typeface="Arial"/>
+              <a:buFont typeface="Calibri"/>
               <a:buChar char="•"/>
             </a:pPr>
             <a:r>
-              <a:rPr sz="1250" b="0">
+              <a:rPr sz="1100" b="0">
                 <a:solidFill>
                   <a:srgbClr val="121B2B"/>
                 </a:solidFill>
-                <a:latin typeface="Arial"/>
+                <a:latin typeface="Calibri"/>
               </a:rPr>
               <a:t>Fully open source: EnergyPlus, Llama 3.2, FastMCP</a:t>
             </a:r>
@@ -6293,70 +7029,70 @@
           <a:p>
             <a:pPr algn="l" marL="0" indent="0">
               <a:spcAft>
-                <a:spcPts val="500"/>
+                <a:spcPts val="600"/>
               </a:spcAft>
               <a:buNone/>
             </a:pPr>
             <a:r>
-              <a:rPr sz="1600" b="1">
-                <a:solidFill>
-                  <a:srgbClr val="C24A18"/>
-                </a:solidFill>
-                <a:latin typeface="Arial"/>
+              <a:rPr sz="1400" b="1">
+                <a:solidFill>
+                  <a:srgbClr val="D9541F"/>
+                </a:solidFill>
+                <a:latin typeface="Calibri"/>
               </a:rPr>
               <a:t>Potential challenges and risks</a:t>
             </a:r>
           </a:p>
           <a:p>
-            <a:pPr algn="l" marL="182880" indent="-182880">
+            <a:pPr algn="l" marL="165100" indent="-165100">
               <a:spcAft>
-                <a:spcPts val="500"/>
+                <a:spcPts val="600"/>
               </a:spcAft>
-              <a:buFont typeface="Arial"/>
+              <a:buFont typeface="Calibri"/>
               <a:buChar char="•"/>
             </a:pPr>
             <a:r>
-              <a:rPr sz="1250" b="0">
+              <a:rPr sz="1100" b="0">
                 <a:solidFill>
                   <a:srgbClr val="121B2B"/>
                 </a:solidFill>
-                <a:latin typeface="Arial"/>
+                <a:latin typeface="Calibri"/>
               </a:rPr>
               <a:t>LLM latency inside a blocking simulation callback</a:t>
             </a:r>
           </a:p>
           <a:p>
-            <a:pPr algn="l" marL="182880" indent="-182880">
+            <a:pPr algn="l" marL="165100" indent="-165100">
               <a:spcAft>
-                <a:spcPts val="500"/>
+                <a:spcPts val="600"/>
               </a:spcAft>
-              <a:buFont typeface="Arial"/>
+              <a:buFont typeface="Calibri"/>
               <a:buChar char="•"/>
             </a:pPr>
             <a:r>
-              <a:rPr sz="1250" b="0">
+              <a:rPr sz="1100" b="0">
                 <a:solidFill>
                   <a:srgbClr val="121B2B"/>
                 </a:solidFill>
-                <a:latin typeface="Arial"/>
+                <a:latin typeface="Calibri"/>
               </a:rPr>
               <a:t>A small model can move the wrong setpoint, or run heating and cooling against each other</a:t>
             </a:r>
           </a:p>
           <a:p>
-            <a:pPr algn="l" marL="182880" indent="-182880">
+            <a:pPr algn="l" marL="165100" indent="-165100">
               <a:spcAft>
-                <a:spcPts val="500"/>
+                <a:spcPts val="600"/>
               </a:spcAft>
-              <a:buFont typeface="Arial"/>
+              <a:buFont typeface="Calibri"/>
               <a:buChar char="•"/>
             </a:pPr>
             <a:r>
-              <a:rPr sz="1250" b="0">
+              <a:rPr sz="1100" b="0">
                 <a:solidFill>
                   <a:srgbClr val="121B2B"/>
                 </a:solidFill>
-                <a:latin typeface="Arial"/>
+                <a:latin typeface="Calibri"/>
               </a:rPr>
               <a:t>One setpoint pair cannot satisfy five differently-loaded zones</a:t>
             </a:r>
@@ -6484,17 +7220,17 @@
               <a:defRPr/>
             </a:pPr>
             <a:r>
-              <a:rPr kumimoji="0" lang="en-US" sz="1200" b="0" i="0" u="none" strike="noStrike" kern="1200" cap="none" spc="0" normalizeH="0" baseline="0" noProof="0">
+              <a:rPr kumimoji="0" lang="en-US" sz="1000" b="0" i="0" u="none" strike="noStrike" kern="1200" cap="none" spc="0" normalizeH="0" baseline="0" noProof="0">
                 <a:ln>
                   <a:noFill/>
                 </a:ln>
                 <a:solidFill>
-                  <a:prstClr val="white"/>
+                  <a:srgbClr val="4A5768"/>
                 </a:solidFill>
                 <a:effectLst/>
                 <a:uLnTx/>
                 <a:uFillTx/>
-                <a:latin typeface="TradeGothic"/>
+                <a:latin typeface="Calibri"/>
                 <a:ea typeface="+mn-ea"/>
                 <a:cs typeface="+mn-cs"/>
               </a:rPr>
@@ -6519,14 +7255,67 @@
       </p:sp>
       <p:sp>
         <p:nvSpPr>
-          <p:cNvPr id="17411" name="TextBox 17410"/>
+          <p:cNvPr id="17411" name="Oval 17410"/>
+          <p:cNvSpPr/>
+          <p:nvPr/>
+        </p:nvSpPr>
+        <p:spPr>
+          <a:xfrm>
+            <a:off x="420624" y="1042415"/>
+            <a:ext cx="384048" cy="384048"/>
+          </a:xfrm>
+          <a:prstGeom prst="ellipse">
+            <a:avLst/>
+          </a:prstGeom>
+          <a:solidFill>
+            <a:srgbClr val="D9541F"/>
+          </a:solidFill>
+          <a:ln>
+            <a:noFill/>
+          </a:ln>
+          <a:effectLst/>
+        </p:spPr>
+        <p:style>
+          <a:lnRef idx="1">
+            <a:schemeClr val="accent1"/>
+          </a:lnRef>
+          <a:fillRef idx="3">
+            <a:schemeClr val="accent1"/>
+          </a:fillRef>
+          <a:effectRef idx="2">
+            <a:schemeClr val="accent1"/>
+          </a:effectRef>
+          <a:fontRef idx="minor">
+            <a:schemeClr val="lt1"/>
+          </a:fontRef>
+        </p:style>
+        <p:txBody>
+          <a:bodyPr rtlCol="0" anchor="ctr" lIns="0" rIns="0" tIns="0" bIns="0"/>
+          <a:lstStyle/>
+          <a:p>
+            <a:pPr algn="ctr"/>
+            <a:r>
+              <a:rPr sz="1300" b="1">
+                <a:solidFill>
+                  <a:srgbClr val="FFFFFF"/>
+                </a:solidFill>
+                <a:latin typeface="Calibri"/>
+              </a:rPr>
+              <a:t>3</a:t>
+            </a:r>
+          </a:p>
+        </p:txBody>
+      </p:sp>
+      <p:sp>
+        <p:nvSpPr>
+          <p:cNvPr id="17413" name="TextBox 17412"/>
           <p:cNvSpPr txBox="1"/>
           <p:nvPr/>
         </p:nvSpPr>
         <p:spPr>
           <a:xfrm>
-            <a:off x="6400800" y="2423160"/>
-            <a:ext cx="5212080" cy="4023360"/>
+            <a:off x="1152144" y="1106424"/>
+            <a:ext cx="3017520" cy="932688"/>
           </a:xfrm>
           <a:prstGeom prst="rect">
             <a:avLst/>
@@ -6541,104 +7330,49 @@
           <a:p>
             <a:pPr algn="l" marL="0" indent="0">
               <a:spcAft>
-                <a:spcPts val="900"/>
+                <a:spcPts val="100"/>
               </a:spcAft>
               <a:buNone/>
             </a:pPr>
             <a:r>
-              <a:rPr sz="1600" b="1">
-                <a:solidFill>
-                  <a:srgbClr val="C24A18"/>
-                </a:solidFill>
-                <a:latin typeface="Arial"/>
-              </a:rPr>
-              <a:t>Strategies for overcoming them</a:t>
-            </a:r>
-          </a:p>
-          <a:p>
-            <a:pPr algn="l" marL="182880" indent="-182880">
+              <a:rPr sz="2600" b="1">
+                <a:solidFill>
+                  <a:srgbClr val="0D7A4F"/>
+                </a:solidFill>
+                <a:latin typeface="Calibri"/>
+              </a:rPr>
+              <a:t>336 / 336</a:t>
+            </a:r>
+          </a:p>
+          <a:p>
+            <a:pPr algn="l" marL="0" indent="0">
               <a:spcAft>
-                <a:spcPts val="900"/>
+                <a:spcPts val="100"/>
               </a:spcAft>
-              <a:buFont typeface="Arial"/>
-              <a:buChar char="•"/>
-            </a:pPr>
-            <a:r>
-              <a:rPr sz="1250" b="0">
-                <a:solidFill>
-                  <a:srgbClr val="121B2B"/>
-                </a:solidFill>
-                <a:latin typeface="Arial"/>
-              </a:rPr>
-              <a:t>Interval batching + a hard per-turn deadline; on timeout the loop holds the last accepted command rather than stalling</a:t>
-            </a:r>
-          </a:p>
-          <a:p>
-            <a:pPr algn="l" marL="182880" indent="-182880">
-              <a:spcAft>
-                <a:spcPts val="900"/>
-              </a:spcAft>
-              <a:buFont typeface="Arial"/>
-              <a:buChar char="•"/>
-            </a:pPr>
-            <a:r>
-              <a:rPr sz="1250" b="0">
-                <a:solidFill>
-                  <a:srgbClr val="121B2B"/>
-                </a:solidFill>
-                <a:latin typeface="Arial"/>
-              </a:rPr>
-              <a:t>Observations state the required direction, so the model cannot invert the physics</a:t>
-            </a:r>
-          </a:p>
-          <a:p>
-            <a:pPr algn="l" marL="182880" indent="-182880">
-              <a:spcAft>
-                <a:spcPts val="900"/>
-              </a:spcAft>
-              <a:buFont typeface="Arial"/>
-              <a:buChar char="•"/>
-            </a:pPr>
-            <a:r>
-              <a:rPr sz="1250" b="0">
-                <a:solidFill>
-                  <a:srgbClr val="121B2B"/>
-                </a:solidFill>
-                <a:latin typeface="Arial"/>
-              </a:rPr>
-              <a:t>Seasonal changeover parks the idle mode's setpoint - heating and cooling can never fight</a:t>
-            </a:r>
-          </a:p>
-          <a:p>
-            <a:pPr algn="l" marL="182880" indent="-182880">
-              <a:spcAft>
-                <a:spcPts val="900"/>
-              </a:spcAft>
-              <a:buFont typeface="Arial"/>
-              <a:buChar char="•"/>
-            </a:pPr>
-            <a:r>
-              <a:rPr sz="1250" b="0">
-                <a:solidFill>
-                  <a:srgbClr val="121B2B"/>
-                </a:solidFill>
-                <a:latin typeface="Arial"/>
-              </a:rPr>
-              <a:t>A per-zone proportional trim corrects each zone from its own PMV</a:t>
-            </a:r>
-          </a:p>
-        </p:txBody>
-      </p:sp>
-      <p:sp>
-        <p:nvSpPr>
-          <p:cNvPr id="17412" name="TextBox 17411"/>
+              <a:buNone/>
+            </a:pPr>
+            <a:r>
+              <a:rPr sz="1050" b="0">
+                <a:solidFill>
+                  <a:srgbClr val="4A5768"/>
+                </a:solidFill>
+                <a:latin typeface="Calibri"/>
+              </a:rPr>
+              <a:t>agent turns — 0 fallbacks, 0 timeouts, 0 actuation errors</a:t>
+            </a:r>
+          </a:p>
+        </p:txBody>
+      </p:sp>
+      <p:sp>
+        <p:nvSpPr>
+          <p:cNvPr id="17415" name="TextBox 17414"/>
           <p:cNvSpPr txBox="1"/>
           <p:nvPr/>
         </p:nvSpPr>
         <p:spPr>
           <a:xfrm>
-            <a:off x="612648" y="1143000"/>
-            <a:ext cx="3566160" cy="1051560"/>
+            <a:off x="4809744" y="1106424"/>
+            <a:ext cx="3017520" cy="932688"/>
           </a:xfrm>
           <a:prstGeom prst="rect">
             <a:avLst/>
@@ -6658,13 +7392,13 @@
               <a:buNone/>
             </a:pPr>
             <a:r>
-              <a:rPr sz="3400" b="1">
-                <a:solidFill>
-                  <a:srgbClr val="0D7A4F"/>
-                </a:solidFill>
-                <a:latin typeface="Arial"/>
-              </a:rPr>
-              <a:t>336 / 336</a:t>
+              <a:rPr sz="2600" b="1">
+                <a:solidFill>
+                  <a:srgbClr val="D9541F"/>
+                </a:solidFill>
+                <a:latin typeface="Calibri"/>
+              </a:rPr>
+              <a:t>−8.5%</a:t>
             </a:r>
           </a:p>
           <a:p>
@@ -6675,27 +7409,27 @@
               <a:buNone/>
             </a:pPr>
             <a:r>
-              <a:rPr sz="1100" b="0">
+              <a:rPr sz="1050" b="0">
                 <a:solidFill>
                   <a:srgbClr val="4A5768"/>
                 </a:solidFill>
-                <a:latin typeface="Arial"/>
-              </a:rPr>
-              <a:t>agent turns completed - 0 fallbacks, 0 timeouts, 0 actuation errors</a:t>
-            </a:r>
-          </a:p>
-        </p:txBody>
-      </p:sp>
-      <p:sp>
-        <p:nvSpPr>
-          <p:cNvPr id="17413" name="TextBox 17412"/>
+                <a:latin typeface="Calibri"/>
+              </a:rPr>
+              <a:t>HVAC energy, summer week (−3.7% winter)</a:t>
+            </a:r>
+          </a:p>
+        </p:txBody>
+      </p:sp>
+      <p:sp>
+        <p:nvSpPr>
+          <p:cNvPr id="17417" name="TextBox 17416"/>
           <p:cNvSpPr txBox="1"/>
           <p:nvPr/>
         </p:nvSpPr>
         <p:spPr>
           <a:xfrm>
-            <a:off x="4434840" y="1143000"/>
-            <a:ext cx="3566160" cy="1051560"/>
+            <a:off x="8467344" y="1106424"/>
+            <a:ext cx="3017520" cy="932688"/>
           </a:xfrm>
           <a:prstGeom prst="rect">
             <a:avLst/>
@@ -6715,13 +7449,13 @@
               <a:buNone/>
             </a:pPr>
             <a:r>
-              <a:rPr sz="3400" b="1">
-                <a:solidFill>
-                  <a:srgbClr val="C24A18"/>
-                </a:solidFill>
-                <a:latin typeface="Arial"/>
-              </a:rPr>
-              <a:t>-8.5%</a:t>
+              <a:rPr sz="2600" b="1">
+                <a:solidFill>
+                  <a:srgbClr val="0E1A2B"/>
+                </a:solidFill>
+                <a:latin typeface="Calibri"/>
+              </a:rPr>
+              <a:t>2.1 s</a:t>
             </a:r>
           </a:p>
           <a:p>
@@ -6732,27 +7466,27 @@
               <a:buNone/>
             </a:pPr>
             <a:r>
-              <a:rPr sz="1100" b="0">
+              <a:rPr sz="1050" b="0">
                 <a:solidFill>
                   <a:srgbClr val="4A5768"/>
                 </a:solidFill>
-                <a:latin typeface="Arial"/>
-              </a:rPr>
-              <a:t>HVAC energy, summer week (-3.7% winter)</a:t>
-            </a:r>
-          </a:p>
-        </p:txBody>
-      </p:sp>
-      <p:sp>
-        <p:nvSpPr>
-          <p:cNvPr id="17414" name="TextBox 17413"/>
+                <a:latin typeface="Calibri"/>
+              </a:rPr>
+              <a:t>median agent decision latency, on-device</a:t>
+            </a:r>
+          </a:p>
+        </p:txBody>
+      </p:sp>
+      <p:sp>
+        <p:nvSpPr>
+          <p:cNvPr id="17420" name="TextBox 17419"/>
           <p:cNvSpPr txBox="1"/>
           <p:nvPr/>
         </p:nvSpPr>
         <p:spPr>
           <a:xfrm>
-            <a:off x="8229600" y="1143000"/>
-            <a:ext cx="3566160" cy="1051560"/>
+            <a:off x="6446520" y="2596896"/>
+            <a:ext cx="5084064" cy="3474720"/>
           </a:xfrm>
           <a:prstGeom prst="rect">
             <a:avLst/>
@@ -6767,35 +7501,147 @@
           <a:p>
             <a:pPr algn="l" marL="0" indent="0">
               <a:spcAft>
-                <a:spcPts val="100"/>
+                <a:spcPts val="600"/>
               </a:spcAft>
               <a:buNone/>
             </a:pPr>
             <a:r>
-              <a:rPr sz="3400" b="1">
-                <a:solidFill>
-                  <a:srgbClr val="C24A18"/>
-                </a:solidFill>
-                <a:latin typeface="Arial"/>
-              </a:rPr>
-              <a:t>2.1 s</a:t>
-            </a:r>
-          </a:p>
+              <a:rPr sz="1400" b="1">
+                <a:solidFill>
+                  <a:srgbClr val="0D7A4F"/>
+                </a:solidFill>
+                <a:latin typeface="Calibri"/>
+              </a:rPr>
+              <a:t>Strategies for overcoming them</a:t>
+            </a:r>
+          </a:p>
+          <a:p>
+            <a:pPr algn="l" marL="165100" indent="-165100">
+              <a:spcAft>
+                <a:spcPts val="600"/>
+              </a:spcAft>
+              <a:buFont typeface="Calibri"/>
+              <a:buChar char="•"/>
+            </a:pPr>
+            <a:r>
+              <a:rPr sz="1100" b="0">
+                <a:solidFill>
+                  <a:srgbClr val="121B2B"/>
+                </a:solidFill>
+                <a:latin typeface="Calibri"/>
+              </a:rPr>
+              <a:t>Interval batching + a hard per-turn deadline; on timeout the loop holds the last accepted command rather than stalling</a:t>
+            </a:r>
+          </a:p>
+          <a:p>
+            <a:pPr algn="l" marL="165100" indent="-165100">
+              <a:spcAft>
+                <a:spcPts val="600"/>
+              </a:spcAft>
+              <a:buFont typeface="Calibri"/>
+              <a:buChar char="•"/>
+            </a:pPr>
+            <a:r>
+              <a:rPr sz="1100" b="0">
+                <a:solidFill>
+                  <a:srgbClr val="121B2B"/>
+                </a:solidFill>
+                <a:latin typeface="Calibri"/>
+              </a:rPr>
+              <a:t>Observations state the required direction, so the model cannot invert the physics</a:t>
+            </a:r>
+          </a:p>
+          <a:p>
+            <a:pPr algn="l" marL="165100" indent="-165100">
+              <a:spcAft>
+                <a:spcPts val="600"/>
+              </a:spcAft>
+              <a:buFont typeface="Calibri"/>
+              <a:buChar char="•"/>
+            </a:pPr>
+            <a:r>
+              <a:rPr sz="1100" b="0">
+                <a:solidFill>
+                  <a:srgbClr val="121B2B"/>
+                </a:solidFill>
+                <a:latin typeface="Calibri"/>
+              </a:rPr>
+              <a:t>Seasonal changeover parks the idle mode's setpoint — heating and cooling can never fight</a:t>
+            </a:r>
+          </a:p>
+          <a:p>
+            <a:pPr algn="l" marL="165100" indent="-165100">
+              <a:spcAft>
+                <a:spcPts val="600"/>
+              </a:spcAft>
+              <a:buFont typeface="Calibri"/>
+              <a:buChar char="•"/>
+            </a:pPr>
+            <a:r>
+              <a:rPr sz="1100" b="0">
+                <a:solidFill>
+                  <a:srgbClr val="121B2B"/>
+                </a:solidFill>
+                <a:latin typeface="Calibri"/>
+              </a:rPr>
+              <a:t>A per-zone proportional trim corrects each zone from its own PMV</a:t>
+            </a:r>
+          </a:p>
+        </p:txBody>
+      </p:sp>
+      <p:sp>
+        <p:nvSpPr>
+          <p:cNvPr id="17422" name="TextBox 17421"/>
+          <p:cNvSpPr txBox="1"/>
+          <p:nvPr/>
+        </p:nvSpPr>
+        <p:spPr>
+          <a:xfrm>
+            <a:off x="658368" y="5138928"/>
+            <a:ext cx="10881360" cy="950976"/>
+          </a:xfrm>
+          <a:prstGeom prst="rect">
+            <a:avLst/>
+          </a:prstGeom>
+          <a:noFill/>
+        </p:spPr>
+        <p:txBody>
+          <a:bodyPr wrap="square">
+            <a:spAutoFit/>
+          </a:bodyPr>
+          <a:lstStyle/>
           <a:p>
             <a:pPr algn="l" marL="0" indent="0">
               <a:spcAft>
-                <a:spcPts val="100"/>
+                <a:spcPts val="400"/>
               </a:spcAft>
               <a:buNone/>
             </a:pPr>
             <a:r>
-              <a:rPr sz="1100" b="0">
-                <a:solidFill>
-                  <a:srgbClr val="4A5768"/>
-                </a:solidFill>
-                <a:latin typeface="Arial"/>
-              </a:rPr>
-              <a:t>median agent decision latency, on-device</a:t>
+              <a:rPr sz="1400" b="1">
+                <a:solidFill>
+                  <a:srgbClr val="0D7A4F"/>
+                </a:solidFill>
+                <a:latin typeface="Calibri"/>
+              </a:rPr>
+              <a:t>Viability at scale</a:t>
+            </a:r>
+          </a:p>
+          <a:p>
+            <a:pPr algn="l" marL="0" indent="0">
+              <a:spcAft>
+                <a:spcPts val="400"/>
+              </a:spcAft>
+              <a:buNone/>
+            </a:pPr>
+            <a:r>
+              <a:rPr sz="1150" b="0">
+                <a:solidFill>
+                  <a:srgbClr val="121B2B"/>
+                </a:solidFill>
+                <a:latin typeface="Calibri"/>
+              </a:rPr>
+              <a:t>Buildings consume roughly 40% of global energy, so a single-digit HVAC reduction is material at portfolio scale. The loop is model-agnostic — any EnergyPlus model with a thermostat works — and swapping the cognitive engine for a larger local or hosted model needs no change to the MCP tool layer.</a:t>
             </a:r>
           </a:p>
         </p:txBody>
@@ -6816,6 +7662,14 @@
 <file path=ppt/slides/slide6.xml><?xml version="1.0" encoding="utf-8"?>
 <p:sld xmlns:a="http://schemas.openxmlformats.org/drawingml/2006/main" xmlns:r="http://schemas.openxmlformats.org/officeDocument/2006/relationships" xmlns:p="http://schemas.openxmlformats.org/presentationml/2006/main">
   <p:cSld>
+    <p:bg>
+      <p:bgPr>
+        <a:solidFill>
+          <a:srgbClr val="FAF7F2"/>
+        </a:solidFill>
+        <a:effectLst/>
+      </p:bgPr>
+    </p:bg>
     <p:spTree>
       <p:nvGrpSpPr>
         <p:cNvPr id="1" name="">
@@ -6838,6 +7692,50 @@
       </p:grpSpPr>
       <p:sp>
         <p:nvSpPr>
+          <p:cNvPr id="17412" name="Rounded Rectangle 17411"/>
+          <p:cNvSpPr/>
+          <p:nvPr/>
+        </p:nvSpPr>
+        <p:spPr>
+          <a:xfrm>
+            <a:off x="384048" y="987552"/>
+            <a:ext cx="11430000" cy="1188720"/>
+          </a:xfrm>
+          <a:prstGeom prst="roundRect">
+            <a:avLst>
+              <a:gd name="adj" fmla="val 3500"/>
+            </a:avLst>
+          </a:prstGeom>
+          <a:solidFill>
+            <a:srgbClr val="F2ECE2"/>
+          </a:solidFill>
+          <a:ln>
+            <a:noFill/>
+          </a:ln>
+          <a:effectLst/>
+        </p:spPr>
+        <p:style>
+          <a:lnRef idx="1">
+            <a:schemeClr val="accent1"/>
+          </a:lnRef>
+          <a:fillRef idx="3">
+            <a:schemeClr val="accent1"/>
+          </a:fillRef>
+          <a:effectRef idx="2">
+            <a:schemeClr val="accent1"/>
+          </a:effectRef>
+          <a:fontRef idx="minor">
+            <a:schemeClr val="lt1"/>
+          </a:fontRef>
+        </p:style>
+        <p:txBody>
+          <a:bodyPr rtlCol="0" anchor="ctr"/>
+          <a:lstStyle/>
+          <a:p/>
+        </p:txBody>
+      </p:sp>
+      <p:sp>
+        <p:nvSpPr>
           <p:cNvPr id="17409" name="Title 1">
             <a:extLst>
               <a:ext uri="{FF2B5EF4-FFF2-40B4-BE49-F238E27FC236}">
@@ -6859,8 +7757,11 @@
           <a:p>
             <a:pPr eaLnBrk="1" hangingPunct="1"/>
             <a:r>
-              <a:rPr lang="en-US" sz="3600" b="1" dirty="0">
-                <a:latin typeface="Times New Roman" panose="02020603050405020304" pitchFamily="18" charset="0"/>
+              <a:rPr lang="en-US" sz="3400" b="1" dirty="0" i="0">
+                <a:solidFill>
+                  <a:srgbClr val="0E1A2B"/>
+                </a:solidFill>
+                <a:latin typeface="Cambria" panose="02020603050405020304" pitchFamily="18" charset="0"/>
                 <a:ea typeface="ＭＳ Ｐゴシック" pitchFamily="1" charset="-128"/>
                 <a:cs typeface="Times New Roman" panose="02020603050405020304" pitchFamily="18" charset="0"/>
               </a:rPr>
@@ -6885,8 +7786,8 @@
         </p:nvSpPr>
         <p:spPr bwMode="auto">
           <a:xfrm>
-            <a:off x="612648" y="1097280"/>
-            <a:ext cx="10972800" cy="1097280"/>
+            <a:off x="932688" y="1060704"/>
+            <a:ext cx="10607040" cy="1060704"/>
           </a:xfrm>
           <a:prstGeom prst="rect">
             <a:avLst/>
@@ -6913,7 +7814,7 @@
                 <a:spcPct val="0"/>
               </a:spcBef>
               <a:spcAft>
-                <a:spcPts val="600"/>
+                <a:spcPts val="500"/>
               </a:spcAft>
               <a:buClrTx/>
               <a:buSzTx/>
@@ -6923,30 +7824,30 @@
               <a:buNone/>
             </a:pPr>
             <a:r>
-              <a:rPr sz="1300" b="1">
-                <a:solidFill>
-                  <a:srgbClr val="C24A18"/>
-                </a:solidFill>
-                <a:latin typeface="Arial"/>
-              </a:rPr>
-              <a:t>Code  ·  github.com/ayushYadav1107/Eco_loop_building_agents</a:t>
+              <a:rPr sz="1250" b="1">
+                <a:solidFill>
+                  <a:srgbClr val="D9541F"/>
+                </a:solidFill>
+                <a:latin typeface="Calibri"/>
+              </a:rPr>
+              <a:t>Code   github.com/ayushYadav1107/Eco_loop_building_agents</a:t>
             </a:r>
           </a:p>
           <a:p>
             <a:pPr algn="l" marL="0" indent="0">
               <a:spcAft>
-                <a:spcPts val="600"/>
+                <a:spcPts val="500"/>
               </a:spcAft>
               <a:buNone/>
             </a:pPr>
             <a:r>
-              <a:rPr sz="1250" b="0">
+              <a:rPr sz="1150" b="0">
                 <a:solidFill>
                   <a:srgbClr val="121B2B"/>
                 </a:solidFill>
-                <a:latin typeface="Arial"/>
-              </a:rPr>
-              <a:t>Baseline and runtime-generated .idf models, the full agent decision trail (agent_decisions.jsonl), per-timestep EnergyPlus results and the savings dashboard are committed - a fresh clone reproduces these figures.</a:t>
+                <a:latin typeface="Calibri"/>
+              </a:rPr>
+              <a:t>Baseline and runtime-generated .idf models, the full agent decision trail (agent_decisions.jsonl), per-timestep EnergyPlus results and the savings dashboard are all committed — a fresh clone reproduces these figures.</a:t>
             </a:r>
           </a:p>
         </p:txBody>
@@ -7084,17 +7985,17 @@
               <a:defRPr/>
             </a:pPr>
             <a:r>
-              <a:rPr kumimoji="0" lang="en-US" sz="1200" b="0" i="0" u="none" strike="noStrike" kern="1200" cap="none" spc="0" normalizeH="0" baseline="0" noProof="0">
+              <a:rPr kumimoji="0" lang="en-US" sz="1000" b="0" i="0" u="none" strike="noStrike" kern="1200" cap="none" spc="0" normalizeH="0" baseline="0" noProof="0">
                 <a:ln>
                   <a:noFill/>
                 </a:ln>
                 <a:solidFill>
-                  <a:prstClr val="white"/>
+                  <a:srgbClr val="4A5768"/>
                 </a:solidFill>
                 <a:effectLst/>
                 <a:uLnTx/>
                 <a:uFillTx/>
-                <a:latin typeface="TradeGothic"/>
+                <a:latin typeface="Calibri"/>
                 <a:ea typeface="+mn-ea"/>
                 <a:cs typeface="+mn-cs"/>
               </a:rPr>
@@ -7117,9 +8018,62 @@
           </a:p>
         </p:txBody>
       </p:sp>
+      <p:sp>
+        <p:nvSpPr>
+          <p:cNvPr id="17411" name="Oval 17410"/>
+          <p:cNvSpPr/>
+          <p:nvPr/>
+        </p:nvSpPr>
+        <p:spPr>
+          <a:xfrm>
+            <a:off x="420624" y="1024128"/>
+            <a:ext cx="384048" cy="384048"/>
+          </a:xfrm>
+          <a:prstGeom prst="ellipse">
+            <a:avLst/>
+          </a:prstGeom>
+          <a:solidFill>
+            <a:srgbClr val="D9541F"/>
+          </a:solidFill>
+          <a:ln>
+            <a:noFill/>
+          </a:ln>
+          <a:effectLst/>
+        </p:spPr>
+        <p:style>
+          <a:lnRef idx="1">
+            <a:schemeClr val="accent1"/>
+          </a:lnRef>
+          <a:fillRef idx="3">
+            <a:schemeClr val="accent1"/>
+          </a:fillRef>
+          <a:effectRef idx="2">
+            <a:schemeClr val="accent1"/>
+          </a:effectRef>
+          <a:fontRef idx="minor">
+            <a:schemeClr val="lt1"/>
+          </a:fontRef>
+        </p:style>
+        <p:txBody>
+          <a:bodyPr rtlCol="0" anchor="ctr" lIns="0" rIns="0" tIns="0" bIns="0"/>
+          <a:lstStyle/>
+          <a:p>
+            <a:pPr algn="ctr"/>
+            <a:r>
+              <a:rPr sz="1300" b="1">
+                <a:solidFill>
+                  <a:srgbClr val="FFFFFF"/>
+                </a:solidFill>
+                <a:latin typeface="Calibri"/>
+              </a:rPr>
+              <a:t>4</a:t>
+            </a:r>
+          </a:p>
+        </p:txBody>
+      </p:sp>
       <p:pic>
         <p:nvPicPr>
-          <p:cNvPr id="17411" name="Picture 17410" descr="decisions.png"/>
+          <p:cNvPr id="17413" name="Picture 17412" descr="decisions.png"/>
           <p:cNvPicPr>
             <a:picLocks noChangeAspect="1"/>
           </p:cNvPicPr>
@@ -7133,8 +8087,8 @@
         </p:blipFill>
         <p:spPr>
           <a:xfrm>
-            <a:off x="822960" y="2286000"/>
-            <a:ext cx="10561320" cy="3913650"/>
+            <a:off x="658368" y="2377440"/>
+            <a:ext cx="10881360" cy="4032246"/>
           </a:xfrm>
           <a:prstGeom prst="rect">
             <a:avLst/>
@@ -7157,6 +8111,14 @@
 <file path=ppt/slides/slide7.xml><?xml version="1.0" encoding="utf-8"?>
 <p:sld xmlns:a="http://schemas.openxmlformats.org/drawingml/2006/main" xmlns:r="http://schemas.openxmlformats.org/officeDocument/2006/relationships" xmlns:p="http://schemas.openxmlformats.org/presentationml/2006/main">
   <p:cSld>
+    <p:bg>
+      <p:bgPr>
+        <a:solidFill>
+          <a:srgbClr val="0E1A2B"/>
+        </a:solidFill>
+        <a:effectLst/>
+      </p:bgPr>
+    </p:bg>
     <p:spTree>
       <p:nvGrpSpPr>
         <p:cNvPr id="1" name=""/>
@@ -7173,6 +8135,138 @@
       </p:grpSpPr>
       <p:sp>
         <p:nvSpPr>
+          <p:cNvPr id="17414" name="Rounded Rectangle 17413"/>
+          <p:cNvSpPr/>
+          <p:nvPr/>
+        </p:nvSpPr>
+        <p:spPr>
+          <a:xfrm>
+            <a:off x="6309360" y="3127248"/>
+            <a:ext cx="5486400" cy="1581912"/>
+          </a:xfrm>
+          <a:prstGeom prst="roundRect">
+            <a:avLst>
+              <a:gd name="adj" fmla="val 3500"/>
+            </a:avLst>
+          </a:prstGeom>
+          <a:solidFill>
+            <a:srgbClr val="1B2A3F"/>
+          </a:solidFill>
+          <a:ln>
+            <a:noFill/>
+          </a:ln>
+          <a:effectLst/>
+        </p:spPr>
+        <p:style>
+          <a:lnRef idx="1">
+            <a:schemeClr val="accent1"/>
+          </a:lnRef>
+          <a:fillRef idx="3">
+            <a:schemeClr val="accent1"/>
+          </a:fillRef>
+          <a:effectRef idx="2">
+            <a:schemeClr val="accent1"/>
+          </a:effectRef>
+          <a:fontRef idx="minor">
+            <a:schemeClr val="lt1"/>
+          </a:fontRef>
+        </p:style>
+        <p:txBody>
+          <a:bodyPr rtlCol="0" anchor="ctr"/>
+          <a:lstStyle/>
+          <a:p/>
+        </p:txBody>
+      </p:sp>
+      <p:sp>
+        <p:nvSpPr>
+          <p:cNvPr id="17412" name="Rounded Rectangle 17411"/>
+          <p:cNvSpPr/>
+          <p:nvPr/>
+        </p:nvSpPr>
+        <p:spPr>
+          <a:xfrm>
+            <a:off x="6309360" y="1097280"/>
+            <a:ext cx="5486400" cy="1847088"/>
+          </a:xfrm>
+          <a:prstGeom prst="roundRect">
+            <a:avLst>
+              <a:gd name="adj" fmla="val 3500"/>
+            </a:avLst>
+          </a:prstGeom>
+          <a:solidFill>
+            <a:srgbClr val="1B2A3F"/>
+          </a:solidFill>
+          <a:ln>
+            <a:noFill/>
+          </a:ln>
+          <a:effectLst/>
+        </p:spPr>
+        <p:style>
+          <a:lnRef idx="1">
+            <a:schemeClr val="accent1"/>
+          </a:lnRef>
+          <a:fillRef idx="3">
+            <a:schemeClr val="accent1"/>
+          </a:fillRef>
+          <a:effectRef idx="2">
+            <a:schemeClr val="accent1"/>
+          </a:effectRef>
+          <a:fontRef idx="minor">
+            <a:schemeClr val="lt1"/>
+          </a:fontRef>
+        </p:style>
+        <p:txBody>
+          <a:bodyPr rtlCol="0" anchor="ctr"/>
+          <a:lstStyle/>
+          <a:p/>
+        </p:txBody>
+      </p:sp>
+      <p:sp>
+        <p:nvSpPr>
+          <p:cNvPr id="17411" name="Rounded Rectangle 17410"/>
+          <p:cNvSpPr/>
+          <p:nvPr/>
+        </p:nvSpPr>
+        <p:spPr>
+          <a:xfrm>
+            <a:off x="384048" y="1097280"/>
+            <a:ext cx="5760720" cy="3611880"/>
+          </a:xfrm>
+          <a:prstGeom prst="roundRect">
+            <a:avLst>
+              <a:gd name="adj" fmla="val 3500"/>
+            </a:avLst>
+          </a:prstGeom>
+          <a:solidFill>
+            <a:srgbClr val="1B2A3F"/>
+          </a:solidFill>
+          <a:ln>
+            <a:noFill/>
+          </a:ln>
+          <a:effectLst/>
+        </p:spPr>
+        <p:style>
+          <a:lnRef idx="1">
+            <a:schemeClr val="accent1"/>
+          </a:lnRef>
+          <a:fillRef idx="3">
+            <a:schemeClr val="accent1"/>
+          </a:fillRef>
+          <a:effectRef idx="2">
+            <a:schemeClr val="accent1"/>
+          </a:effectRef>
+          <a:fontRef idx="minor">
+            <a:schemeClr val="lt1"/>
+          </a:fontRef>
+        </p:style>
+        <p:txBody>
+          <a:bodyPr rtlCol="0" anchor="ctr"/>
+          <a:lstStyle/>
+          <a:p/>
+        </p:txBody>
+      </p:sp>
+      <p:sp>
+        <p:nvSpPr>
           <p:cNvPr id="17409" name="Title 1"/>
           <p:cNvSpPr>
             <a:spLocks noGrp="1"/>
@@ -7188,8 +8282,11 @@
           <a:p>
             <a:pPr eaLnBrk="1" hangingPunct="1"/>
             <a:r>
-              <a:rPr lang="en-US" sz="3600" b="1" dirty="0">
-                <a:latin typeface="Times New Roman" panose="02020603050405020304" pitchFamily="18" charset="0"/>
+              <a:rPr lang="en-US" sz="3400" b="1" dirty="0" i="0">
+                <a:solidFill>
+                  <a:srgbClr val="F4F7FA"/>
+                </a:solidFill>
+                <a:latin typeface="Cambria" panose="02020603050405020304" pitchFamily="18" charset="0"/>
                 <a:ea typeface="ＭＳ Ｐゴシック" pitchFamily="1" charset="-128"/>
                 <a:cs typeface="Times New Roman" panose="02020603050405020304" pitchFamily="18" charset="0"/>
               </a:rPr>
@@ -7208,8 +8305,8 @@
         </p:nvSpPr>
         <p:spPr bwMode="auto">
           <a:xfrm>
-            <a:off x="612648" y="1234440"/>
-            <a:ext cx="6035040" cy="4846320"/>
+            <a:off x="676656" y="1243584"/>
+            <a:ext cx="5175504" cy="4663440"/>
           </a:xfrm>
           <a:prstGeom prst="rect">
             <a:avLst/>
@@ -7246,11 +8343,11 @@
               <a:buNone/>
             </a:pPr>
             <a:r>
-              <a:rPr sz="1500" b="1">
-                <a:solidFill>
-                  <a:srgbClr val="C24A18"/>
-                </a:solidFill>
-                <a:latin typeface="Arial"/>
+              <a:rPr sz="1300" b="1">
+                <a:solidFill>
+                  <a:srgbClr val="F28A4C"/>
+                </a:solidFill>
+                <a:latin typeface="Calibri"/>
               </a:rPr>
               <a:t>Simulation and building physics</a:t>
             </a:r>
@@ -7270,57 +8367,57 @@
             </a:endParaRPr>
           </a:p>
           <a:p>
-            <a:pPr algn="l" marL="182880" indent="-182880">
+            <a:pPr algn="l" marL="165100" indent="-165100">
               <a:spcAft>
                 <a:spcPts val="600"/>
               </a:spcAft>
-              <a:buFont typeface="Arial"/>
+              <a:buFont typeface="Calibri"/>
               <a:buChar char="•"/>
             </a:pPr>
             <a:r>
-              <a:rPr sz="1250" b="0">
-                <a:solidFill>
-                  <a:srgbClr val="121B2B"/>
-                </a:solidFill>
-                <a:latin typeface="Arial"/>
-              </a:rPr>
-              <a:t>EnergyPlus Engineering Reference and EMS Application Guide - energyplus.net</a:t>
-            </a:r>
-          </a:p>
-          <a:p>
-            <a:pPr algn="l" marL="182880" indent="-182880">
+              <a:rPr sz="1100" b="0">
+                <a:solidFill>
+                  <a:srgbClr val="F4F7FA"/>
+                </a:solidFill>
+                <a:latin typeface="Calibri"/>
+              </a:rPr>
+              <a:t>EnergyPlus Engineering Reference and EMS Application Guide — energyplus.net</a:t>
+            </a:r>
+          </a:p>
+          <a:p>
+            <a:pPr algn="l" marL="165100" indent="-165100">
               <a:spcAft>
                 <a:spcPts val="600"/>
               </a:spcAft>
-              <a:buFont typeface="Arial"/>
+              <a:buFont typeface="Calibri"/>
               <a:buChar char="•"/>
             </a:pPr>
             <a:r>
-              <a:rPr sz="1250" b="0">
-                <a:solidFill>
-                  <a:srgbClr val="121B2B"/>
-                </a:solidFill>
-                <a:latin typeface="Arial"/>
-              </a:rPr>
-              <a:t>pyenergyplus Data Exchange API (get_variable_handle, set_actuator_value)</a:t>
-            </a:r>
-          </a:p>
-          <a:p>
-            <a:pPr algn="l" marL="182880" indent="-182880">
+              <a:rPr sz="1100" b="0">
+                <a:solidFill>
+                  <a:srgbClr val="F4F7FA"/>
+                </a:solidFill>
+                <a:latin typeface="Calibri"/>
+              </a:rPr>
+              <a:t>pyenergyplus Data Exchange API — get_variable_handle, set_actuator_value</a:t>
+            </a:r>
+          </a:p>
+          <a:p>
+            <a:pPr algn="l" marL="165100" indent="-165100">
               <a:spcAft>
                 <a:spcPts val="600"/>
               </a:spcAft>
-              <a:buFont typeface="Arial"/>
+              <a:buFont typeface="Calibri"/>
               <a:buChar char="•"/>
             </a:pPr>
             <a:r>
-              <a:rPr sz="1250" b="0">
-                <a:solidFill>
-                  <a:srgbClr val="121B2B"/>
-                </a:solidFill>
-                <a:latin typeface="Arial"/>
-              </a:rPr>
-              <a:t>ISO 7730:2005 and ASHRAE Standard 55 - PMV/PPD thermal comfort model</a:t>
+              <a:rPr sz="1100" b="0">
+                <a:solidFill>
+                  <a:srgbClr val="F4F7FA"/>
+                </a:solidFill>
+                <a:latin typeface="Calibri"/>
+              </a:rPr>
+              <a:t>ISO 7730:2005 and ASHRAE Standard 55 — PMV/PPD thermal comfort model</a:t>
             </a:r>
           </a:p>
           <a:p>
@@ -7331,67 +8428,67 @@
               <a:buNone/>
             </a:pPr>
             <a:r>
-              <a:rPr sz="1500" b="1">
-                <a:solidFill>
-                  <a:srgbClr val="C24A18"/>
-                </a:solidFill>
-                <a:latin typeface="Arial"/>
+              <a:rPr sz="1300" b="1">
+                <a:solidFill>
+                  <a:srgbClr val="F28A4C"/>
+                </a:solidFill>
+                <a:latin typeface="Calibri"/>
               </a:rPr>
               <a:t>Agent, protocol and inference</a:t>
             </a:r>
           </a:p>
           <a:p>
-            <a:pPr algn="l" marL="182880" indent="-182880">
+            <a:pPr algn="l" marL="165100" indent="-165100">
               <a:spcAft>
                 <a:spcPts val="600"/>
               </a:spcAft>
-              <a:buFont typeface="Arial"/>
+              <a:buFont typeface="Calibri"/>
               <a:buChar char="•"/>
             </a:pPr>
             <a:r>
-              <a:rPr sz="1250" b="0">
-                <a:solidFill>
-                  <a:srgbClr val="121B2B"/>
-                </a:solidFill>
-                <a:latin typeface="Arial"/>
-              </a:rPr>
-              <a:t>Model Context Protocol specification - modelcontextprotocol.io</a:t>
-            </a:r>
-          </a:p>
-          <a:p>
-            <a:pPr algn="l" marL="182880" indent="-182880">
+              <a:rPr sz="1100" b="0">
+                <a:solidFill>
+                  <a:srgbClr val="F4F7FA"/>
+                </a:solidFill>
+                <a:latin typeface="Calibri"/>
+              </a:rPr>
+              <a:t>Model Context Protocol specification — modelcontextprotocol.io</a:t>
+            </a:r>
+          </a:p>
+          <a:p>
+            <a:pPr algn="l" marL="165100" indent="-165100">
               <a:spcAft>
                 <a:spcPts val="600"/>
               </a:spcAft>
-              <a:buFont typeface="Arial"/>
+              <a:buFont typeface="Calibri"/>
               <a:buChar char="•"/>
             </a:pPr>
             <a:r>
-              <a:rPr sz="1250" b="0">
-                <a:solidFill>
-                  <a:srgbClr val="121B2B"/>
-                </a:solidFill>
-                <a:latin typeface="Arial"/>
-              </a:rPr>
-              <a:t>FastMCP - gofastmcp.com</a:t>
-            </a:r>
-          </a:p>
-          <a:p>
-            <a:pPr algn="l" marL="182880" indent="-182880">
+              <a:rPr sz="1100" b="0">
+                <a:solidFill>
+                  <a:srgbClr val="F4F7FA"/>
+                </a:solidFill>
+                <a:latin typeface="Calibri"/>
+              </a:rPr>
+              <a:t>FastMCP — gofastmcp.com</a:t>
+            </a:r>
+          </a:p>
+          <a:p>
+            <a:pPr algn="l" marL="165100" indent="-165100">
               <a:spcAft>
                 <a:spcPts val="600"/>
               </a:spcAft>
-              <a:buFont typeface="Arial"/>
+              <a:buFont typeface="Calibri"/>
               <a:buChar char="•"/>
             </a:pPr>
             <a:r>
-              <a:rPr sz="1250" b="0">
-                <a:solidFill>
-                  <a:srgbClr val="121B2B"/>
-                </a:solidFill>
-                <a:latin typeface="Arial"/>
-              </a:rPr>
-              <a:t>Meta Llama 3.2 served locally through Ollama - ollama.com</a:t>
+              <a:rPr sz="1100" b="0">
+                <a:solidFill>
+                  <a:srgbClr val="F4F7FA"/>
+                </a:solidFill>
+                <a:latin typeface="Calibri"/>
+              </a:rPr>
+              <a:t>Meta Llama 3.2 served locally through Ollama — ollama.com</a:t>
             </a:r>
           </a:p>
           <a:p>
@@ -7402,31 +8499,31 @@
               <a:buNone/>
             </a:pPr>
             <a:r>
-              <a:rPr sz="1500" b="1">
-                <a:solidFill>
-                  <a:srgbClr val="C24A18"/>
-                </a:solidFill>
-                <a:latin typeface="Arial"/>
+              <a:rPr sz="1300" b="1">
+                <a:solidFill>
+                  <a:srgbClr val="F28A4C"/>
+                </a:solidFill>
+                <a:latin typeface="Calibri"/>
               </a:rPr>
               <a:t>Project</a:t>
             </a:r>
           </a:p>
           <a:p>
-            <a:pPr algn="l" marL="182880" indent="-182880">
+            <a:pPr algn="l" marL="165100" indent="-165100">
               <a:spcAft>
                 <a:spcPts val="600"/>
               </a:spcAft>
-              <a:buFont typeface="Arial"/>
+              <a:buFont typeface="Calibri"/>
               <a:buChar char="•"/>
             </a:pPr>
             <a:r>
-              <a:rPr sz="1250" b="0">
-                <a:solidFill>
-                  <a:srgbClr val="121B2B"/>
-                </a:solidFill>
-                <a:latin typeface="Arial"/>
-              </a:rPr>
-              <a:t>Repository, architecture document and reproducible results - github.com/ayushYadav1107/Eco_loop_building_agents</a:t>
+              <a:rPr sz="1100" b="0">
+                <a:solidFill>
+                  <a:srgbClr val="F4F7FA"/>
+                </a:solidFill>
+                <a:latin typeface="Calibri"/>
+              </a:rPr>
+              <a:t>Repository, architecture document and reproducible results — github.com/ayushYadav1107/Eco_loop_building_agents</a:t>
             </a:r>
           </a:p>
         </p:txBody>
@@ -7552,17 +8649,17 @@
               <a:defRPr/>
             </a:pPr>
             <a:r>
-              <a:rPr kumimoji="0" lang="en-US" sz="1200" b="0" i="0" u="none" strike="noStrike" kern="1200" cap="none" spc="0" normalizeH="0" baseline="0" noProof="0">
+              <a:rPr kumimoji="0" lang="en-US" sz="1000" b="0" i="0" u="none" strike="noStrike" kern="1200" cap="none" spc="0" normalizeH="0" baseline="0" noProof="0">
                 <a:ln>
                   <a:noFill/>
                 </a:ln>
                 <a:solidFill>
-                  <a:prstClr val="white"/>
+                  <a:srgbClr val="A8BACE"/>
                 </a:solidFill>
                 <a:effectLst/>
                 <a:uLnTx/>
                 <a:uFillTx/>
-                <a:latin typeface="TradeGothic"/>
+                <a:latin typeface="Calibri"/>
                 <a:ea typeface="+mn-ea"/>
                 <a:cs typeface="+mn-cs"/>
               </a:rPr>
@@ -7587,14 +8684,14 @@
       </p:sp>
       <p:sp>
         <p:nvSpPr>
-          <p:cNvPr id="17411" name="TextBox 17410"/>
+          <p:cNvPr id="17413" name="TextBox 17412"/>
           <p:cNvSpPr txBox="1"/>
           <p:nvPr/>
         </p:nvSpPr>
         <p:spPr>
           <a:xfrm>
-            <a:off x="6858000" y="1234440"/>
-            <a:ext cx="4754880" cy="4846320"/>
+            <a:off x="6565392" y="1243584"/>
+            <a:ext cx="4974336" cy="2084831"/>
           </a:xfrm>
           <a:prstGeom prst="rect">
             <a:avLst/>
@@ -7609,16 +8706,16 @@
           <a:p>
             <a:pPr algn="l" marL="0" indent="0">
               <a:spcAft>
-                <a:spcPts val="800"/>
+                <a:spcPts val="400"/>
               </a:spcAft>
               <a:buNone/>
             </a:pPr>
             <a:r>
-              <a:rPr sz="1600" b="1">
-                <a:solidFill>
-                  <a:srgbClr val="C24A18"/>
-                </a:solidFill>
-                <a:latin typeface="Arial"/>
+              <a:rPr sz="1300" b="1">
+                <a:solidFill>
+                  <a:srgbClr val="F28A4C"/>
+                </a:solidFill>
+                <a:latin typeface="Calibri"/>
               </a:rPr>
               <a:t>Reproduce the result</a:t>
             </a:r>
@@ -7626,16 +8723,16 @@
           <a:p>
             <a:pPr algn="l" marL="0" indent="0">
               <a:spcAft>
-                <a:spcPts val="800"/>
+                <a:spcPts val="400"/>
               </a:spcAft>
               <a:buNone/>
             </a:pPr>
             <a:r>
-              <a:rPr sz="1150" b="1">
-                <a:solidFill>
-                  <a:srgbClr val="121B2B"/>
-                </a:solidFill>
-                <a:latin typeface="Arial"/>
+              <a:rPr sz="1050" b="1">
+                <a:solidFill>
+                  <a:srgbClr val="F4F7FA"/>
+                </a:solidFill>
+                <a:latin typeface="Calibri"/>
               </a:rPr>
               <a:t>python main.py prepare</a:t>
             </a:r>
@@ -7643,16 +8740,16 @@
           <a:p>
             <a:pPr algn="l" marL="0" indent="0">
               <a:spcAft>
-                <a:spcPts val="800"/>
+                <a:spcPts val="400"/>
               </a:spcAft>
               <a:buNone/>
             </a:pPr>
             <a:r>
-              <a:rPr sz="1150" b="1">
-                <a:solidFill>
-                  <a:srgbClr val="121B2B"/>
-                </a:solidFill>
-                <a:latin typeface="Arial"/>
+              <a:rPr sz="1050" b="1">
+                <a:solidFill>
+                  <a:srgbClr val="F4F7FA"/>
+                </a:solidFill>
+                <a:latin typeface="Calibri"/>
               </a:rPr>
               <a:t>python main.py run-baseline --start 07-15 --end 07-21</a:t>
             </a:r>
@@ -7660,16 +8757,16 @@
           <a:p>
             <a:pPr algn="l" marL="0" indent="0">
               <a:spcAft>
-                <a:spcPts val="800"/>
+                <a:spcPts val="400"/>
               </a:spcAft>
               <a:buNone/>
             </a:pPr>
             <a:r>
-              <a:rPr sz="1150" b="1">
-                <a:solidFill>
-                  <a:srgbClr val="121B2B"/>
-                </a:solidFill>
-                <a:latin typeface="Arial"/>
+              <a:rPr sz="1050" b="1">
+                <a:solidFill>
+                  <a:srgbClr val="F4F7FA"/>
+                </a:solidFill>
+                <a:latin typeface="Calibri"/>
               </a:rPr>
               <a:t>python main.py run-ai --start 07-15 --end 07-21</a:t>
             </a:r>
@@ -7677,16 +8774,16 @@
           <a:p>
             <a:pPr algn="l" marL="0" indent="0">
               <a:spcAft>
-                <a:spcPts val="800"/>
+                <a:spcPts val="400"/>
               </a:spcAft>
               <a:buNone/>
             </a:pPr>
             <a:r>
-              <a:rPr sz="1150" b="1">
-                <a:solidFill>
-                  <a:srgbClr val="121B2B"/>
-                </a:solidFill>
-                <a:latin typeface="Arial"/>
+              <a:rPr sz="1050" b="1">
+                <a:solidFill>
+                  <a:srgbClr val="F4F7FA"/>
+                </a:solidFill>
+                <a:latin typeface="Calibri"/>
               </a:rPr>
               <a:t>python main.py dashboard</a:t>
             </a:r>
@@ -7694,33 +8791,56 @@
           <a:p>
             <a:pPr algn="l" marL="0" indent="0">
               <a:spcAft>
-                <a:spcPts val="800"/>
+                <a:spcPts val="400"/>
               </a:spcAft>
               <a:buNone/>
             </a:pPr>
             <a:r>
-              <a:rPr sz="1200" b="0">
-                <a:solidFill>
-                  <a:srgbClr val="4A5768"/>
-                </a:solidFill>
-                <a:latin typeface="Arial"/>
-              </a:rPr>
-              <a:t>The controller runs at temperature 0, so repeated runs return identical totals — the comparison is auditable rather than anecdotal.</a:t>
-            </a:r>
-          </a:p>
+              <a:rPr sz="1050" b="0">
+                <a:solidFill>
+                  <a:srgbClr val="A8BACE"/>
+                </a:solidFill>
+                <a:latin typeface="Calibri"/>
+              </a:rPr>
+              <a:t>Temperature 0, so repeated runs return identical totals — the comparison is auditable rather than anecdotal.</a:t>
+            </a:r>
+          </a:p>
+        </p:txBody>
+      </p:sp>
+      <p:sp>
+        <p:nvSpPr>
+          <p:cNvPr id="17415" name="TextBox 17414"/>
+          <p:cNvSpPr txBox="1"/>
+          <p:nvPr/>
+        </p:nvSpPr>
+        <p:spPr>
+          <a:xfrm>
+            <a:off x="6565392" y="3255264"/>
+            <a:ext cx="4974336" cy="1371600"/>
+          </a:xfrm>
+          <a:prstGeom prst="rect">
+            <a:avLst/>
+          </a:prstGeom>
+          <a:noFill/>
+        </p:spPr>
+        <p:txBody>
+          <a:bodyPr wrap="square">
+            <a:spAutoFit/>
+          </a:bodyPr>
+          <a:lstStyle/>
           <a:p>
             <a:pPr algn="l" marL="0" indent="0">
               <a:spcAft>
-                <a:spcPts val="800"/>
+                <a:spcPts val="400"/>
               </a:spcAft>
               <a:buNone/>
             </a:pPr>
             <a:r>
-              <a:rPr sz="1600" b="1">
-                <a:solidFill>
-                  <a:srgbClr val="C24A18"/>
-                </a:solidFill>
-                <a:latin typeface="Arial"/>
+              <a:rPr sz="1300" b="1">
+                <a:solidFill>
+                  <a:srgbClr val="F28A4C"/>
+                </a:solidFill>
+                <a:latin typeface="Calibri"/>
               </a:rPr>
               <a:t>Honest limitation</a:t>
             </a:r>
@@ -7728,18 +8848,35 @@
           <a:p>
             <a:pPr algn="l" marL="0" indent="0">
               <a:spcAft>
-                <a:spcPts val="800"/>
+                <a:spcPts val="400"/>
               </a:spcAft>
               <a:buNone/>
             </a:pPr>
             <a:r>
-              <a:rPr sz="1200" b="0">
-                <a:solidFill>
-                  <a:srgbClr val="4A5768"/>
-                </a:solidFill>
-                <a:latin typeface="Arial"/>
-              </a:rPr>
-              <a:t>One setpoint pair drives five differently-loaded zones. Per zone the agent holds 85–96% of occupied time in the PMV band; the stricter worst-zone metric is lower. Per-zone setpoints are the next step.</a:t>
+              <a:rPr sz="1100" b="0">
+                <a:solidFill>
+                  <a:srgbClr val="F4F7FA"/>
+                </a:solidFill>
+                <a:latin typeface="Calibri"/>
+              </a:rPr>
+              <a:t>One setpoint pair drives five differently-loaded zones. Per zone the agent holds 85–96% of occupied time inside the PMV band; the stricter worst-zone metric is lower.</a:t>
+            </a:r>
+          </a:p>
+          <a:p>
+            <a:pPr algn="l" marL="0" indent="0">
+              <a:spcAft>
+                <a:spcPts val="400"/>
+              </a:spcAft>
+              <a:buNone/>
+            </a:pPr>
+            <a:r>
+              <a:rPr sz="1100" b="0">
+                <a:solidFill>
+                  <a:srgbClr val="A8BACE"/>
+                </a:solidFill>
+                <a:latin typeface="Calibri"/>
+              </a:rPr>
+              <a:t>Per-zone setpoints are the next step — the actuator handles and per-zone PMV are already in place.</a:t>
             </a:r>
           </a:p>
         </p:txBody>

--- a/deck/Eco-Loop_Building_Agents_Idea.pptx
+++ b/deck/Eco-Loop_Building_Agents_Idea.pptx
@@ -7830,7 +7830,7 @@
                 </a:solidFill>
                 <a:latin typeface="Calibri"/>
               </a:rPr>
-              <a:t>Code   github.com/ayushYadav1107/Eco_loop_building_agents</a:t>
+              <a:t>Code   github.com/ayushYadav1107/Eco_loop</a:t>
             </a:r>
           </a:p>
           <a:p>
@@ -8523,7 +8523,7 @@
                 </a:solidFill>
                 <a:latin typeface="Calibri"/>
               </a:rPr>
-              <a:t>Repository, architecture document and reproducible results — github.com/ayushYadav1107/Eco_loop_building_agents</a:t>
+              <a:t>Repository, architecture document and reproducible results — github.com/ayushYadav1107/Eco_loop</a:t>
             </a:r>
           </a:p>
         </p:txBody>

--- a/deck/Eco-Loop_Building_Agents_Idea.pptx
+++ b/deck/Eco-Loop_Building_Agents_Idea.pptx
@@ -4670,7 +4670,7 @@
     <p:bg>
       <p:bgPr>
         <a:solidFill>
-          <a:srgbClr val="0E1A2B"/>
+          <a:srgbClr val="F8F9FA"/>
         </a:solidFill>
         <a:effectLst/>
       </p:bgPr>
@@ -4691,25 +4691,27 @@
       </p:grpSpPr>
       <p:sp>
         <p:nvSpPr>
-          <p:cNvPr id="14" name="Rounded Rectangle 13"/>
+          <p:cNvPr id="15" name="Rounded Rectangle 14"/>
           <p:cNvSpPr/>
           <p:nvPr/>
         </p:nvSpPr>
         <p:spPr>
           <a:xfrm>
-            <a:off x="6537960" y="5175504"/>
-            <a:ext cx="5212080" cy="978408"/>
+            <a:off x="6446520" y="4389120"/>
+            <a:ext cx="5358384" cy="1005840"/>
           </a:xfrm>
           <a:prstGeom prst="roundRect">
             <a:avLst>
-              <a:gd name="adj" fmla="val 3500"/>
+              <a:gd name="adj" fmla="val 3000"/>
             </a:avLst>
           </a:prstGeom>
           <a:solidFill>
-            <a:srgbClr val="1B2A3F"/>
+            <a:srgbClr val="FFFFFF"/>
           </a:solidFill>
-          <a:ln>
-            <a:noFill/>
+          <a:ln w="12700">
+            <a:solidFill>
+              <a:srgbClr val="E2E8F0"/>
+            </a:solidFill>
           </a:ln>
           <a:effectLst/>
         </p:spPr>
@@ -4735,25 +4737,27 @@
       </p:sp>
       <p:sp>
         <p:nvSpPr>
-          <p:cNvPr id="12" name="Rounded Rectangle 11"/>
+          <p:cNvPr id="13" name="Rounded Rectangle 12"/>
           <p:cNvSpPr/>
           <p:nvPr/>
         </p:nvSpPr>
         <p:spPr>
           <a:xfrm>
-            <a:off x="6537960" y="4087368"/>
-            <a:ext cx="5212080" cy="978408"/>
+            <a:off x="9198864" y="2944368"/>
+            <a:ext cx="2606040" cy="1280160"/>
           </a:xfrm>
           <a:prstGeom prst="roundRect">
             <a:avLst>
-              <a:gd name="adj" fmla="val 3500"/>
+              <a:gd name="adj" fmla="val 3000"/>
             </a:avLst>
           </a:prstGeom>
           <a:solidFill>
-            <a:srgbClr val="1B2A3F"/>
+            <a:srgbClr val="EFF4FF"/>
           </a:solidFill>
-          <a:ln>
-            <a:noFill/>
+          <a:ln w="12700">
+            <a:solidFill>
+              <a:srgbClr val="E2E8F0"/>
+            </a:solidFill>
           </a:ln>
           <a:effectLst/>
         </p:spPr>
@@ -4779,25 +4783,27 @@
       </p:sp>
       <p:sp>
         <p:nvSpPr>
-          <p:cNvPr id="10" name="Rounded Rectangle 9"/>
+          <p:cNvPr id="11" name="Rounded Rectangle 10"/>
           <p:cNvSpPr/>
           <p:nvPr/>
         </p:nvSpPr>
         <p:spPr>
           <a:xfrm>
-            <a:off x="6537960" y="2999232"/>
-            <a:ext cx="5212080" cy="978408"/>
+            <a:off x="6446520" y="2944368"/>
+            <a:ext cx="2606040" cy="1280160"/>
           </a:xfrm>
           <a:prstGeom prst="roundRect">
             <a:avLst>
-              <a:gd name="adj" fmla="val 3500"/>
+              <a:gd name="adj" fmla="val 3000"/>
             </a:avLst>
           </a:prstGeom>
           <a:solidFill>
-            <a:srgbClr val="1B2A3F"/>
+            <a:srgbClr val="ECFDF3"/>
           </a:solidFill>
-          <a:ln>
-            <a:noFill/>
+          <a:ln w="12700">
+            <a:solidFill>
+              <a:srgbClr val="E2E8F0"/>
+            </a:solidFill>
           </a:ln>
           <a:effectLst/>
         </p:spPr>
@@ -4823,22 +4829,22 @@
       </p:sp>
       <p:sp>
         <p:nvSpPr>
-          <p:cNvPr id="8" name="Rounded Rectangle 7"/>
+          <p:cNvPr id="9" name="Rounded Rectangle 8"/>
           <p:cNvSpPr/>
           <p:nvPr/>
         </p:nvSpPr>
         <p:spPr>
           <a:xfrm>
-            <a:off x="384048" y="1188720"/>
-            <a:ext cx="5852160" cy="3310128"/>
+            <a:off x="384048" y="1115568"/>
+            <a:ext cx="5806440" cy="3017520"/>
           </a:xfrm>
           <a:prstGeom prst="roundRect">
             <a:avLst>
-              <a:gd name="adj" fmla="val 3500"/>
+              <a:gd name="adj" fmla="val 3000"/>
             </a:avLst>
           </a:prstGeom>
           <a:solidFill>
-            <a:srgbClr val="1B2A3F"/>
+            <a:srgbClr val="EFF4FF"/>
           </a:solidFill>
           <a:ln>
             <a:noFill/>
@@ -4889,15 +4895,6 @@
             <a:pPr>
               <a:defRPr/>
             </a:pPr>
-            <a:r>
-              <a:rPr lang="en-US" sz="1000">
-                <a:solidFill>
-                  <a:srgbClr val="A8BACE"/>
-                </a:solidFill>
-                <a:latin typeface="Calibri"/>
-              </a:rPr>
-              <a:t>@SIH Idea submission- Template</a:t>
-            </a:r>
           </a:p>
         </p:txBody>
       </p:sp>
@@ -4922,11 +4919,6 @@
           <a:bodyPr/>
           <a:lstStyle/>
           <a:p>
-            <a:fld id="{677C3CE7-23F7-4828-823C-E0205DF2CF97}" type="slidenum">
-              <a:rPr lang="en-US" smtClean="0"/>
-              <a:pPr/>
-              <a:t>2</a:t>
-            </a:fld>
             <a:endParaRPr lang="en-US"/>
           </a:p>
         </p:txBody>
@@ -5148,11 +5140,11 @@
           </a:p>
           <a:p>
             <a:r>
-              <a:rPr lang="en-US" b="1" dirty="0">
-                <a:solidFill>
-                  <a:srgbClr val="F4F7FA"/>
-                </a:solidFill>
-                <a:latin typeface="Cambria" panose="02020603050405020304" pitchFamily="18" charset="0"/>
+              <a:rPr lang="en-US" b="1" dirty="0" sz="3400" i="0">
+                <a:solidFill>
+                  <a:srgbClr val="1E3A8A"/>
+                </a:solidFill>
+                <a:latin typeface="Segoe UI" panose="02020603050405020304" pitchFamily="18" charset="0"/>
                 <a:cs typeface="Times New Roman" panose="02020603050405020304" pitchFamily="18" charset="0"/>
               </a:rPr>
               <a:t>TITLE PAGE</a:t>
@@ -5181,8 +5173,8 @@
         </p:nvSpPr>
         <p:spPr>
           <a:xfrm>
-            <a:off x="658368" y="1371600"/>
-            <a:ext cx="5349240" cy="3337560"/>
+            <a:off x="658368" y="1280160"/>
+            <a:ext cx="5303520" cy="2743200"/>
           </a:xfrm>
           <a:prstGeom prst="rect">
             <a:avLst/>
@@ -5197,14 +5189,14 @@
           <a:p>
             <a:pPr algn="l" marL="0" indent="0">
               <a:spcAft>
-                <a:spcPts val="1000"/>
+                <a:spcPts val="900"/>
               </a:spcAft>
               <a:buNone/>
             </a:pPr>
             <a:r>
-              <a:rPr sz="1350" b="1">
-                <a:solidFill>
-                  <a:srgbClr val="F28A4C"/>
+              <a:rPr sz="1300" b="1">
+                <a:solidFill>
+                  <a:srgbClr val="EA580C"/>
                 </a:solidFill>
                 <a:latin typeface="Calibri"/>
               </a:rPr>
@@ -5215,14 +5207,14 @@
           <a:p>
             <a:pPr algn="l" marL="0" indent="0">
               <a:spcAft>
-                <a:spcPts val="1000"/>
+                <a:spcPts val="900"/>
               </a:spcAft>
               <a:buNone/>
             </a:pPr>
             <a:r>
-              <a:rPr sz="1350" b="0">
-                <a:solidFill>
-                  <a:srgbClr val="F4F7FA"/>
+              <a:rPr sz="1300" b="0">
+                <a:solidFill>
+                  <a:srgbClr val="1E293B"/>
                 </a:solidFill>
                 <a:latin typeface="Calibri"/>
               </a:rPr>
@@ -5232,65 +5224,48 @@
           <a:p>
             <a:pPr algn="l" marL="0" indent="0">
               <a:spcAft>
-                <a:spcPts val="1000"/>
+                <a:spcPts val="900"/>
               </a:spcAft>
               <a:buNone/>
             </a:pPr>
             <a:r>
-              <a:rPr sz="1350" b="0">
-                <a:solidFill>
-                  <a:srgbClr val="F4F7FA"/>
+              <a:rPr sz="1300" b="0">
+                <a:solidFill>
+                  <a:srgbClr val="1E293B"/>
                 </a:solidFill>
                 <a:latin typeface="Calibri"/>
               </a:rPr>
-              <a:t>Theme   &lt;&lt;FILL IN&gt;&gt;</a:t>
+              <a:t>Theme   &lt;&lt;FILL IN&gt;&gt;      ·      PS Category   Software</a:t>
             </a:r>
           </a:p>
           <a:p>
             <a:pPr algn="l" marL="0" indent="0">
               <a:spcAft>
-                <a:spcPts val="1000"/>
+                <a:spcPts val="900"/>
               </a:spcAft>
               <a:buNone/>
             </a:pPr>
             <a:r>
-              <a:rPr sz="1350" b="0">
-                <a:solidFill>
-                  <a:srgbClr val="F4F7FA"/>
+              <a:rPr sz="1300" b="0">
+                <a:solidFill>
+                  <a:srgbClr val="1E293B"/>
                 </a:solidFill>
                 <a:latin typeface="Calibri"/>
               </a:rPr>
-              <a:t>PS Category   Software</a:t>
+              <a:t>Student   Ayush Yadav</a:t>
             </a:r>
           </a:p>
           <a:p>
             <a:pPr algn="l" marL="0" indent="0">
               <a:spcAft>
-                <a:spcPts val="1000"/>
+                <a:spcPts val="900"/>
               </a:spcAft>
               <a:buNone/>
             </a:pPr>
             <a:r>
-              <a:rPr sz="1350" b="0">
-                <a:solidFill>
-                  <a:srgbClr val="F4F7FA"/>
-                </a:solidFill>
-                <a:latin typeface="Calibri"/>
-              </a:rPr>
-              <a:t>Student Name   Ayush Yadav</a:t>
-            </a:r>
-          </a:p>
-          <a:p>
-            <a:pPr algn="l" marL="0" indent="0">
-              <a:spcAft>
-                <a:spcPts val="1000"/>
-              </a:spcAft>
-              <a:buNone/>
-            </a:pPr>
-            <a:r>
-              <a:rPr sz="1350" b="0">
-                <a:solidFill>
-                  <a:srgbClr val="F4F7FA"/>
+              <a:rPr sz="1300" b="0">
+                <a:solidFill>
+                  <a:srgbClr val="1E293B"/>
                 </a:solidFill>
                 <a:latin typeface="Calibri"/>
               </a:rPr>
@@ -5301,14 +5276,14 @@
       </p:sp>
       <p:sp>
         <p:nvSpPr>
-          <p:cNvPr id="9" name="TextBox 8"/>
+          <p:cNvPr id="8" name="TextBox 7"/>
           <p:cNvSpPr txBox="1"/>
           <p:nvPr/>
         </p:nvSpPr>
         <p:spPr>
           <a:xfrm>
-            <a:off x="6537960" y="1298448"/>
-            <a:ext cx="5212080" cy="1783080"/>
+            <a:off x="384048" y="6382512"/>
+            <a:ext cx="11430000" cy="310896"/>
           </a:xfrm>
           <a:prstGeom prst="rect">
             <a:avLst/>
@@ -5316,56 +5291,34 @@
           <a:noFill/>
         </p:spPr>
         <p:txBody>
-          <a:bodyPr wrap="square">
+          <a:bodyPr wrap="none">
             <a:spAutoFit/>
           </a:bodyPr>
           <a:lstStyle/>
           <a:p>
-            <a:pPr algn="l" marL="0" indent="0">
-              <a:spcAft>
-                <a:spcPts val="800"/>
-              </a:spcAft>
-              <a:buNone/>
-            </a:pPr>
-            <a:r>
-              <a:rPr sz="2200" b="1">
-                <a:solidFill>
-                  <a:srgbClr val="F28A4C"/>
+            <a:pPr algn="ctr"/>
+            <a:r>
+              <a:rPr sz="900">
+                <a:solidFill>
+                  <a:srgbClr val="475569"/>
                 </a:solidFill>
                 <a:latin typeface="Calibri"/>
               </a:rPr>
-              <a:t>A building that runs itself.</a:t>
-            </a:r>
-          </a:p>
-          <a:p>
-            <a:pPr algn="l" marL="0" indent="0">
-              <a:spcAft>
-                <a:spcPts val="800"/>
-              </a:spcAft>
-              <a:buNone/>
-            </a:pPr>
-            <a:r>
-              <a:rPr sz="1250" b="0">
-                <a:solidFill>
-                  <a:srgbClr val="F4F7FA"/>
-                </a:solidFill>
-                <a:latin typeface="Calibri"/>
-              </a:rPr>
-              <a:t>EnergyPlus supplies the physics, a local open-source LLM supplies the judgement, and the Model Context Protocol carries every reading and every command between them — while the simulation is still running.</a:t>
-            </a:r>
-          </a:p>
-        </p:txBody>
-      </p:sp>
-      <p:sp>
-        <p:nvSpPr>
-          <p:cNvPr id="11" name="TextBox 10"/>
+              <a:t>Echo-Loop[source: 1]@SIH Idea submission- Template1</a:t>
+            </a:r>
+          </a:p>
+        </p:txBody>
+      </p:sp>
+      <p:sp>
+        <p:nvSpPr>
+          <p:cNvPr id="10" name="TextBox 9"/>
           <p:cNvSpPr txBox="1"/>
           <p:nvPr/>
         </p:nvSpPr>
         <p:spPr>
           <a:xfrm>
-            <a:off x="6757416" y="3099815"/>
-            <a:ext cx="4773168" cy="777240"/>
+            <a:off x="6446520" y="1133856"/>
+            <a:ext cx="5349240" cy="1737360"/>
           </a:xfrm>
           <a:prstGeom prst="rect">
             <a:avLst/>
@@ -5380,49 +5333,49 @@
           <a:p>
             <a:pPr algn="l" marL="0" indent="0">
               <a:spcAft>
-                <a:spcPts val="100"/>
+                <a:spcPts val="900"/>
               </a:spcAft>
               <a:buNone/>
             </a:pPr>
             <a:r>
-              <a:rPr sz="2600" b="1">
-                <a:solidFill>
-                  <a:srgbClr val="F28A4C"/>
+              <a:rPr sz="2000" b="1">
+                <a:solidFill>
+                  <a:srgbClr val="1E3A8A"/>
+                </a:solidFill>
+                <a:latin typeface="Segoe UI"/>
+              </a:rPr>
+              <a:t>A BUILDING THAT RUNS ITSELF</a:t>
+            </a:r>
+          </a:p>
+          <a:p>
+            <a:pPr algn="l" marL="0" indent="0">
+              <a:spcAft>
+                <a:spcPts val="900"/>
+              </a:spcAft>
+              <a:buNone/>
+            </a:pPr>
+            <a:r>
+              <a:rPr sz="1250" b="0">
+                <a:solidFill>
+                  <a:srgbClr val="1E293B"/>
                 </a:solidFill>
                 <a:latin typeface="Calibri"/>
               </a:rPr>
-              <a:t>−8.5%</a:t>
-            </a:r>
-          </a:p>
-          <a:p>
-            <a:pPr algn="l" marL="0" indent="0">
-              <a:spcAft>
-                <a:spcPts val="100"/>
-              </a:spcAft>
-              <a:buNone/>
-            </a:pPr>
-            <a:r>
-              <a:rPr sz="1050" b="0">
-                <a:solidFill>
-                  <a:srgbClr val="A8BACE"/>
-                </a:solidFill>
-                <a:latin typeface="Calibri"/>
-              </a:rPr>
-              <a:t>HVAC energy, summer week</a:t>
-            </a:r>
-          </a:p>
-        </p:txBody>
-      </p:sp>
-      <p:sp>
-        <p:nvSpPr>
-          <p:cNvPr id="13" name="TextBox 12"/>
+              <a:t>EnergyPlus supplies the physics. A local open-source LLM supplies the judgement. The Model Context Protocol carries every reading and every command between them — while the simulation is still running.</a:t>
+            </a:r>
+          </a:p>
+        </p:txBody>
+      </p:sp>
+      <p:sp>
+        <p:nvSpPr>
+          <p:cNvPr id="12" name="TextBox 11"/>
           <p:cNvSpPr txBox="1"/>
           <p:nvPr/>
         </p:nvSpPr>
         <p:spPr>
           <a:xfrm>
-            <a:off x="6757416" y="4187952"/>
-            <a:ext cx="4773168" cy="777240"/>
+            <a:off x="6684264" y="3063240"/>
+            <a:ext cx="2130552" cy="1042415"/>
           </a:xfrm>
           <a:prstGeom prst="rect">
             <a:avLst/>
@@ -5436,50 +5389,45 @@
           <a:lstStyle/>
           <a:p>
             <a:pPr algn="l" marL="0" indent="0">
-              <a:spcAft>
-                <a:spcPts val="100"/>
-              </a:spcAft>
-              <a:buNone/>
-            </a:pPr>
-            <a:r>
-              <a:rPr sz="2600" b="1">
-                <a:solidFill>
-                  <a:srgbClr val="3FC18B"/>
+              <a:buNone/>
+            </a:pPr>
+            <a:r>
+              <a:rPr sz="3200" b="1">
+                <a:solidFill>
+                  <a:srgbClr val="16A34A"/>
+                </a:solidFill>
+                <a:latin typeface="Segoe UI"/>
+              </a:rPr>
+              <a:t>−8.5%</a:t>
+            </a:r>
+          </a:p>
+          <a:p>
+            <a:pPr algn="l" marL="0" indent="0">
+              <a:buNone/>
+            </a:pPr>
+            <a:r>
+              <a:rPr sz="1100">
+                <a:solidFill>
+                  <a:srgbClr val="475569"/>
                 </a:solidFill>
                 <a:latin typeface="Calibri"/>
               </a:rPr>
-              <a:t>336 / 336</a:t>
-            </a:r>
-          </a:p>
-          <a:p>
-            <a:pPr algn="l" marL="0" indent="0">
-              <a:spcAft>
-                <a:spcPts val="100"/>
-              </a:spcAft>
-              <a:buNone/>
-            </a:pPr>
-            <a:r>
-              <a:rPr sz="1050" b="0">
-                <a:solidFill>
-                  <a:srgbClr val="A8BACE"/>
-                </a:solidFill>
-                <a:latin typeface="Calibri"/>
-              </a:rPr>
-              <a:t>agent turns — zero failures</a:t>
-            </a:r>
-          </a:p>
-        </p:txBody>
-      </p:sp>
-      <p:sp>
-        <p:nvSpPr>
-          <p:cNvPr id="15" name="TextBox 14"/>
+              <a:t>HVAC energy
+summer week</a:t>
+            </a:r>
+          </a:p>
+        </p:txBody>
+      </p:sp>
+      <p:sp>
+        <p:nvSpPr>
+          <p:cNvPr id="14" name="TextBox 13"/>
           <p:cNvSpPr txBox="1"/>
           <p:nvPr/>
         </p:nvSpPr>
         <p:spPr>
           <a:xfrm>
-            <a:off x="6757416" y="5276088"/>
-            <a:ext cx="4773168" cy="777240"/>
+            <a:off x="9436608" y="3063240"/>
+            <a:ext cx="2130552" cy="1042415"/>
           </a:xfrm>
           <a:prstGeom prst="rect">
             <a:avLst/>
@@ -5493,36 +5441,31 @@
           <a:lstStyle/>
           <a:p>
             <a:pPr algn="l" marL="0" indent="0">
-              <a:spcAft>
-                <a:spcPts val="100"/>
-              </a:spcAft>
-              <a:buNone/>
-            </a:pPr>
-            <a:r>
-              <a:rPr sz="2600" b="1">
-                <a:solidFill>
-                  <a:srgbClr val="F4F7FA"/>
+              <a:buNone/>
+            </a:pPr>
+            <a:r>
+              <a:rPr sz="2800" b="1">
+                <a:solidFill>
+                  <a:srgbClr val="2563EB"/>
+                </a:solidFill>
+                <a:latin typeface="Segoe UI"/>
+              </a:rPr>
+              <a:t>336/336</a:t>
+            </a:r>
+          </a:p>
+          <a:p>
+            <a:pPr algn="l" marL="0" indent="0">
+              <a:buNone/>
+            </a:pPr>
+            <a:r>
+              <a:rPr sz="1100">
+                <a:solidFill>
+                  <a:srgbClr val="475569"/>
                 </a:solidFill>
                 <a:latin typeface="Calibri"/>
               </a:rPr>
-              <a:t>100%</a:t>
-            </a:r>
-          </a:p>
-          <a:p>
-            <a:pPr algn="l" marL="0" indent="0">
-              <a:spcAft>
-                <a:spcPts val="100"/>
-              </a:spcAft>
-              <a:buNone/>
-            </a:pPr>
-            <a:r>
-              <a:rPr sz="1050" b="0">
-                <a:solidFill>
-                  <a:srgbClr val="A8BACE"/>
-                </a:solidFill>
-                <a:latin typeface="Calibri"/>
-              </a:rPr>
-              <a:t>open source, runs on a laptop</a:t>
+              <a:t>agent turns
+zero failures</a:t>
             </a:r>
           </a:p>
         </p:txBody>
@@ -5535,8 +5478,8 @@
         </p:nvSpPr>
         <p:spPr>
           <a:xfrm>
-            <a:off x="658368" y="4709160"/>
-            <a:ext cx="5577840" cy="914400"/>
+            <a:off x="6684264" y="4507992"/>
+            <a:ext cx="4882896" cy="768096"/>
           </a:xfrm>
           <a:prstGeom prst="rect">
             <a:avLst/>
@@ -5550,15 +5493,83 @@
           <a:lstStyle/>
           <a:p>
             <a:pPr algn="l" marL="0" indent="0">
+              <a:buNone/>
+            </a:pPr>
+            <a:r>
+              <a:rPr sz="2100" b="1">
+                <a:solidFill>
+                  <a:srgbClr val="1E3A8A"/>
+                </a:solidFill>
+                <a:latin typeface="Segoe UI"/>
+              </a:rPr>
+              <a:t>100% open source</a:t>
+            </a:r>
+          </a:p>
+          <a:p>
+            <a:pPr algn="l" marL="0" indent="0">
+              <a:buNone/>
+            </a:pPr>
+            <a:r>
+              <a:rPr sz="1100">
+                <a:solidFill>
+                  <a:srgbClr val="475569"/>
+                </a:solidFill>
+                <a:latin typeface="Calibri"/>
+              </a:rPr>
+              <a:t>One laptop — no cloud, no API keys, no per-query cost</a:t>
+            </a:r>
+          </a:p>
+        </p:txBody>
+      </p:sp>
+      <p:sp>
+        <p:nvSpPr>
+          <p:cNvPr id="17" name="TextBox 16"/>
+          <p:cNvSpPr txBox="1"/>
+          <p:nvPr/>
+        </p:nvSpPr>
+        <p:spPr>
+          <a:xfrm>
+            <a:off x="658368" y="4315968"/>
+            <a:ext cx="5577840" cy="1097280"/>
+          </a:xfrm>
+          <a:prstGeom prst="rect">
+            <a:avLst/>
+          </a:prstGeom>
+          <a:noFill/>
+        </p:spPr>
+        <p:txBody>
+          <a:bodyPr wrap="square">
+            <a:spAutoFit/>
+          </a:bodyPr>
+          <a:lstStyle/>
+          <a:p>
+            <a:pPr algn="l" marL="0" indent="0">
               <a:spcAft>
-                <a:spcPts val="200"/>
+                <a:spcPts val="500"/>
               </a:spcAft>
               <a:buNone/>
             </a:pPr>
             <a:r>
-              <a:rPr sz="1050" b="0">
-                <a:solidFill>
-                  <a:srgbClr val="A8BACE"/>
+              <a:rPr sz="1100" b="1">
+                <a:solidFill>
+                  <a:srgbClr val="1E3A8A"/>
+                </a:solidFill>
+                <a:latin typeface="Segoe UI"/>
+              </a:rPr>
+              <a:t>TECH STACK</a:t>
+            </a:r>
+          </a:p>
+          <a:p>
+            <a:pPr algn="l" marL="0" indent="0">
+              <a:spcAft>
+                <a:spcPts val="500"/>
+              </a:spcAft>
+              <a:buNone/>
+            </a:pPr>
+            <a:r>
+              <a:rPr sz="1100" b="0">
+                <a:solidFill>
+                  <a:srgbClr val="475569"/>
                 </a:solidFill>
                 <a:latin typeface="Calibri"/>
               </a:rPr>
@@ -5586,7 +5597,7 @@
     <p:bg>
       <p:bgPr>
         <a:solidFill>
-          <a:srgbClr val="FAF7F2"/>
+          <a:srgbClr val="F8F9FA"/>
         </a:solidFill>
         <a:effectLst/>
       </p:bgPr>
@@ -5607,22 +5618,22 @@
       </p:grpSpPr>
       <p:sp>
         <p:nvSpPr>
-          <p:cNvPr id="15368" name="Rounded Rectangle 15367"/>
+          <p:cNvPr id="15369" name="Rounded Rectangle 15368"/>
           <p:cNvSpPr/>
           <p:nvPr/>
         </p:nvSpPr>
         <p:spPr>
           <a:xfrm>
-            <a:off x="6309360" y="4700016"/>
-            <a:ext cx="5532120" cy="1481328"/>
+            <a:off x="6309360" y="4462272"/>
+            <a:ext cx="5568696" cy="1627632"/>
           </a:xfrm>
           <a:prstGeom prst="roundRect">
             <a:avLst>
-              <a:gd name="adj" fmla="val 3500"/>
+              <a:gd name="adj" fmla="val 3000"/>
             </a:avLst>
           </a:prstGeom>
           <a:solidFill>
-            <a:srgbClr val="F2ECE2"/>
+            <a:srgbClr val="EFF4FF"/>
           </a:solidFill>
           <a:ln>
             <a:noFill/>
@@ -5651,25 +5662,27 @@
       </p:sp>
       <p:sp>
         <p:nvSpPr>
-          <p:cNvPr id="15366" name="Rounded Rectangle 15365"/>
+          <p:cNvPr id="15367" name="Rounded Rectangle 15366"/>
           <p:cNvSpPr/>
           <p:nvPr/>
         </p:nvSpPr>
         <p:spPr>
           <a:xfrm>
-            <a:off x="6309360" y="3163824"/>
-            <a:ext cx="5532120" cy="1389888"/>
+            <a:off x="6309360" y="2944368"/>
+            <a:ext cx="5568696" cy="1371600"/>
           </a:xfrm>
           <a:prstGeom prst="roundRect">
             <a:avLst>
-              <a:gd name="adj" fmla="val 3500"/>
+              <a:gd name="adj" fmla="val 3000"/>
             </a:avLst>
           </a:prstGeom>
           <a:solidFill>
-            <a:srgbClr val="E9EFF7"/>
+            <a:srgbClr val="ECFDF3"/>
           </a:solidFill>
-          <a:ln>
-            <a:noFill/>
+          <a:ln w="12700">
+            <a:solidFill>
+              <a:srgbClr val="E2E8F0"/>
+            </a:solidFill>
           </a:ln>
           <a:effectLst/>
         </p:spPr>
@@ -5701,19 +5714,21 @@
         </p:nvSpPr>
         <p:spPr>
           <a:xfrm>
-            <a:off x="384048" y="1152144"/>
-            <a:ext cx="5760720" cy="4041648"/>
+            <a:off x="384048" y="1060704"/>
+            <a:ext cx="5760720" cy="5029200"/>
           </a:xfrm>
           <a:prstGeom prst="roundRect">
             <a:avLst>
-              <a:gd name="adj" fmla="val 3500"/>
+              <a:gd name="adj" fmla="val 3000"/>
             </a:avLst>
           </a:prstGeom>
           <a:solidFill>
-            <a:srgbClr val="F2ECE2"/>
+            <a:srgbClr val="FFFFFF"/>
           </a:solidFill>
-          <a:ln>
-            <a:noFill/>
+          <a:ln w="12700">
+            <a:solidFill>
+              <a:srgbClr val="E2E8F0"/>
+            </a:solidFill>
           </a:ln>
           <a:effectLst/>
         </p:spPr>
@@ -5768,9 +5783,9 @@
             <a:r>
               <a:rPr lang="en-US" sz="3400" b="1" dirty="0" i="0">
                 <a:solidFill>
-                  <a:srgbClr val="0E1A2B"/>
-                </a:solidFill>
-                <a:latin typeface="Cambria" panose="02020603050405020304" pitchFamily="18" charset="0"/>
+                  <a:srgbClr val="1E3A8A"/>
+                </a:solidFill>
+                <a:latin typeface="Segoe UI" panose="02020603050405020304" pitchFamily="18" charset="0"/>
                 <a:ea typeface="ＭＳ Ｐゴシック" pitchFamily="1" charset="-128"/>
                 <a:cs typeface="Times New Roman" panose="02020603050405020304" pitchFamily="18" charset="0"/>
               </a:rPr>
@@ -5789,8 +5804,8 @@
         </p:nvSpPr>
         <p:spPr bwMode="auto">
           <a:xfrm>
-            <a:off x="932688" y="1188720"/>
-            <a:ext cx="5029200" cy="4937760"/>
+            <a:off x="1115568" y="1170432"/>
+            <a:ext cx="4864608" cy="4846320"/>
           </a:xfrm>
           <a:prstGeom prst="rect">
             <a:avLst/>
@@ -5811,18 +5826,18 @@
           <a:p>
             <a:pPr algn="l" marL="0" indent="0">
               <a:spcAft>
-                <a:spcPts val="500"/>
+                <a:spcPts val="600"/>
               </a:spcAft>
               <a:buNone/>
             </a:pPr>
             <a:r>
-              <a:rPr sz="1450" b="1">
-                <a:solidFill>
-                  <a:srgbClr val="D9541F"/>
-                </a:solidFill>
-                <a:latin typeface="Calibri"/>
+              <a:rPr sz="1300" b="1">
+                <a:solidFill>
+                  <a:srgbClr val="1E3A8A"/>
+                </a:solidFill>
+                <a:latin typeface="Segoe UI"/>
               </a:rPr>
-              <a:t>Proposed Solution</a:t>
+              <a:t>PROPOSED SOLUTION</a:t>
             </a:r>
             <a:endParaRPr lang="en-US" sz="3200" u="sng" dirty="0">
               <a:latin typeface="Arial" pitchFamily="34" charset="0"/>
@@ -5832,14 +5847,14 @@
           <a:p>
             <a:pPr algn="l" marL="0" indent="0">
               <a:spcAft>
-                <a:spcPts val="500"/>
+                <a:spcPts val="600"/>
               </a:spcAft>
               <a:buNone/>
             </a:pPr>
             <a:r>
-              <a:rPr sz="1150" b="0">
-                <a:solidFill>
-                  <a:srgbClr val="121B2B"/>
+              <a:rPr sz="1200" b="0">
+                <a:solidFill>
+                  <a:srgbClr val="1E293B"/>
                 </a:solidFill>
                 <a:latin typeface="Calibri"/>
               </a:rPr>
@@ -5849,160 +5864,125 @@
           <a:p>
             <a:pPr algn="l" marL="0" indent="0">
               <a:spcAft>
-                <a:spcPts val="500"/>
+                <a:spcPts val="600"/>
               </a:spcAft>
               <a:buNone/>
             </a:pPr>
             <a:r>
-              <a:rPr sz="1450" b="1">
-                <a:solidFill>
-                  <a:srgbClr val="D9541F"/>
+              <a:rPr sz="1300" b="1">
+                <a:solidFill>
+                  <a:srgbClr val="1E3A8A"/>
+                </a:solidFill>
+                <a:latin typeface="Segoe UI"/>
+              </a:rPr>
+              <a:t>HOW IT WORKS</a:t>
+            </a:r>
+          </a:p>
+          <a:p>
+            <a:pPr algn="l" marL="165100" indent="-165100">
+              <a:spcAft>
+                <a:spcPts val="600"/>
+              </a:spcAft>
+              <a:buFont typeface="Calibri"/>
+              <a:buChar char="▪"/>
+            </a:pPr>
+            <a:r>
+              <a:rPr sz="1150" b="0">
+                <a:solidFill>
+                  <a:srgbClr val="1E293B"/>
                 </a:solidFill>
                 <a:latin typeface="Calibri"/>
               </a:rPr>
-              <a:t>Detailed explanation</a:t>
+              <a:t>EnergyPlus runs in-process; sensors read every zone timestep</a:t>
             </a:r>
           </a:p>
           <a:p>
             <a:pPr algn="l" marL="165100" indent="-165100">
               <a:spcAft>
-                <a:spcPts val="500"/>
+                <a:spcPts val="600"/>
               </a:spcAft>
               <a:buFont typeface="Calibri"/>
-              <a:buChar char="•"/>
-            </a:pPr>
-            <a:r>
-              <a:rPr sz="1100" b="0">
-                <a:solidFill>
-                  <a:srgbClr val="121B2B"/>
+              <a:buChar char="▪"/>
+            </a:pPr>
+            <a:r>
+              <a:rPr sz="1150" b="0">
+                <a:solidFill>
+                  <a:srgbClr val="1E293B"/>
                 </a:solidFill>
                 <a:latin typeface="Calibri"/>
               </a:rPr>
-              <a:t>EnergyPlus runs inside the Python process; sensors read every zone timestep</a:t>
+              <a:t>Every 60 simulated minutes the state reaches a local LLM via six MCP tools</a:t>
             </a:r>
           </a:p>
           <a:p>
             <a:pPr algn="l" marL="165100" indent="-165100">
               <a:spcAft>
-                <a:spcPts val="500"/>
+                <a:spcPts val="600"/>
               </a:spcAft>
               <a:buFont typeface="Calibri"/>
-              <a:buChar char="•"/>
-            </a:pPr>
-            <a:r>
-              <a:rPr sz="1100" b="0">
-                <a:solidFill>
-                  <a:srgbClr val="121B2B"/>
+              <a:buChar char="▪"/>
+            </a:pPr>
+            <a:r>
+              <a:rPr sz="1150" b="0">
+                <a:solidFill>
+                  <a:srgbClr val="1E293B"/>
                 </a:solidFill>
                 <a:latin typeface="Calibri"/>
               </a:rPr>
-              <a:t>Every 60 simulated minutes the aggregated state goes to a local LLM through six MCP tools</a:t>
+              <a:t>The model weighs comfort, demand and grid carbon, then returns setpoints</a:t>
+            </a:r>
+          </a:p>
+          <a:p>
+            <a:pPr algn="l" marL="0" indent="0">
+              <a:spcAft>
+                <a:spcPts val="600"/>
+              </a:spcAft>
+              <a:buNone/>
+            </a:pPr>
+            <a:r>
+              <a:rPr sz="1300" b="1">
+                <a:solidFill>
+                  <a:srgbClr val="1E3A8A"/>
+                </a:solidFill>
+                <a:latin typeface="Segoe UI"/>
+              </a:rPr>
+              <a:t>INNOVATION</a:t>
             </a:r>
           </a:p>
           <a:p>
             <a:pPr algn="l" marL="165100" indent="-165100">
               <a:spcAft>
-                <a:spcPts val="500"/>
+                <a:spcPts val="600"/>
               </a:spcAft>
               <a:buFont typeface="Calibri"/>
-              <a:buChar char="•"/>
-            </a:pPr>
-            <a:r>
-              <a:rPr sz="1100" b="0">
-                <a:solidFill>
-                  <a:srgbClr val="121B2B"/>
+              <a:buChar char="▪"/>
+            </a:pPr>
+            <a:r>
+              <a:rPr sz="1150" b="0">
+                <a:solidFill>
+                  <a:srgbClr val="1E293B"/>
                 </a:solidFill>
                 <a:latin typeface="Calibri"/>
               </a:rPr>
-              <a:t>The model reasons over comfort, demand and grid carbon, then returns setpoints</a:t>
-            </a:r>
-          </a:p>
-          <a:p>
-            <a:pPr algn="l" marL="0" indent="0">
+              <a:t>Injected into the LIVE solver — no IDF rewrite, no restart</a:t>
+            </a:r>
+          </a:p>
+          <a:p>
+            <a:pPr algn="l" marL="165100" indent="-165100">
               <a:spcAft>
-                <a:spcPts val="500"/>
+                <a:spcPts val="600"/>
               </a:spcAft>
-              <a:buNone/>
-            </a:pPr>
-            <a:r>
-              <a:rPr sz="1450" b="1">
-                <a:solidFill>
-                  <a:srgbClr val="D9541F"/>
+              <a:buFont typeface="Calibri"/>
+              <a:buChar char="▪"/>
+            </a:pPr>
+            <a:r>
+              <a:rPr sz="1150" b="0">
+                <a:solidFill>
+                  <a:srgbClr val="1E293B"/>
                 </a:solidFill>
                 <a:latin typeface="Calibri"/>
               </a:rPr>
-              <a:t>How it addresses the problem</a:t>
-            </a:r>
-          </a:p>
-          <a:p>
-            <a:pPr algn="l" marL="165100" indent="-165100">
-              <a:spcAft>
-                <a:spcPts val="500"/>
-              </a:spcAft>
-              <a:buFont typeface="Calibri"/>
-              <a:buChar char="•"/>
-            </a:pPr>
-            <a:r>
-              <a:rPr sz="1100" b="0">
-                <a:solidFill>
-                  <a:srgbClr val="121B2B"/>
-                </a:solidFill>
-                <a:latin typeface="Calibri"/>
-              </a:rPr>
-              <a:t>Control adapts continuously to weather, occupancy and carbon intensity instead of a fixed schedule</a:t>
-            </a:r>
-          </a:p>
-          <a:p>
-            <a:pPr algn="l" marL="0" indent="0">
-              <a:spcAft>
-                <a:spcPts val="500"/>
-              </a:spcAft>
-              <a:buNone/>
-            </a:pPr>
-            <a:r>
-              <a:rPr sz="1450" b="1">
-                <a:solidFill>
-                  <a:srgbClr val="D9541F"/>
-                </a:solidFill>
-                <a:latin typeface="Calibri"/>
-              </a:rPr>
-              <a:t>Innovation and uniqueness</a:t>
-            </a:r>
-          </a:p>
-          <a:p>
-            <a:pPr algn="l" marL="165100" indent="-165100">
-              <a:spcAft>
-                <a:spcPts val="500"/>
-              </a:spcAft>
-              <a:buFont typeface="Calibri"/>
-              <a:buChar char="•"/>
-            </a:pPr>
-            <a:r>
-              <a:rPr sz="1100" b="0">
-                <a:solidFill>
-                  <a:srgbClr val="121B2B"/>
-                </a:solidFill>
-                <a:latin typeface="Calibri"/>
-              </a:rPr>
-              <a:t>Setpoints are injected into the LIVE solver via the actuator API — no IDF rewrite, no restart, so the loop closes inside one simulation</a:t>
-            </a:r>
-          </a:p>
-          <a:p>
-            <a:pPr algn="l" marL="165100" indent="-165100">
-              <a:spcAft>
-                <a:spcPts val="500"/>
-              </a:spcAft>
-              <a:buFont typeface="Calibri"/>
-              <a:buChar char="•"/>
-            </a:pPr>
-            <a:r>
-              <a:rPr sz="1100" b="0">
-                <a:solidFill>
-                  <a:srgbClr val="121B2B"/>
-                </a:solidFill>
-                <a:latin typeface="Calibri"/>
-              </a:rPr>
-              <a:t>MCP is the safety boundary: every command is validated server-side before it can reach an actuator</a:t>
+              <a:t>MCP is the safety boundary: every command validated server-side</a:t>
             </a:r>
           </a:p>
         </p:txBody>
@@ -6022,15 +6002,6 @@
           <a:bodyPr/>
           <a:lstStyle/>
           <a:p>
-            <a:fld id="{677C3CE7-23F7-4828-823C-E0205DF2CF97}" type="slidenum">
-              <a:rPr lang="en-US" b="1" smtClean="0">
-                <a:solidFill>
-                  <a:schemeClr val="bg1"/>
-                </a:solidFill>
-              </a:rPr>
-              <a:pPr/>
-              <a:t>3</a:t>
-            </a:fld>
             <a:endParaRPr lang="en-US" b="1" dirty="0">
               <a:solidFill>
                 <a:schemeClr val="bg1"/>
@@ -6062,15 +6033,6 @@
             <a:pPr>
               <a:defRPr/>
             </a:pPr>
-            <a:r>
-              <a:rPr lang="en-US" sz="1000">
-                <a:solidFill>
-                  <a:srgbClr val="4A5768"/>
-                </a:solidFill>
-                <a:latin typeface="Calibri"/>
-              </a:rPr>
-              <a:t>@SIH Idea submission- Template</a:t>
-            </a:r>
             <a:endParaRPr lang="en-US" dirty="0">
               <a:solidFill>
                 <a:schemeClr val="bg1"/>
@@ -6081,20 +6043,55 @@
       </p:sp>
       <p:sp>
         <p:nvSpPr>
-          <p:cNvPr id="15363" name="Oval 15362"/>
+          <p:cNvPr id="15363" name="TextBox 15362"/>
+          <p:cNvSpPr txBox="1"/>
+          <p:nvPr/>
+        </p:nvSpPr>
+        <p:spPr>
+          <a:xfrm>
+            <a:off x="384048" y="6382512"/>
+            <a:ext cx="11430000" cy="310896"/>
+          </a:xfrm>
+          <a:prstGeom prst="rect">
+            <a:avLst/>
+          </a:prstGeom>
+          <a:noFill/>
+        </p:spPr>
+        <p:txBody>
+          <a:bodyPr wrap="none">
+            <a:spAutoFit/>
+          </a:bodyPr>
+          <a:lstStyle/>
+          <a:p>
+            <a:pPr algn="ctr"/>
+            <a:r>
+              <a:rPr sz="900">
+                <a:solidFill>
+                  <a:srgbClr val="475569"/>
+                </a:solidFill>
+                <a:latin typeface="Calibri"/>
+              </a:rPr>
+              <a:t>Echo-Loop[source: 1]@SIH Idea submission- Template2</a:t>
+            </a:r>
+          </a:p>
+        </p:txBody>
+      </p:sp>
+      <p:sp>
+        <p:nvSpPr>
+          <p:cNvPr id="15365" name="Oval 15364"/>
           <p:cNvSpPr/>
           <p:nvPr/>
         </p:nvSpPr>
         <p:spPr>
           <a:xfrm>
-            <a:off x="420624" y="1188720"/>
-            <a:ext cx="384048" cy="384048"/>
+            <a:off x="566928" y="1188720"/>
+            <a:ext cx="402336" cy="402336"/>
           </a:xfrm>
           <a:prstGeom prst="ellipse">
             <a:avLst/>
           </a:prstGeom>
           <a:solidFill>
-            <a:srgbClr val="D9541F"/>
+            <a:srgbClr val="2563EB"/>
           </a:solidFill>
           <a:ln>
             <a:noFill/>
@@ -6121,11 +6118,11 @@
           <a:p>
             <a:pPr algn="ctr"/>
             <a:r>
-              <a:rPr sz="1300" b="1">
+              <a:rPr sz="1400" b="1">
                 <a:solidFill>
                   <a:srgbClr val="FFFFFF"/>
                 </a:solidFill>
-                <a:latin typeface="Calibri"/>
+                <a:latin typeface="Segoe UI"/>
               </a:rPr>
               <a:t>1</a:t>
             </a:r>
@@ -6134,7 +6131,7 @@
       </p:sp>
       <p:pic>
         <p:nvPicPr>
-          <p:cNvPr id="15365" name="Picture 15364" descr="results.png"/>
+          <p:cNvPr id="15366" name="Picture 15365" descr="results.png"/>
           <p:cNvPicPr>
             <a:picLocks noChangeAspect="1"/>
           </p:cNvPicPr>
@@ -6148,8 +6145,8 @@
         </p:blipFill>
         <p:spPr>
           <a:xfrm>
-            <a:off x="6355080" y="1280160"/>
-            <a:ext cx="5486400" cy="1858297"/>
+            <a:off x="6327648" y="1060704"/>
+            <a:ext cx="5532120" cy="1873783"/>
           </a:xfrm>
           <a:prstGeom prst="rect">
             <a:avLst/>
@@ -6158,14 +6155,14 @@
       </p:pic>
       <p:sp>
         <p:nvSpPr>
-          <p:cNvPr id="15367" name="TextBox 15366"/>
+          <p:cNvPr id="15368" name="TextBox 15367"/>
           <p:cNvSpPr txBox="1"/>
           <p:nvPr/>
         </p:nvSpPr>
         <p:spPr>
           <a:xfrm>
-            <a:off x="6528816" y="3273552"/>
-            <a:ext cx="5102352" cy="1170432"/>
+            <a:off x="6547104" y="3063240"/>
+            <a:ext cx="5093208" cy="1133856"/>
           </a:xfrm>
           <a:prstGeom prst="rect">
             <a:avLst/>
@@ -6179,50 +6176,44 @@
           <a:lstStyle/>
           <a:p>
             <a:pPr algn="l" marL="0" indent="0">
-              <a:spcAft>
-                <a:spcPts val="400"/>
-              </a:spcAft>
-              <a:buNone/>
-            </a:pPr>
-            <a:r>
-              <a:rPr sz="1350" b="1">
-                <a:solidFill>
-                  <a:srgbClr val="0D7A4F"/>
+              <a:buNone/>
+            </a:pPr>
+            <a:r>
+              <a:rPr sz="2600" b="1">
+                <a:solidFill>
+                  <a:srgbClr val="16A34A"/>
+                </a:solidFill>
+                <a:latin typeface="Segoe UI"/>
+              </a:rPr>
+              <a:t>−8.5% HVAC energy</a:t>
+            </a:r>
+          </a:p>
+          <a:p>
+            <a:pPr algn="l" marL="0" indent="0">
+              <a:buNone/>
+            </a:pPr>
+            <a:r>
+              <a:rPr sz="1100">
+                <a:solidFill>
+                  <a:srgbClr val="475569"/>
                 </a:solidFill>
                 <a:latin typeface="Calibri"/>
               </a:rPr>
-              <a:t>Measured, not projected</a:t>
-            </a:r>
-          </a:p>
-          <a:p>
-            <a:pPr algn="l" marL="0" indent="0">
-              <a:spcAft>
-                <a:spcPts val="400"/>
-              </a:spcAft>
-              <a:buNone/>
-            </a:pPr>
-            <a:r>
-              <a:rPr sz="1150" b="0">
-                <a:solidFill>
-                  <a:srgbClr val="121B2B"/>
-                </a:solidFill>
-                <a:latin typeface="Calibri"/>
-              </a:rPr>
-              <a:t>8.5% less HVAC energy across a summer week, while holding occupants closer to thermal neutrality than the baseline (mean PMV −0.43 → −0.02).</a:t>
-            </a:r>
-          </a:p>
-        </p:txBody>
-      </p:sp>
-      <p:sp>
-        <p:nvSpPr>
-          <p:cNvPr id="15369" name="TextBox 15368"/>
+              <a:t>Measured, not projected — while holding occupants closer to thermal neutrality than the baseline (mean PMV −0.43 → −0.02)</a:t>
+            </a:r>
+          </a:p>
+        </p:txBody>
+      </p:sp>
+      <p:sp>
+        <p:nvSpPr>
+          <p:cNvPr id="15370" name="TextBox 15369"/>
           <p:cNvSpPr txBox="1"/>
           <p:nvPr/>
         </p:nvSpPr>
         <p:spPr>
           <a:xfrm>
-            <a:off x="6528816" y="4809744"/>
-            <a:ext cx="5102352" cy="1261872"/>
+            <a:off x="6547104" y="4553712"/>
+            <a:ext cx="5120640" cy="1444752"/>
           </a:xfrm>
           <a:prstGeom prst="rect">
             <a:avLst/>
@@ -6237,31 +6228,31 @@
           <a:p>
             <a:pPr algn="l" marL="0" indent="0">
               <a:spcAft>
-                <a:spcPts val="400"/>
+                <a:spcPts val="500"/>
               </a:spcAft>
               <a:buNone/>
             </a:pPr>
             <a:r>
-              <a:rPr sz="1350" b="1">
-                <a:solidFill>
-                  <a:srgbClr val="D9541F"/>
-                </a:solidFill>
-                <a:latin typeface="Calibri"/>
+              <a:rPr sz="1300" b="1">
+                <a:solidFill>
+                  <a:srgbClr val="1E3A8A"/>
+                </a:solidFill>
+                <a:latin typeface="Segoe UI"/>
               </a:rPr>
-              <a:t>Why it is different</a:t>
+              <a:t>WHY IT IS DIFFERENT</a:t>
             </a:r>
           </a:p>
           <a:p>
             <a:pPr algn="l" marL="0" indent="0">
               <a:spcAft>
-                <a:spcPts val="400"/>
+                <a:spcPts val="500"/>
               </a:spcAft>
               <a:buNone/>
             </a:pPr>
             <a:r>
               <a:rPr sz="1150" b="0">
                 <a:solidFill>
-                  <a:srgbClr val="121B2B"/>
+                  <a:srgbClr val="1E293B"/>
                 </a:solidFill>
                 <a:latin typeface="Calibri"/>
               </a:rPr>
@@ -6284,7 +6275,7 @@
     <p:bg>
       <p:bgPr>
         <a:solidFill>
-          <a:srgbClr val="FAF7F2"/>
+          <a:srgbClr val="F8F9FA"/>
         </a:solidFill>
         <a:effectLst/>
       </p:bgPr>
@@ -6311,16 +6302,16 @@
         </p:nvSpPr>
         <p:spPr>
           <a:xfrm>
-            <a:off x="384048" y="1060704"/>
-            <a:ext cx="11430000" cy="1298448"/>
+            <a:off x="384048" y="969264"/>
+            <a:ext cx="11430000" cy="896112"/>
           </a:xfrm>
           <a:prstGeom prst="roundRect">
             <a:avLst>
-              <a:gd name="adj" fmla="val 3500"/>
+              <a:gd name="adj" fmla="val 3000"/>
             </a:avLst>
           </a:prstGeom>
           <a:solidFill>
-            <a:srgbClr val="F2ECE2"/>
+            <a:srgbClr val="EFF4FF"/>
           </a:solidFill>
           <a:ln>
             <a:noFill/>
@@ -6366,9 +6357,9 @@
             <a:r>
               <a:rPr lang="en-US" sz="3400" b="1" dirty="0" i="0">
                 <a:solidFill>
-                  <a:srgbClr val="0E1A2B"/>
-                </a:solidFill>
-                <a:latin typeface="Cambria" panose="02020603050405020304" pitchFamily="18" charset="0"/>
+                  <a:srgbClr val="1E3A8A"/>
+                </a:solidFill>
+                <a:latin typeface="Segoe UI" panose="02020603050405020304" pitchFamily="18" charset="0"/>
                 <a:ea typeface="ＭＳ Ｐゴシック" pitchFamily="1" charset="-128"/>
                 <a:cs typeface="Times New Roman" panose="02020603050405020304" pitchFamily="18" charset="0"/>
               </a:rPr>
@@ -6387,8 +6378,8 @@
         </p:nvSpPr>
         <p:spPr bwMode="auto">
           <a:xfrm>
-            <a:off x="932688" y="1133856"/>
-            <a:ext cx="10607040" cy="1188720"/>
+            <a:off x="1115568" y="1042415"/>
+            <a:ext cx="10424160" cy="1097280"/>
           </a:xfrm>
           <a:prstGeom prst="rect">
             <a:avLst/>
@@ -6417,11 +6408,11 @@
             <a:r>
               <a:rPr sz="1150" b="0">
                 <a:solidFill>
-                  <a:srgbClr val="121B2B"/>
+                  <a:srgbClr val="1E293B"/>
                 </a:solidFill>
                 <a:latin typeface="Calibri"/>
               </a:rPr>
-              <a:t>Technologies    EnergyPlus 26.1 (pyenergyplus C API) · Python · FastMCP over streamable HTTP · Ollama running Llama 3.2 3B · Pydantic validation · Streamlit + Plotly dashboard</a:t>
+              <a:t>TECHNOLOGIES   EnergyPlus 26.1 (pyenergyplus C API) · Python · FastMCP over streamable HTTP · Ollama running Llama 3.2 3B · Pydantic · Streamlit + Plotly</a:t>
             </a:r>
           </a:p>
           <a:p>
@@ -6434,11 +6425,11 @@
             <a:r>
               <a:rPr sz="1150" b="0">
                 <a:solidFill>
-                  <a:srgbClr val="121B2B"/>
+                  <a:srgbClr val="1E293B"/>
                 </a:solidFill>
                 <a:latin typeface="Calibri"/>
               </a:rPr>
-              <a:t>Methodology    sample every timestep → aggregate per control interval → LLM tool-calling turn → validate → inject into live actuators</a:t>
+              <a:t>METHODOLOGY   sample every timestep → aggregate per control interval → LLM tool-calling turn → validate → inject into live actuators</a:t>
             </a:r>
           </a:p>
         </p:txBody>
@@ -6458,15 +6449,6 @@
           <a:bodyPr/>
           <a:lstStyle/>
           <a:p>
-            <a:fld id="{677C3CE7-23F7-4828-823C-E0205DF2CF97}" type="slidenum">
-              <a:rPr lang="en-US" b="1">
-                <a:solidFill>
-                  <a:schemeClr val="bg1"/>
-                </a:solidFill>
-              </a:rPr>
-              <a:pPr/>
-              <a:t>4</a:t>
-            </a:fld>
             <a:endParaRPr lang="en-US" b="1" dirty="0">
               <a:solidFill>
                 <a:schemeClr val="bg1"/>
@@ -6498,15 +6480,6 @@
             <a:pPr>
               <a:defRPr/>
             </a:pPr>
-            <a:r>
-              <a:rPr lang="en-US" sz="1000">
-                <a:solidFill>
-                  <a:srgbClr val="4A5768"/>
-                </a:solidFill>
-                <a:latin typeface="Calibri"/>
-              </a:rPr>
-              <a:t>@SIH Idea submission- Template</a:t>
-            </a:r>
             <a:endParaRPr lang="en-US" dirty="0">
               <a:solidFill>
                 <a:schemeClr val="bg1"/>
@@ -6517,20 +6490,55 @@
       </p:sp>
       <p:sp>
         <p:nvSpPr>
-          <p:cNvPr id="17411" name="Oval 17410"/>
+          <p:cNvPr id="17411" name="TextBox 17410"/>
+          <p:cNvSpPr txBox="1"/>
+          <p:nvPr/>
+        </p:nvSpPr>
+        <p:spPr>
+          <a:xfrm>
+            <a:off x="384048" y="6382512"/>
+            <a:ext cx="11430000" cy="310896"/>
+          </a:xfrm>
+          <a:prstGeom prst="rect">
+            <a:avLst/>
+          </a:prstGeom>
+          <a:noFill/>
+        </p:spPr>
+        <p:txBody>
+          <a:bodyPr wrap="none">
+            <a:spAutoFit/>
+          </a:bodyPr>
+          <a:lstStyle/>
+          <a:p>
+            <a:pPr algn="ctr"/>
+            <a:r>
+              <a:rPr sz="900">
+                <a:solidFill>
+                  <a:srgbClr val="475569"/>
+                </a:solidFill>
+                <a:latin typeface="Calibri"/>
+              </a:rPr>
+              <a:t>Echo-Loop[source: 1]@SIH Idea submission- Template3</a:t>
+            </a:r>
+          </a:p>
+        </p:txBody>
+      </p:sp>
+      <p:sp>
+        <p:nvSpPr>
+          <p:cNvPr id="17413" name="Oval 17412"/>
           <p:cNvSpPr/>
           <p:nvPr/>
         </p:nvSpPr>
         <p:spPr>
           <a:xfrm>
-            <a:off x="420624" y="1097280"/>
-            <a:ext cx="384048" cy="384048"/>
+            <a:off x="566928" y="1097280"/>
+            <a:ext cx="402336" cy="402336"/>
           </a:xfrm>
           <a:prstGeom prst="ellipse">
             <a:avLst/>
           </a:prstGeom>
           <a:solidFill>
-            <a:srgbClr val="D9541F"/>
+            <a:srgbClr val="2563EB"/>
           </a:solidFill>
           <a:ln>
             <a:noFill/>
@@ -6557,11 +6565,11 @@
           <a:p>
             <a:pPr algn="ctr"/>
             <a:r>
-              <a:rPr sz="1300" b="1">
+              <a:rPr sz="1400" b="1">
                 <a:solidFill>
                   <a:srgbClr val="FFFFFF"/>
                 </a:solidFill>
-                <a:latin typeface="Calibri"/>
+                <a:latin typeface="Segoe UI"/>
               </a:rPr>
               <a:t>2</a:t>
             </a:r>
@@ -6570,7 +6578,7 @@
       </p:sp>
       <p:pic>
         <p:nvPicPr>
-          <p:cNvPr id="17413" name="Picture 17412" descr="arch.png"/>
+          <p:cNvPr id="17414" name="Picture 17413" descr="arch.png"/>
           <p:cNvPicPr>
             <a:picLocks noChangeAspect="1"/>
           </p:cNvPicPr>
@@ -6584,14 +6592,54 @@
         </p:blipFill>
         <p:spPr>
           <a:xfrm>
-            <a:off x="658368" y="2596896"/>
-            <a:ext cx="10881360" cy="4032246"/>
+            <a:off x="566928" y="2359152"/>
+            <a:ext cx="11064240" cy="4100015"/>
           </a:xfrm>
           <a:prstGeom prst="rect">
             <a:avLst/>
           </a:prstGeom>
         </p:spPr>
       </p:pic>
+      <p:sp>
+        <p:nvSpPr>
+          <p:cNvPr id="17415" name="TextBox 17414"/>
+          <p:cNvSpPr txBox="1"/>
+          <p:nvPr/>
+        </p:nvSpPr>
+        <p:spPr>
+          <a:xfrm>
+            <a:off x="566928" y="5943600"/>
+            <a:ext cx="11064240" cy="365760"/>
+          </a:xfrm>
+          <a:prstGeom prst="rect">
+            <a:avLst/>
+          </a:prstGeom>
+          <a:noFill/>
+        </p:spPr>
+        <p:txBody>
+          <a:bodyPr wrap="square">
+            <a:spAutoFit/>
+          </a:bodyPr>
+          <a:lstStyle/>
+          <a:p>
+            <a:pPr algn="l" marL="0" indent="0">
+              <a:spcAft>
+                <a:spcPts val="0"/>
+              </a:spcAft>
+              <a:buNone/>
+            </a:pPr>
+            <a:r>
+              <a:rPr sz="1100" b="0">
+                <a:solidFill>
+                  <a:srgbClr val="475569"/>
+                </a:solidFill>
+                <a:latin typeface="Calibri"/>
+              </a:rPr>
+              <a:t>The loop closes inside a single running simulation — 168 agent decisions per simulated week, zero restarts.</a:t>
+            </a:r>
+          </a:p>
+        </p:txBody>
+      </p:sp>
     </p:spTree>
   </p:cSld>
   <p:clrMapOvr>
@@ -6606,7 +6654,7 @@
     <p:bg>
       <p:bgPr>
         <a:solidFill>
-          <a:srgbClr val="FAF7F2"/>
+          <a:srgbClr val="F8F9FA"/>
         </a:solidFill>
         <a:effectLst/>
       </p:bgPr>
@@ -6633,16 +6681,16 @@
         </p:nvSpPr>
         <p:spPr>
           <a:xfrm>
-            <a:off x="384048" y="5029200"/>
-            <a:ext cx="11420856" cy="1170432"/>
+            <a:off x="384048" y="4535424"/>
+            <a:ext cx="11430000" cy="1225296"/>
           </a:xfrm>
           <a:prstGeom prst="roundRect">
             <a:avLst>
-              <a:gd name="adj" fmla="val 3500"/>
+              <a:gd name="adj" fmla="val 3000"/>
             </a:avLst>
           </a:prstGeom>
           <a:solidFill>
-            <a:srgbClr val="E9EFF7"/>
+            <a:srgbClr val="ECFDF3"/>
           </a:solidFill>
           <a:ln>
             <a:noFill/>
@@ -6678,15 +6726,15 @@
         <p:spPr>
           <a:xfrm>
             <a:off x="6172200" y="2487168"/>
-            <a:ext cx="5632704" cy="2395728"/>
+            <a:ext cx="5641848" cy="1810512"/>
           </a:xfrm>
           <a:prstGeom prst="roundRect">
             <a:avLst>
-              <a:gd name="adj" fmla="val 3500"/>
+              <a:gd name="adj" fmla="val 3000"/>
             </a:avLst>
           </a:prstGeom>
           <a:solidFill>
-            <a:srgbClr val="E9EFF7"/>
+            <a:srgbClr val="EFF4FF"/>
           </a:solidFill>
           <a:ln>
             <a:noFill/>
@@ -6722,15 +6770,15 @@
         <p:spPr>
           <a:xfrm>
             <a:off x="384048" y="2487168"/>
-            <a:ext cx="5669280" cy="2395728"/>
+            <a:ext cx="5669280" cy="1810512"/>
           </a:xfrm>
           <a:prstGeom prst="roundRect">
             <a:avLst>
-              <a:gd name="adj" fmla="val 3500"/>
+              <a:gd name="adj" fmla="val 3000"/>
             </a:avLst>
           </a:prstGeom>
           <a:solidFill>
-            <a:srgbClr val="F2ECE2"/>
+            <a:srgbClr val="FFF3EA"/>
           </a:solidFill>
           <a:ln>
             <a:noFill/>
@@ -6765,19 +6813,21 @@
         </p:nvSpPr>
         <p:spPr>
           <a:xfrm>
-            <a:off x="8247888" y="1005840"/>
-            <a:ext cx="3456432" cy="1133856"/>
+            <a:off x="8138160" y="932688"/>
+            <a:ext cx="3675887" cy="1335024"/>
           </a:xfrm>
           <a:prstGeom prst="roundRect">
             <a:avLst>
-              <a:gd name="adj" fmla="val 3500"/>
+              <a:gd name="adj" fmla="val 3000"/>
             </a:avLst>
           </a:prstGeom>
           <a:solidFill>
-            <a:srgbClr val="F2ECE2"/>
+            <a:srgbClr val="EFF4FF"/>
           </a:solidFill>
-          <a:ln>
-            <a:noFill/>
+          <a:ln w="12700">
+            <a:solidFill>
+              <a:srgbClr val="E2E8F0"/>
+            </a:solidFill>
           </a:ln>
           <a:effectLst/>
         </p:spPr>
@@ -6809,19 +6859,21 @@
         </p:nvSpPr>
         <p:spPr>
           <a:xfrm>
-            <a:off x="4590288" y="1005840"/>
-            <a:ext cx="3456432" cy="1133856"/>
+            <a:off x="4261104" y="932688"/>
+            <a:ext cx="3675887" cy="1335024"/>
           </a:xfrm>
           <a:prstGeom prst="roundRect">
             <a:avLst>
-              <a:gd name="adj" fmla="val 3500"/>
+              <a:gd name="adj" fmla="val 3000"/>
             </a:avLst>
           </a:prstGeom>
           <a:solidFill>
-            <a:srgbClr val="F2ECE2"/>
+            <a:srgbClr val="ECFDF3"/>
           </a:solidFill>
-          <a:ln>
-            <a:noFill/>
+          <a:ln w="12700">
+            <a:solidFill>
+              <a:srgbClr val="E2E8F0"/>
+            </a:solidFill>
           </a:ln>
           <a:effectLst/>
         </p:spPr>
@@ -6853,19 +6905,21 @@
         </p:nvSpPr>
         <p:spPr>
           <a:xfrm>
-            <a:off x="932688" y="1005840"/>
-            <a:ext cx="3456432" cy="1133856"/>
+            <a:off x="384048" y="932688"/>
+            <a:ext cx="3675887" cy="1335024"/>
           </a:xfrm>
           <a:prstGeom prst="roundRect">
             <a:avLst>
-              <a:gd name="adj" fmla="val 3500"/>
+              <a:gd name="adj" fmla="val 3000"/>
             </a:avLst>
           </a:prstGeom>
           <a:solidFill>
-            <a:srgbClr val="F2ECE2"/>
+            <a:srgbClr val="ECFDF3"/>
           </a:solidFill>
-          <a:ln>
-            <a:noFill/>
+          <a:ln w="12700">
+            <a:solidFill>
+              <a:srgbClr val="E2E8F0"/>
+            </a:solidFill>
           </a:ln>
           <a:effectLst/>
         </p:spPr>
@@ -6908,9 +6962,9 @@
             <a:r>
               <a:rPr lang="en-US" sz="3400" b="1" dirty="0" i="0">
                 <a:solidFill>
-                  <a:srgbClr val="0E1A2B"/>
-                </a:solidFill>
-                <a:latin typeface="Cambria" panose="02020603050405020304" pitchFamily="18" charset="0"/>
+                  <a:srgbClr val="1E3A8A"/>
+                </a:solidFill>
+                <a:latin typeface="Segoe UI" panose="02020603050405020304" pitchFamily="18" charset="0"/>
                 <a:ea typeface="ＭＳ Ｐゴシック" pitchFamily="1" charset="-128"/>
                 <a:cs typeface="Times New Roman" panose="02020603050405020304" pitchFamily="18" charset="0"/>
               </a:rPr>
@@ -6929,8 +6983,8 @@
         </p:nvSpPr>
         <p:spPr bwMode="auto">
           <a:xfrm>
-            <a:off x="658368" y="2596896"/>
-            <a:ext cx="5120640" cy="3474720"/>
+            <a:off x="658368" y="2578608"/>
+            <a:ext cx="5120640" cy="2139696"/>
           </a:xfrm>
           <a:prstGeom prst="rect">
             <a:avLst/>
@@ -6957,7 +7011,7 @@
                 <a:spcPct val="0"/>
               </a:spcBef>
               <a:spcAft>
-                <a:spcPts val="600"/>
+                <a:spcPts val="800"/>
               </a:spcAft>
               <a:buClrTx/>
               <a:buSzTx/>
@@ -6967,13 +7021,13 @@
               <a:buNone/>
             </a:pPr>
             <a:r>
-              <a:rPr sz="1400" b="1">
-                <a:solidFill>
-                  <a:srgbClr val="D9541F"/>
-                </a:solidFill>
-                <a:latin typeface="Calibri"/>
+              <a:rPr sz="1300" b="1">
+                <a:solidFill>
+                  <a:srgbClr val="EA580C"/>
+                </a:solidFill>
+                <a:latin typeface="Segoe UI"/>
               </a:rPr>
-              <a:t>Feasibility</a:t>
+              <a:t>RISKS &amp; CONSTRAINTS</a:t>
             </a:r>
             <a:endParaRPr kumimoji="0" lang="en-US" sz="2800" b="0" i="0" u="none" strike="noStrike" kern="1200" cap="none" spc="0" normalizeH="0" baseline="0" noProof="0" dirty="0">
               <a:ln>
@@ -6993,68 +7047,15 @@
           <a:p>
             <a:pPr algn="l" marL="165100" indent="-165100">
               <a:spcAft>
-                <a:spcPts val="600"/>
+                <a:spcPts val="800"/>
               </a:spcAft>
               <a:buFont typeface="Calibri"/>
-              <a:buChar char="•"/>
-            </a:pPr>
-            <a:r>
-              <a:rPr sz="1100" b="0">
-                <a:solidFill>
-                  <a:srgbClr val="121B2B"/>
-                </a:solidFill>
-                <a:latin typeface="Calibri"/>
-              </a:rPr>
-              <a:t>Runs end to end on one consumer laptop — 4 GB VRAM, no cloud, no API cost</a:t>
-            </a:r>
-          </a:p>
-          <a:p>
-            <a:pPr algn="l" marL="165100" indent="-165100">
-              <a:spcAft>
-                <a:spcPts val="600"/>
-              </a:spcAft>
-              <a:buFont typeface="Calibri"/>
-              <a:buChar char="•"/>
-            </a:pPr>
-            <a:r>
-              <a:rPr sz="1100" b="0">
-                <a:solidFill>
-                  <a:srgbClr val="121B2B"/>
-                </a:solidFill>
-                <a:latin typeface="Calibri"/>
-              </a:rPr>
-              <a:t>Fully open source: EnergyPlus, Llama 3.2, FastMCP</a:t>
-            </a:r>
-          </a:p>
-          <a:p>
-            <a:pPr algn="l" marL="0" indent="0">
-              <a:spcAft>
-                <a:spcPts val="600"/>
-              </a:spcAft>
-              <a:buNone/>
-            </a:pPr>
-            <a:r>
-              <a:rPr sz="1400" b="1">
-                <a:solidFill>
-                  <a:srgbClr val="D9541F"/>
-                </a:solidFill>
-                <a:latin typeface="Calibri"/>
-              </a:rPr>
-              <a:t>Potential challenges and risks</a:t>
-            </a:r>
-          </a:p>
-          <a:p>
-            <a:pPr algn="l" marL="165100" indent="-165100">
-              <a:spcAft>
-                <a:spcPts val="600"/>
-              </a:spcAft>
-              <a:buFont typeface="Calibri"/>
-              <a:buChar char="•"/>
-            </a:pPr>
-            <a:r>
-              <a:rPr sz="1100" b="0">
-                <a:solidFill>
-                  <a:srgbClr val="121B2B"/>
+              <a:buChar char="▪"/>
+            </a:pPr>
+            <a:r>
+              <a:rPr sz="1150" b="0">
+                <a:solidFill>
+                  <a:srgbClr val="1E293B"/>
                 </a:solidFill>
                 <a:latin typeface="Calibri"/>
               </a:rPr>
@@ -7064,33 +7065,33 @@
           <a:p>
             <a:pPr algn="l" marL="165100" indent="-165100">
               <a:spcAft>
-                <a:spcPts val="600"/>
+                <a:spcPts val="800"/>
               </a:spcAft>
               <a:buFont typeface="Calibri"/>
-              <a:buChar char="•"/>
-            </a:pPr>
-            <a:r>
-              <a:rPr sz="1100" b="0">
-                <a:solidFill>
-                  <a:srgbClr val="121B2B"/>
+              <a:buChar char="▪"/>
+            </a:pPr>
+            <a:r>
+              <a:rPr sz="1150" b="0">
+                <a:solidFill>
+                  <a:srgbClr val="1E293B"/>
                 </a:solidFill>
                 <a:latin typeface="Calibri"/>
               </a:rPr>
-              <a:t>A small model can move the wrong setpoint, or run heating and cooling against each other</a:t>
+              <a:t>A small model can move the wrong setpoint, or run heating against cooling</a:t>
             </a:r>
           </a:p>
           <a:p>
             <a:pPr algn="l" marL="165100" indent="-165100">
               <a:spcAft>
-                <a:spcPts val="600"/>
+                <a:spcPts val="800"/>
               </a:spcAft>
               <a:buFont typeface="Calibri"/>
-              <a:buChar char="•"/>
-            </a:pPr>
-            <a:r>
-              <a:rPr sz="1100" b="0">
-                <a:solidFill>
-                  <a:srgbClr val="121B2B"/>
+              <a:buChar char="▪"/>
+            </a:pPr>
+            <a:r>
+              <a:rPr sz="1150" b="0">
+                <a:solidFill>
+                  <a:srgbClr val="1E293B"/>
                 </a:solidFill>
                 <a:latin typeface="Calibri"/>
               </a:rPr>
@@ -7131,40 +7132,6 @@
               <a:tabLst/>
               <a:defRPr/>
             </a:pPr>
-            <a:fld id="{677C3CE7-23F7-4828-823C-E0205DF2CF97}" type="slidenum">
-              <a:rPr kumimoji="0" lang="en-US" sz="1200" b="1" i="0" u="none" strike="noStrike" kern="1200" cap="none" spc="0" normalizeH="0" baseline="0" noProof="0">
-                <a:ln>
-                  <a:noFill/>
-                </a:ln>
-                <a:solidFill>
-                  <a:prstClr val="white"/>
-                </a:solidFill>
-                <a:effectLst/>
-                <a:uLnTx/>
-                <a:uFillTx/>
-                <a:latin typeface="TradeGothic" pitchFamily="1" charset="0"/>
-                <a:ea typeface="ＭＳ Ｐゴシック" pitchFamily="1" charset="-128"/>
-                <a:cs typeface="+mn-cs"/>
-              </a:rPr>
-              <a:pPr marL="0" marR="0" lvl="0" indent="0" algn="r" defTabSz="457200" rtl="0" eaLnBrk="1" fontAlgn="base" latinLnBrk="0" hangingPunct="1">
-                <a:lnSpc>
-                  <a:spcPct val="100000"/>
-                </a:lnSpc>
-                <a:spcBef>
-                  <a:spcPct val="0"/>
-                </a:spcBef>
-                <a:spcAft>
-                  <a:spcPct val="0"/>
-                </a:spcAft>
-                <a:buClrTx/>
-                <a:buSzTx/>
-                <a:buFontTx/>
-                <a:buNone/>
-                <a:tabLst/>
-                <a:defRPr/>
-              </a:pPr>
-              <a:t>5</a:t>
-            </a:fld>
             <a:endParaRPr kumimoji="0" lang="en-US" sz="1200" b="1" i="0" u="none" strike="noStrike" kern="1200" cap="none" spc="0" normalizeH="0" baseline="0" noProof="0" dirty="0">
               <a:ln>
                 <a:noFill/>
@@ -7219,23 +7186,6 @@
               <a:tabLst/>
               <a:defRPr/>
             </a:pPr>
-            <a:r>
-              <a:rPr kumimoji="0" lang="en-US" sz="1000" b="0" i="0" u="none" strike="noStrike" kern="1200" cap="none" spc="0" normalizeH="0" baseline="0" noProof="0">
-                <a:ln>
-                  <a:noFill/>
-                </a:ln>
-                <a:solidFill>
-                  <a:srgbClr val="4A5768"/>
-                </a:solidFill>
-                <a:effectLst/>
-                <a:uLnTx/>
-                <a:uFillTx/>
-                <a:latin typeface="Calibri"/>
-                <a:ea typeface="+mn-ea"/>
-                <a:cs typeface="+mn-cs"/>
-              </a:rPr>
-              <a:t>@SIH Idea submission- Template</a:t>
-            </a:r>
             <a:endParaRPr kumimoji="0" lang="en-US" sz="1200" b="0" i="0" u="none" strike="noStrike" kern="1200" cap="none" spc="0" normalizeH="0" baseline="0" noProof="0" dirty="0">
               <a:ln>
                 <a:noFill/>
@@ -7255,67 +7205,14 @@
       </p:sp>
       <p:sp>
         <p:nvSpPr>
-          <p:cNvPr id="17411" name="Oval 17410"/>
-          <p:cNvSpPr/>
+          <p:cNvPr id="17411" name="TextBox 17410"/>
+          <p:cNvSpPr txBox="1"/>
           <p:nvPr/>
         </p:nvSpPr>
         <p:spPr>
           <a:xfrm>
-            <a:off x="420624" y="1042415"/>
-            <a:ext cx="384048" cy="384048"/>
-          </a:xfrm>
-          <a:prstGeom prst="ellipse">
-            <a:avLst/>
-          </a:prstGeom>
-          <a:solidFill>
-            <a:srgbClr val="D9541F"/>
-          </a:solidFill>
-          <a:ln>
-            <a:noFill/>
-          </a:ln>
-          <a:effectLst/>
-        </p:spPr>
-        <p:style>
-          <a:lnRef idx="1">
-            <a:schemeClr val="accent1"/>
-          </a:lnRef>
-          <a:fillRef idx="3">
-            <a:schemeClr val="accent1"/>
-          </a:fillRef>
-          <a:effectRef idx="2">
-            <a:schemeClr val="accent1"/>
-          </a:effectRef>
-          <a:fontRef idx="minor">
-            <a:schemeClr val="lt1"/>
-          </a:fontRef>
-        </p:style>
-        <p:txBody>
-          <a:bodyPr rtlCol="0" anchor="ctr" lIns="0" rIns="0" tIns="0" bIns="0"/>
-          <a:lstStyle/>
-          <a:p>
-            <a:pPr algn="ctr"/>
-            <a:r>
-              <a:rPr sz="1300" b="1">
-                <a:solidFill>
-                  <a:srgbClr val="FFFFFF"/>
-                </a:solidFill>
-                <a:latin typeface="Calibri"/>
-              </a:rPr>
-              <a:t>3</a:t>
-            </a:r>
-          </a:p>
-        </p:txBody>
-      </p:sp>
-      <p:sp>
-        <p:nvSpPr>
-          <p:cNvPr id="17413" name="TextBox 17412"/>
-          <p:cNvSpPr txBox="1"/>
-          <p:nvPr/>
-        </p:nvSpPr>
-        <p:spPr>
-          <a:xfrm>
-            <a:off x="1152144" y="1106424"/>
-            <a:ext cx="3017520" cy="932688"/>
+            <a:off x="384048" y="6382512"/>
+            <a:ext cx="11430000" cy="310896"/>
           </a:xfrm>
           <a:prstGeom prst="rect">
             <a:avLst/>
@@ -7323,56 +7220,34 @@
           <a:noFill/>
         </p:spPr>
         <p:txBody>
-          <a:bodyPr wrap="square">
+          <a:bodyPr wrap="none">
             <a:spAutoFit/>
           </a:bodyPr>
           <a:lstStyle/>
           <a:p>
-            <a:pPr algn="l" marL="0" indent="0">
-              <a:spcAft>
-                <a:spcPts val="100"/>
-              </a:spcAft>
-              <a:buNone/>
-            </a:pPr>
-            <a:r>
-              <a:rPr sz="2600" b="1">
-                <a:solidFill>
-                  <a:srgbClr val="0D7A4F"/>
+            <a:pPr algn="ctr"/>
+            <a:r>
+              <a:rPr sz="900">
+                <a:solidFill>
+                  <a:srgbClr val="475569"/>
                 </a:solidFill>
                 <a:latin typeface="Calibri"/>
               </a:rPr>
-              <a:t>336 / 336</a:t>
-            </a:r>
-          </a:p>
-          <a:p>
-            <a:pPr algn="l" marL="0" indent="0">
-              <a:spcAft>
-                <a:spcPts val="100"/>
-              </a:spcAft>
-              <a:buNone/>
-            </a:pPr>
-            <a:r>
-              <a:rPr sz="1050" b="0">
-                <a:solidFill>
-                  <a:srgbClr val="4A5768"/>
-                </a:solidFill>
-                <a:latin typeface="Calibri"/>
-              </a:rPr>
-              <a:t>agent turns — 0 fallbacks, 0 timeouts, 0 actuation errors</a:t>
-            </a:r>
-          </a:p>
-        </p:txBody>
-      </p:sp>
-      <p:sp>
-        <p:nvSpPr>
-          <p:cNvPr id="17415" name="TextBox 17414"/>
+              <a:t>Echo-Loop[source: 1]@SIH Idea submission- Template4</a:t>
+            </a:r>
+          </a:p>
+        </p:txBody>
+      </p:sp>
+      <p:sp>
+        <p:nvSpPr>
+          <p:cNvPr id="17413" name="TextBox 17412"/>
           <p:cNvSpPr txBox="1"/>
           <p:nvPr/>
         </p:nvSpPr>
         <p:spPr>
           <a:xfrm>
-            <a:off x="4809744" y="1106424"/>
-            <a:ext cx="3017520" cy="932688"/>
+            <a:off x="621792" y="1051560"/>
+            <a:ext cx="3200399" cy="1097280"/>
           </a:xfrm>
           <a:prstGeom prst="rect">
             <a:avLst/>
@@ -7386,50 +7261,44 @@
           <a:lstStyle/>
           <a:p>
             <a:pPr algn="l" marL="0" indent="0">
-              <a:spcAft>
-                <a:spcPts val="100"/>
-              </a:spcAft>
-              <a:buNone/>
-            </a:pPr>
-            <a:r>
-              <a:rPr sz="2600" b="1">
-                <a:solidFill>
-                  <a:srgbClr val="D9541F"/>
+              <a:buNone/>
+            </a:pPr>
+            <a:r>
+              <a:rPr sz="3300" b="1">
+                <a:solidFill>
+                  <a:srgbClr val="16A34A"/>
+                </a:solidFill>
+                <a:latin typeface="Segoe UI"/>
+              </a:rPr>
+              <a:t>336 / 336</a:t>
+            </a:r>
+          </a:p>
+          <a:p>
+            <a:pPr algn="l" marL="0" indent="0">
+              <a:buNone/>
+            </a:pPr>
+            <a:r>
+              <a:rPr sz="1100">
+                <a:solidFill>
+                  <a:srgbClr val="475569"/>
                 </a:solidFill>
                 <a:latin typeface="Calibri"/>
               </a:rPr>
-              <a:t>−8.5%</a:t>
-            </a:r>
-          </a:p>
-          <a:p>
-            <a:pPr algn="l" marL="0" indent="0">
-              <a:spcAft>
-                <a:spcPts val="100"/>
-              </a:spcAft>
-              <a:buNone/>
-            </a:pPr>
-            <a:r>
-              <a:rPr sz="1050" b="0">
-                <a:solidFill>
-                  <a:srgbClr val="4A5768"/>
-                </a:solidFill>
-                <a:latin typeface="Calibri"/>
-              </a:rPr>
-              <a:t>HVAC energy, summer week (−3.7% winter)</a:t>
-            </a:r>
-          </a:p>
-        </p:txBody>
-      </p:sp>
-      <p:sp>
-        <p:nvSpPr>
-          <p:cNvPr id="17417" name="TextBox 17416"/>
+              <a:t>agent turns — 0 fallbacks, 0 timeouts, 0 actuation errors</a:t>
+            </a:r>
+          </a:p>
+        </p:txBody>
+      </p:sp>
+      <p:sp>
+        <p:nvSpPr>
+          <p:cNvPr id="17415" name="TextBox 17414"/>
           <p:cNvSpPr txBox="1"/>
           <p:nvPr/>
         </p:nvSpPr>
         <p:spPr>
           <a:xfrm>
-            <a:off x="8467344" y="1106424"/>
-            <a:ext cx="3017520" cy="932688"/>
+            <a:off x="4498848" y="1051560"/>
+            <a:ext cx="3200399" cy="1097280"/>
           </a:xfrm>
           <a:prstGeom prst="rect">
             <a:avLst/>
@@ -7443,50 +7312,44 @@
           <a:lstStyle/>
           <a:p>
             <a:pPr algn="l" marL="0" indent="0">
-              <a:spcAft>
-                <a:spcPts val="100"/>
-              </a:spcAft>
-              <a:buNone/>
-            </a:pPr>
-            <a:r>
-              <a:rPr sz="2600" b="1">
-                <a:solidFill>
-                  <a:srgbClr val="0E1A2B"/>
+              <a:buNone/>
+            </a:pPr>
+            <a:r>
+              <a:rPr sz="3300" b="1">
+                <a:solidFill>
+                  <a:srgbClr val="16A34A"/>
+                </a:solidFill>
+                <a:latin typeface="Segoe UI"/>
+              </a:rPr>
+              <a:t>−8.5%</a:t>
+            </a:r>
+          </a:p>
+          <a:p>
+            <a:pPr algn="l" marL="0" indent="0">
+              <a:buNone/>
+            </a:pPr>
+            <a:r>
+              <a:rPr sz="1100">
+                <a:solidFill>
+                  <a:srgbClr val="475569"/>
                 </a:solidFill>
                 <a:latin typeface="Calibri"/>
               </a:rPr>
-              <a:t>2.1 s</a:t>
-            </a:r>
-          </a:p>
-          <a:p>
-            <a:pPr algn="l" marL="0" indent="0">
-              <a:spcAft>
-                <a:spcPts val="100"/>
-              </a:spcAft>
-              <a:buNone/>
-            </a:pPr>
-            <a:r>
-              <a:rPr sz="1050" b="0">
-                <a:solidFill>
-                  <a:srgbClr val="4A5768"/>
-                </a:solidFill>
-                <a:latin typeface="Calibri"/>
-              </a:rPr>
-              <a:t>median agent decision latency, on-device</a:t>
-            </a:r>
-          </a:p>
-        </p:txBody>
-      </p:sp>
-      <p:sp>
-        <p:nvSpPr>
-          <p:cNvPr id="17420" name="TextBox 17419"/>
+              <a:t>HVAC energy, summer week (−3.7% winter)</a:t>
+            </a:r>
+          </a:p>
+        </p:txBody>
+      </p:sp>
+      <p:sp>
+        <p:nvSpPr>
+          <p:cNvPr id="17417" name="TextBox 17416"/>
           <p:cNvSpPr txBox="1"/>
           <p:nvPr/>
         </p:nvSpPr>
         <p:spPr>
           <a:xfrm>
-            <a:off x="6446520" y="2596896"/>
-            <a:ext cx="5084064" cy="3474720"/>
+            <a:off x="8375904" y="1051560"/>
+            <a:ext cx="3200399" cy="1097280"/>
           </a:xfrm>
           <a:prstGeom prst="rect">
             <a:avLst/>
@@ -7500,105 +7363,44 @@
           <a:lstStyle/>
           <a:p>
             <a:pPr algn="l" marL="0" indent="0">
-              <a:spcAft>
-                <a:spcPts val="600"/>
-              </a:spcAft>
-              <a:buNone/>
-            </a:pPr>
-            <a:r>
-              <a:rPr sz="1400" b="1">
-                <a:solidFill>
-                  <a:srgbClr val="0D7A4F"/>
+              <a:buNone/>
+            </a:pPr>
+            <a:r>
+              <a:rPr sz="3300" b="1">
+                <a:solidFill>
+                  <a:srgbClr val="2563EB"/>
+                </a:solidFill>
+                <a:latin typeface="Segoe UI"/>
+              </a:rPr>
+              <a:t>2.1 s</a:t>
+            </a:r>
+          </a:p>
+          <a:p>
+            <a:pPr algn="l" marL="0" indent="0">
+              <a:buNone/>
+            </a:pPr>
+            <a:r>
+              <a:rPr sz="1100">
+                <a:solidFill>
+                  <a:srgbClr val="475569"/>
                 </a:solidFill>
                 <a:latin typeface="Calibri"/>
               </a:rPr>
-              <a:t>Strategies for overcoming them</a:t>
-            </a:r>
-          </a:p>
-          <a:p>
-            <a:pPr algn="l" marL="165100" indent="-165100">
-              <a:spcAft>
-                <a:spcPts val="600"/>
-              </a:spcAft>
-              <a:buFont typeface="Calibri"/>
-              <a:buChar char="•"/>
-            </a:pPr>
-            <a:r>
-              <a:rPr sz="1100" b="0">
-                <a:solidFill>
-                  <a:srgbClr val="121B2B"/>
-                </a:solidFill>
-                <a:latin typeface="Calibri"/>
-              </a:rPr>
-              <a:t>Interval batching + a hard per-turn deadline; on timeout the loop holds the last accepted command rather than stalling</a:t>
-            </a:r>
-          </a:p>
-          <a:p>
-            <a:pPr algn="l" marL="165100" indent="-165100">
-              <a:spcAft>
-                <a:spcPts val="600"/>
-              </a:spcAft>
-              <a:buFont typeface="Calibri"/>
-              <a:buChar char="•"/>
-            </a:pPr>
-            <a:r>
-              <a:rPr sz="1100" b="0">
-                <a:solidFill>
-                  <a:srgbClr val="121B2B"/>
-                </a:solidFill>
-                <a:latin typeface="Calibri"/>
-              </a:rPr>
-              <a:t>Observations state the required direction, so the model cannot invert the physics</a:t>
-            </a:r>
-          </a:p>
-          <a:p>
-            <a:pPr algn="l" marL="165100" indent="-165100">
-              <a:spcAft>
-                <a:spcPts val="600"/>
-              </a:spcAft>
-              <a:buFont typeface="Calibri"/>
-              <a:buChar char="•"/>
-            </a:pPr>
-            <a:r>
-              <a:rPr sz="1100" b="0">
-                <a:solidFill>
-                  <a:srgbClr val="121B2B"/>
-                </a:solidFill>
-                <a:latin typeface="Calibri"/>
-              </a:rPr>
-              <a:t>Seasonal changeover parks the idle mode's setpoint — heating and cooling can never fight</a:t>
-            </a:r>
-          </a:p>
-          <a:p>
-            <a:pPr algn="l" marL="165100" indent="-165100">
-              <a:spcAft>
-                <a:spcPts val="600"/>
-              </a:spcAft>
-              <a:buFont typeface="Calibri"/>
-              <a:buChar char="•"/>
-            </a:pPr>
-            <a:r>
-              <a:rPr sz="1100" b="0">
-                <a:solidFill>
-                  <a:srgbClr val="121B2B"/>
-                </a:solidFill>
-                <a:latin typeface="Calibri"/>
-              </a:rPr>
-              <a:t>A per-zone proportional trim corrects each zone from its own PMV</a:t>
-            </a:r>
-          </a:p>
-        </p:txBody>
-      </p:sp>
-      <p:sp>
-        <p:nvSpPr>
-          <p:cNvPr id="17422" name="TextBox 17421"/>
+              <a:t>median agent decision latency, fully on-device</a:t>
+            </a:r>
+          </a:p>
+        </p:txBody>
+      </p:sp>
+      <p:sp>
+        <p:nvSpPr>
+          <p:cNvPr id="17420" name="TextBox 17419"/>
           <p:cNvSpPr txBox="1"/>
           <p:nvPr/>
         </p:nvSpPr>
         <p:spPr>
           <a:xfrm>
-            <a:off x="658368" y="5138928"/>
-            <a:ext cx="10881360" cy="950976"/>
+            <a:off x="6446520" y="2578608"/>
+            <a:ext cx="5093208" cy="2139696"/>
           </a:xfrm>
           <a:prstGeom prst="rect">
             <a:avLst/>
@@ -7613,35 +7415,129 @@
           <a:p>
             <a:pPr algn="l" marL="0" indent="0">
               <a:spcAft>
-                <a:spcPts val="400"/>
+                <a:spcPts val="800"/>
               </a:spcAft>
               <a:buNone/>
             </a:pPr>
             <a:r>
-              <a:rPr sz="1400" b="1">
-                <a:solidFill>
-                  <a:srgbClr val="0D7A4F"/>
+              <a:rPr sz="1300" b="1">
+                <a:solidFill>
+                  <a:srgbClr val="1E3A8A"/>
+                </a:solidFill>
+                <a:latin typeface="Segoe UI"/>
+              </a:rPr>
+              <a:t>HOW EACH IS SOLVED</a:t>
+            </a:r>
+          </a:p>
+          <a:p>
+            <a:pPr algn="l" marL="165100" indent="-165100">
+              <a:spcAft>
+                <a:spcPts val="800"/>
+              </a:spcAft>
+              <a:buFont typeface="Calibri"/>
+              <a:buChar char="▪"/>
+            </a:pPr>
+            <a:r>
+              <a:rPr sz="1150" b="0">
+                <a:solidFill>
+                  <a:srgbClr val="1E293B"/>
                 </a:solidFill>
                 <a:latin typeface="Calibri"/>
               </a:rPr>
-              <a:t>Viability at scale</a:t>
-            </a:r>
-          </a:p>
+              <a:t>Hard per-turn deadline; on timeout the loop holds the last accepted command</a:t>
+            </a:r>
+          </a:p>
+          <a:p>
+            <a:pPr algn="l" marL="165100" indent="-165100">
+              <a:spcAft>
+                <a:spcPts val="800"/>
+              </a:spcAft>
+              <a:buFont typeface="Calibri"/>
+              <a:buChar char="▪"/>
+            </a:pPr>
+            <a:r>
+              <a:rPr sz="1150" b="0">
+                <a:solidFill>
+                  <a:srgbClr val="1E293B"/>
+                </a:solidFill>
+                <a:latin typeface="Calibri"/>
+              </a:rPr>
+              <a:t>Observations state the required direction — the model cannot invert physics</a:t>
+            </a:r>
+          </a:p>
+          <a:p>
+            <a:pPr algn="l" marL="165100" indent="-165100">
+              <a:spcAft>
+                <a:spcPts val="800"/>
+              </a:spcAft>
+              <a:buFont typeface="Calibri"/>
+              <a:buChar char="▪"/>
+            </a:pPr>
+            <a:r>
+              <a:rPr sz="1150" b="0">
+                <a:solidFill>
+                  <a:srgbClr val="1E293B"/>
+                </a:solidFill>
+                <a:latin typeface="Calibri"/>
+              </a:rPr>
+              <a:t>Seasonal changeover parks the idle setpoint; a per-zone trim corrects each zone</a:t>
+            </a:r>
+          </a:p>
+        </p:txBody>
+      </p:sp>
+      <p:sp>
+        <p:nvSpPr>
+          <p:cNvPr id="17422" name="TextBox 17421"/>
+          <p:cNvSpPr txBox="1"/>
+          <p:nvPr/>
+        </p:nvSpPr>
+        <p:spPr>
+          <a:xfrm>
+            <a:off x="658368" y="4626864"/>
+            <a:ext cx="10881360" cy="1042415"/>
+          </a:xfrm>
+          <a:prstGeom prst="rect">
+            <a:avLst/>
+          </a:prstGeom>
+          <a:noFill/>
+        </p:spPr>
+        <p:txBody>
+          <a:bodyPr wrap="square">
+            <a:spAutoFit/>
+          </a:bodyPr>
+          <a:lstStyle/>
           <a:p>
             <a:pPr algn="l" marL="0" indent="0">
               <a:spcAft>
-                <a:spcPts val="400"/>
+                <a:spcPts val="500"/>
               </a:spcAft>
               <a:buNone/>
             </a:pPr>
             <a:r>
+              <a:rPr sz="1300" b="1">
+                <a:solidFill>
+                  <a:srgbClr val="16A34A"/>
+                </a:solidFill>
+                <a:latin typeface="Segoe UI"/>
+              </a:rPr>
+              <a:t>VIABILITY AT SCALE</a:t>
+            </a:r>
+          </a:p>
+          <a:p>
+            <a:pPr algn="l" marL="0" indent="0">
+              <a:spcAft>
+                <a:spcPts val="500"/>
+              </a:spcAft>
+              <a:buNone/>
+            </a:pPr>
+            <a:r>
               <a:rPr sz="1150" b="0">
                 <a:solidFill>
-                  <a:srgbClr val="121B2B"/>
+                  <a:srgbClr val="1E293B"/>
                 </a:solidFill>
                 <a:latin typeface="Calibri"/>
               </a:rPr>
-              <a:t>Buildings consume roughly 40% of global energy, so a single-digit HVAC reduction is material at portfolio scale. The loop is model-agnostic — any EnergyPlus model with a thermostat works — and swapping the cognitive engine for a larger local or hosted model needs no change to the MCP tool layer.</a:t>
+              <a:t>Buildings consume roughly 40% of global energy — a single-digit HVAC reduction is material at portfolio scale. The loop is model-agnostic: any EnergyPlus model with a thermostat works, and swapping in a larger cognitive engine needs no change to the MCP tool layer.</a:t>
             </a:r>
           </a:p>
         </p:txBody>
@@ -7665,7 +7561,7 @@
     <p:bg>
       <p:bgPr>
         <a:solidFill>
-          <a:srgbClr val="FAF7F2"/>
+          <a:srgbClr val="F8F9FA"/>
         </a:solidFill>
         <a:effectLst/>
       </p:bgPr>
@@ -7698,16 +7594,16 @@
         </p:nvSpPr>
         <p:spPr>
           <a:xfrm>
-            <a:off x="384048" y="987552"/>
-            <a:ext cx="11430000" cy="1188720"/>
+            <a:off x="384048" y="914400"/>
+            <a:ext cx="11430000" cy="1060704"/>
           </a:xfrm>
           <a:prstGeom prst="roundRect">
             <a:avLst>
-              <a:gd name="adj" fmla="val 3500"/>
+              <a:gd name="adj" fmla="val 3000"/>
             </a:avLst>
           </a:prstGeom>
           <a:solidFill>
-            <a:srgbClr val="F2ECE2"/>
+            <a:srgbClr val="EFF4FF"/>
           </a:solidFill>
           <a:ln>
             <a:noFill/>
@@ -7759,9 +7655,9 @@
             <a:r>
               <a:rPr lang="en-US" sz="3400" b="1" dirty="0" i="0">
                 <a:solidFill>
-                  <a:srgbClr val="0E1A2B"/>
-                </a:solidFill>
-                <a:latin typeface="Cambria" panose="02020603050405020304" pitchFamily="18" charset="0"/>
+                  <a:srgbClr val="1E3A8A"/>
+                </a:solidFill>
+                <a:latin typeface="Segoe UI" panose="02020603050405020304" pitchFamily="18" charset="0"/>
                 <a:ea typeface="ＭＳ Ｐゴシック" pitchFamily="1" charset="-128"/>
                 <a:cs typeface="Times New Roman" panose="02020603050405020304" pitchFamily="18" charset="0"/>
               </a:rPr>
@@ -7786,8 +7682,8 @@
         </p:nvSpPr>
         <p:spPr bwMode="auto">
           <a:xfrm>
-            <a:off x="932688" y="1060704"/>
-            <a:ext cx="10607040" cy="1060704"/>
+            <a:off x="1115568" y="987552"/>
+            <a:ext cx="10424160" cy="1133856"/>
           </a:xfrm>
           <a:prstGeom prst="rect">
             <a:avLst/>
@@ -7814,7 +7710,7 @@
                 <a:spcPct val="0"/>
               </a:spcBef>
               <a:spcAft>
-                <a:spcPts val="500"/>
+                <a:spcPts val="600"/>
               </a:spcAft>
               <a:buClrTx/>
               <a:buSzTx/>
@@ -7824,30 +7720,30 @@
               <a:buNone/>
             </a:pPr>
             <a:r>
-              <a:rPr sz="1250" b="1">
-                <a:solidFill>
-                  <a:srgbClr val="D9541F"/>
+              <a:rPr sz="1300" b="1">
+                <a:solidFill>
+                  <a:srgbClr val="1E3A8A"/>
+                </a:solidFill>
+                <a:latin typeface="Consolas"/>
+              </a:rPr>
+              <a:t>github.com/ayushYadav1107/Eco_loop</a:t>
+            </a:r>
+          </a:p>
+          <a:p>
+            <a:pPr algn="l" marL="0" indent="0">
+              <a:spcAft>
+                <a:spcPts val="600"/>
+              </a:spcAft>
+              <a:buNone/>
+            </a:pPr>
+            <a:r>
+              <a:rPr sz="1150" b="0">
+                <a:solidFill>
+                  <a:srgbClr val="1E293B"/>
                 </a:solidFill>
                 <a:latin typeface="Calibri"/>
               </a:rPr>
-              <a:t>Code   github.com/ayushYadav1107/Eco_loop</a:t>
-            </a:r>
-          </a:p>
-          <a:p>
-            <a:pPr algn="l" marL="0" indent="0">
-              <a:spcAft>
-                <a:spcPts val="500"/>
-              </a:spcAft>
-              <a:buNone/>
-            </a:pPr>
-            <a:r>
-              <a:rPr sz="1150" b="0">
-                <a:solidFill>
-                  <a:srgbClr val="121B2B"/>
-                </a:solidFill>
-                <a:latin typeface="Calibri"/>
-              </a:rPr>
-              <a:t>Baseline and runtime-generated .idf models, the full agent decision trail (agent_decisions.jsonl), per-timestep EnergyPlus results and the savings dashboard are all committed — a fresh clone reproduces these figures.</a:t>
+              <a:t>Baseline and runtime-generated .idf models, the full agent decision trail (agent_decisions.jsonl), per-timestep EnergyPlus results and the savings dashboard are all committed — a fresh clone reproduces every figure here.</a:t>
             </a:r>
           </a:p>
         </p:txBody>
@@ -7890,40 +7786,6 @@
               <a:tabLst/>
               <a:defRPr/>
             </a:pPr>
-            <a:fld id="{677C3CE7-23F7-4828-823C-E0205DF2CF97}" type="slidenum">
-              <a:rPr kumimoji="0" lang="en-US" sz="1200" b="1" i="0" u="none" strike="noStrike" kern="1200" cap="none" spc="0" normalizeH="0" baseline="0" noProof="0">
-                <a:ln>
-                  <a:noFill/>
-                </a:ln>
-                <a:solidFill>
-                  <a:prstClr val="white"/>
-                </a:solidFill>
-                <a:effectLst/>
-                <a:uLnTx/>
-                <a:uFillTx/>
-                <a:latin typeface="TradeGothic" pitchFamily="1" charset="0"/>
-                <a:ea typeface="ＭＳ Ｐゴシック" pitchFamily="1" charset="-128"/>
-                <a:cs typeface="+mn-cs"/>
-              </a:rPr>
-              <a:pPr marL="0" marR="0" lvl="0" indent="0" algn="r" defTabSz="457200" rtl="0" eaLnBrk="1" fontAlgn="base" latinLnBrk="0" hangingPunct="1">
-                <a:lnSpc>
-                  <a:spcPct val="100000"/>
-                </a:lnSpc>
-                <a:spcBef>
-                  <a:spcPct val="0"/>
-                </a:spcBef>
-                <a:spcAft>
-                  <a:spcPct val="0"/>
-                </a:spcAft>
-                <a:buClrTx/>
-                <a:buSzTx/>
-                <a:buFontTx/>
-                <a:buNone/>
-                <a:tabLst/>
-                <a:defRPr/>
-              </a:pPr>
-              <a:t>6</a:t>
-            </a:fld>
             <a:endParaRPr kumimoji="0" lang="en-US" sz="1200" b="1" i="0" u="none" strike="noStrike" kern="1200" cap="none" spc="0" normalizeH="0" baseline="0" noProof="0" dirty="0">
               <a:ln>
                 <a:noFill/>
@@ -7984,23 +7846,6 @@
               <a:tabLst/>
               <a:defRPr/>
             </a:pPr>
-            <a:r>
-              <a:rPr kumimoji="0" lang="en-US" sz="1000" b="0" i="0" u="none" strike="noStrike" kern="1200" cap="none" spc="0" normalizeH="0" baseline="0" noProof="0">
-                <a:ln>
-                  <a:noFill/>
-                </a:ln>
-                <a:solidFill>
-                  <a:srgbClr val="4A5768"/>
-                </a:solidFill>
-                <a:effectLst/>
-                <a:uLnTx/>
-                <a:uFillTx/>
-                <a:latin typeface="Calibri"/>
-                <a:ea typeface="+mn-ea"/>
-                <a:cs typeface="+mn-cs"/>
-              </a:rPr>
-              <a:t>@SIH Idea submission- Template</a:t>
-            </a:r>
             <a:endParaRPr kumimoji="0" lang="en-US" sz="1200" b="0" i="0" u="none" strike="noStrike" kern="1200" cap="none" spc="0" normalizeH="0" baseline="0" noProof="0" dirty="0">
               <a:ln>
                 <a:noFill/>
@@ -8020,20 +7865,55 @@
       </p:sp>
       <p:sp>
         <p:nvSpPr>
-          <p:cNvPr id="17411" name="Oval 17410"/>
+          <p:cNvPr id="17411" name="TextBox 17410"/>
+          <p:cNvSpPr txBox="1"/>
+          <p:nvPr/>
+        </p:nvSpPr>
+        <p:spPr>
+          <a:xfrm>
+            <a:off x="384048" y="6382512"/>
+            <a:ext cx="11430000" cy="310896"/>
+          </a:xfrm>
+          <a:prstGeom prst="rect">
+            <a:avLst/>
+          </a:prstGeom>
+          <a:noFill/>
+        </p:spPr>
+        <p:txBody>
+          <a:bodyPr wrap="none">
+            <a:spAutoFit/>
+          </a:bodyPr>
+          <a:lstStyle/>
+          <a:p>
+            <a:pPr algn="ctr"/>
+            <a:r>
+              <a:rPr sz="900">
+                <a:solidFill>
+                  <a:srgbClr val="475569"/>
+                </a:solidFill>
+                <a:latin typeface="Calibri"/>
+              </a:rPr>
+              <a:t>Echo-Loop[source: 1]@SIH Idea submission- Template5</a:t>
+            </a:r>
+          </a:p>
+        </p:txBody>
+      </p:sp>
+      <p:sp>
+        <p:nvSpPr>
+          <p:cNvPr id="17413" name="Oval 17412"/>
           <p:cNvSpPr/>
           <p:nvPr/>
         </p:nvSpPr>
         <p:spPr>
           <a:xfrm>
-            <a:off x="420624" y="1024128"/>
-            <a:ext cx="384048" cy="384048"/>
+            <a:off x="566928" y="1060704"/>
+            <a:ext cx="402336" cy="402336"/>
           </a:xfrm>
           <a:prstGeom prst="ellipse">
             <a:avLst/>
           </a:prstGeom>
           <a:solidFill>
-            <a:srgbClr val="D9541F"/>
+            <a:srgbClr val="2563EB"/>
           </a:solidFill>
           <a:ln>
             <a:noFill/>
@@ -8060,11 +7940,11 @@
           <a:p>
             <a:pPr algn="ctr"/>
             <a:r>
-              <a:rPr sz="1300" b="1">
+              <a:rPr sz="1400" b="1">
                 <a:solidFill>
                   <a:srgbClr val="FFFFFF"/>
                 </a:solidFill>
-                <a:latin typeface="Calibri"/>
+                <a:latin typeface="Segoe UI"/>
               </a:rPr>
               <a:t>4</a:t>
             </a:r>
@@ -8073,7 +7953,7 @@
       </p:sp>
       <p:pic>
         <p:nvPicPr>
-          <p:cNvPr id="17413" name="Picture 17412" descr="decisions.png"/>
+          <p:cNvPr id="17414" name="Picture 17413" descr="decisions.png"/>
           <p:cNvPicPr>
             <a:picLocks noChangeAspect="1"/>
           </p:cNvPicPr>
@@ -8087,8 +7967,8 @@
         </p:blipFill>
         <p:spPr>
           <a:xfrm>
-            <a:off x="658368" y="2377440"/>
-            <a:ext cx="10881360" cy="4032246"/>
+            <a:off x="566928" y="2267712"/>
+            <a:ext cx="11064240" cy="4100015"/>
           </a:xfrm>
           <a:prstGeom prst="rect">
             <a:avLst/>
@@ -8114,7 +7994,7 @@
     <p:bg>
       <p:bgPr>
         <a:solidFill>
-          <a:srgbClr val="0E1A2B"/>
+          <a:srgbClr val="F8F9FA"/>
         </a:solidFill>
         <a:effectLst/>
       </p:bgPr>
@@ -8135,22 +8015,22 @@
       </p:grpSpPr>
       <p:sp>
         <p:nvSpPr>
-          <p:cNvPr id="17414" name="Rounded Rectangle 17413"/>
+          <p:cNvPr id="17418" name="Rounded Rectangle 17417"/>
           <p:cNvSpPr/>
           <p:nvPr/>
         </p:nvSpPr>
         <p:spPr>
           <a:xfrm>
-            <a:off x="6309360" y="3127248"/>
-            <a:ext cx="5486400" cy="1581912"/>
+            <a:off x="384048" y="4956048"/>
+            <a:ext cx="11430000" cy="1207008"/>
           </a:xfrm>
           <a:prstGeom prst="roundRect">
             <a:avLst>
-              <a:gd name="adj" fmla="val 3500"/>
+              <a:gd name="adj" fmla="val 3000"/>
             </a:avLst>
           </a:prstGeom>
           <a:solidFill>
-            <a:srgbClr val="1B2A3F"/>
+            <a:srgbClr val="FFF3EA"/>
           </a:solidFill>
           <a:ln>
             <a:noFill/>
@@ -8179,22 +8059,22 @@
       </p:sp>
       <p:sp>
         <p:nvSpPr>
-          <p:cNvPr id="17412" name="Rounded Rectangle 17411"/>
+          <p:cNvPr id="17416" name="Rounded Rectangle 17415"/>
           <p:cNvSpPr/>
           <p:nvPr/>
         </p:nvSpPr>
         <p:spPr>
           <a:xfrm>
-            <a:off x="6309360" y="1097280"/>
-            <a:ext cx="5486400" cy="1847088"/>
+            <a:off x="6309360" y="3236976"/>
+            <a:ext cx="5504688" cy="1499616"/>
           </a:xfrm>
           <a:prstGeom prst="roundRect">
             <a:avLst>
-              <a:gd name="adj" fmla="val 3500"/>
+              <a:gd name="adj" fmla="val 3000"/>
             </a:avLst>
           </a:prstGeom>
           <a:solidFill>
-            <a:srgbClr val="1B2A3F"/>
+            <a:srgbClr val="ECFDF3"/>
           </a:solidFill>
           <a:ln>
             <a:noFill/>
@@ -8223,22 +8103,22 @@
       </p:sp>
       <p:sp>
         <p:nvSpPr>
-          <p:cNvPr id="17411" name="Rounded Rectangle 17410"/>
+          <p:cNvPr id="17414" name="Rounded Rectangle 17413"/>
           <p:cNvSpPr/>
           <p:nvPr/>
         </p:nvSpPr>
         <p:spPr>
           <a:xfrm>
-            <a:off x="384048" y="1097280"/>
-            <a:ext cx="5760720" cy="3611880"/>
+            <a:off x="6309360" y="969264"/>
+            <a:ext cx="5504688" cy="2139696"/>
           </a:xfrm>
           <a:prstGeom prst="roundRect">
             <a:avLst>
-              <a:gd name="adj" fmla="val 3500"/>
+              <a:gd name="adj" fmla="val 3000"/>
             </a:avLst>
           </a:prstGeom>
           <a:solidFill>
-            <a:srgbClr val="1B2A3F"/>
+            <a:srgbClr val="EFF4FF"/>
           </a:solidFill>
           <a:ln>
             <a:noFill/>
@@ -8267,6 +8147,52 @@
       </p:sp>
       <p:sp>
         <p:nvSpPr>
+          <p:cNvPr id="17412" name="Rounded Rectangle 17411"/>
+          <p:cNvSpPr/>
+          <p:nvPr/>
+        </p:nvSpPr>
+        <p:spPr>
+          <a:xfrm>
+            <a:off x="384048" y="969264"/>
+            <a:ext cx="5760720" cy="3310128"/>
+          </a:xfrm>
+          <a:prstGeom prst="roundRect">
+            <a:avLst>
+              <a:gd name="adj" fmla="val 3000"/>
+            </a:avLst>
+          </a:prstGeom>
+          <a:solidFill>
+            <a:srgbClr val="FFFFFF"/>
+          </a:solidFill>
+          <a:ln w="12700">
+            <a:solidFill>
+              <a:srgbClr val="E2E8F0"/>
+            </a:solidFill>
+          </a:ln>
+          <a:effectLst/>
+        </p:spPr>
+        <p:style>
+          <a:lnRef idx="1">
+            <a:schemeClr val="accent1"/>
+          </a:lnRef>
+          <a:fillRef idx="3">
+            <a:schemeClr val="accent1"/>
+          </a:fillRef>
+          <a:effectRef idx="2">
+            <a:schemeClr val="accent1"/>
+          </a:effectRef>
+          <a:fontRef idx="minor">
+            <a:schemeClr val="lt1"/>
+          </a:fontRef>
+        </p:style>
+        <p:txBody>
+          <a:bodyPr rtlCol="0" anchor="ctr"/>
+          <a:lstStyle/>
+          <a:p/>
+        </p:txBody>
+      </p:sp>
+      <p:sp>
+        <p:nvSpPr>
           <p:cNvPr id="17409" name="Title 1"/>
           <p:cNvSpPr>
             <a:spLocks noGrp="1"/>
@@ -8284,9 +8210,9 @@
             <a:r>
               <a:rPr lang="en-US" sz="3400" b="1" dirty="0" i="0">
                 <a:solidFill>
-                  <a:srgbClr val="F4F7FA"/>
-                </a:solidFill>
-                <a:latin typeface="Cambria" panose="02020603050405020304" pitchFamily="18" charset="0"/>
+                  <a:srgbClr val="1E3A8A"/>
+                </a:solidFill>
+                <a:latin typeface="Segoe UI" panose="02020603050405020304" pitchFamily="18" charset="0"/>
                 <a:ea typeface="ＭＳ Ｐゴシック" pitchFamily="1" charset="-128"/>
                 <a:cs typeface="Times New Roman" panose="02020603050405020304" pitchFamily="18" charset="0"/>
               </a:rPr>
@@ -8305,8 +8231,8 @@
         </p:nvSpPr>
         <p:spPr bwMode="auto">
           <a:xfrm>
-            <a:off x="676656" y="1243584"/>
-            <a:ext cx="5175504" cy="4663440"/>
+            <a:off x="1115568" y="1078992"/>
+            <a:ext cx="4864608" cy="3566160"/>
           </a:xfrm>
           <a:prstGeom prst="rect">
             <a:avLst/>
@@ -8343,13 +8269,13 @@
               <a:buNone/>
             </a:pPr>
             <a:r>
-              <a:rPr sz="1300" b="1">
-                <a:solidFill>
-                  <a:srgbClr val="F28A4C"/>
-                </a:solidFill>
-                <a:latin typeface="Calibri"/>
+              <a:rPr sz="1250" b="1">
+                <a:solidFill>
+                  <a:srgbClr val="1E3A8A"/>
+                </a:solidFill>
+                <a:latin typeface="Segoe UI"/>
               </a:rPr>
-              <a:t>Simulation and building physics</a:t>
+              <a:t>SIMULATION &amp; BUILDING PHYSICS</a:t>
             </a:r>
             <a:endParaRPr kumimoji="0" lang="en-US" sz="2800" b="0" i="0" u="none" strike="noStrike" kern="1200" cap="none" spc="0" normalizeH="0" baseline="0" noProof="0" dirty="0">
               <a:ln>
@@ -8372,16 +8298,16 @@
                 <a:spcPts val="600"/>
               </a:spcAft>
               <a:buFont typeface="Calibri"/>
-              <a:buChar char="•"/>
+              <a:buChar char="▪"/>
             </a:pPr>
             <a:r>
               <a:rPr sz="1100" b="0">
                 <a:solidFill>
-                  <a:srgbClr val="F4F7FA"/>
+                  <a:srgbClr val="1E293B"/>
                 </a:solidFill>
                 <a:latin typeface="Calibri"/>
               </a:rPr>
-              <a:t>EnergyPlus Engineering Reference and EMS Application Guide — energyplus.net</a:t>
+              <a:t>EnergyPlus Engineering Reference · EMS Application Guide</a:t>
             </a:r>
           </a:p>
           <a:p>
@@ -8390,12 +8316,12 @@
                 <a:spcPts val="600"/>
               </a:spcAft>
               <a:buFont typeface="Calibri"/>
-              <a:buChar char="•"/>
+              <a:buChar char="▪"/>
             </a:pPr>
             <a:r>
               <a:rPr sz="1100" b="0">
                 <a:solidFill>
-                  <a:srgbClr val="F4F7FA"/>
+                  <a:srgbClr val="1E293B"/>
                 </a:solidFill>
                 <a:latin typeface="Calibri"/>
               </a:rPr>
@@ -8408,16 +8334,16 @@
                 <a:spcPts val="600"/>
               </a:spcAft>
               <a:buFont typeface="Calibri"/>
-              <a:buChar char="•"/>
+              <a:buChar char="▪"/>
             </a:pPr>
             <a:r>
               <a:rPr sz="1100" b="0">
                 <a:solidFill>
-                  <a:srgbClr val="F4F7FA"/>
+                  <a:srgbClr val="1E293B"/>
                 </a:solidFill>
                 <a:latin typeface="Calibri"/>
               </a:rPr>
-              <a:t>ISO 7730:2005 and ASHRAE Standard 55 — PMV/PPD thermal comfort model</a:t>
+              <a:t>ISO 7730:2005 · ASHRAE Standard 55 — PMV/PPD comfort model</a:t>
             </a:r>
           </a:p>
           <a:p>
@@ -8428,13 +8354,13 @@
               <a:buNone/>
             </a:pPr>
             <a:r>
-              <a:rPr sz="1300" b="1">
-                <a:solidFill>
-                  <a:srgbClr val="F28A4C"/>
-                </a:solidFill>
-                <a:latin typeface="Calibri"/>
+              <a:rPr sz="1250" b="1">
+                <a:solidFill>
+                  <a:srgbClr val="1E3A8A"/>
+                </a:solidFill>
+                <a:latin typeface="Segoe UI"/>
               </a:rPr>
-              <a:t>Agent, protocol and inference</a:t>
+              <a:t>AGENT, PROTOCOL &amp; INFERENCE</a:t>
             </a:r>
           </a:p>
           <a:p>
@@ -8443,16 +8369,16 @@
                 <a:spcPts val="600"/>
               </a:spcAft>
               <a:buFont typeface="Calibri"/>
-              <a:buChar char="•"/>
+              <a:buChar char="▪"/>
             </a:pPr>
             <a:r>
               <a:rPr sz="1100" b="0">
                 <a:solidFill>
-                  <a:srgbClr val="F4F7FA"/>
+                  <a:srgbClr val="1E293B"/>
                 </a:solidFill>
                 <a:latin typeface="Calibri"/>
               </a:rPr>
-              <a:t>Model Context Protocol specification — modelcontextprotocol.io</a:t>
+              <a:t>Model Context Protocol — modelcontextprotocol.io · FastMCP — gofastmcp.com</a:t>
             </a:r>
           </a:p>
           <a:p>
@@ -8461,69 +8387,16 @@
                 <a:spcPts val="600"/>
               </a:spcAft>
               <a:buFont typeface="Calibri"/>
-              <a:buChar char="•"/>
+              <a:buChar char="▪"/>
             </a:pPr>
             <a:r>
               <a:rPr sz="1100" b="0">
                 <a:solidFill>
-                  <a:srgbClr val="F4F7FA"/>
-                </a:solidFill>
-                <a:latin typeface="Calibri"/>
-              </a:rPr>
-              <a:t>FastMCP — gofastmcp.com</a:t>
-            </a:r>
-          </a:p>
-          <a:p>
-            <a:pPr algn="l" marL="165100" indent="-165100">
-              <a:spcAft>
-                <a:spcPts val="600"/>
-              </a:spcAft>
-              <a:buFont typeface="Calibri"/>
-              <a:buChar char="•"/>
-            </a:pPr>
-            <a:r>
-              <a:rPr sz="1100" b="0">
-                <a:solidFill>
-                  <a:srgbClr val="F4F7FA"/>
+                  <a:srgbClr val="1E293B"/>
                 </a:solidFill>
                 <a:latin typeface="Calibri"/>
               </a:rPr>
               <a:t>Meta Llama 3.2 served locally through Ollama — ollama.com</a:t>
-            </a:r>
-          </a:p>
-          <a:p>
-            <a:pPr algn="l" marL="0" indent="0">
-              <a:spcAft>
-                <a:spcPts val="600"/>
-              </a:spcAft>
-              <a:buNone/>
-            </a:pPr>
-            <a:r>
-              <a:rPr sz="1300" b="1">
-                <a:solidFill>
-                  <a:srgbClr val="F28A4C"/>
-                </a:solidFill>
-                <a:latin typeface="Calibri"/>
-              </a:rPr>
-              <a:t>Project</a:t>
-            </a:r>
-          </a:p>
-          <a:p>
-            <a:pPr algn="l" marL="165100" indent="-165100">
-              <a:spcAft>
-                <a:spcPts val="600"/>
-              </a:spcAft>
-              <a:buFont typeface="Calibri"/>
-              <a:buChar char="•"/>
-            </a:pPr>
-            <a:r>
-              <a:rPr sz="1100" b="0">
-                <a:solidFill>
-                  <a:srgbClr val="F4F7FA"/>
-                </a:solidFill>
-                <a:latin typeface="Calibri"/>
-              </a:rPr>
-              <a:t>Repository, architecture document and reproducible results — github.com/ayushYadav1107/Eco_loop</a:t>
             </a:r>
           </a:p>
         </p:txBody>
@@ -8560,40 +8433,6 @@
               <a:tabLst/>
               <a:defRPr/>
             </a:pPr>
-            <a:fld id="{677C3CE7-23F7-4828-823C-E0205DF2CF97}" type="slidenum">
-              <a:rPr kumimoji="0" lang="en-US" sz="1200" b="1" i="0" u="none" strike="noStrike" kern="1200" cap="none" spc="0" normalizeH="0" baseline="0" noProof="0">
-                <a:ln>
-                  <a:noFill/>
-                </a:ln>
-                <a:solidFill>
-                  <a:prstClr val="white"/>
-                </a:solidFill>
-                <a:effectLst/>
-                <a:uLnTx/>
-                <a:uFillTx/>
-                <a:latin typeface="TradeGothic" pitchFamily="1" charset="0"/>
-                <a:ea typeface="ＭＳ Ｐゴシック" pitchFamily="1" charset="-128"/>
-                <a:cs typeface="+mn-cs"/>
-              </a:rPr>
-              <a:pPr marL="0" marR="0" lvl="0" indent="0" algn="r" defTabSz="457200" rtl="0" eaLnBrk="1" fontAlgn="base" latinLnBrk="0" hangingPunct="1">
-                <a:lnSpc>
-                  <a:spcPct val="100000"/>
-                </a:lnSpc>
-                <a:spcBef>
-                  <a:spcPct val="0"/>
-                </a:spcBef>
-                <a:spcAft>
-                  <a:spcPct val="0"/>
-                </a:spcAft>
-                <a:buClrTx/>
-                <a:buSzTx/>
-                <a:buFontTx/>
-                <a:buNone/>
-                <a:tabLst/>
-                <a:defRPr/>
-              </a:pPr>
-              <a:t>7</a:t>
-            </a:fld>
             <a:endParaRPr kumimoji="0" lang="en-US" sz="1200" b="1" i="0" u="none" strike="noStrike" kern="1200" cap="none" spc="0" normalizeH="0" baseline="0" noProof="0" dirty="0">
               <a:ln>
                 <a:noFill/>
@@ -8648,23 +8487,6 @@
               <a:tabLst/>
               <a:defRPr/>
             </a:pPr>
-            <a:r>
-              <a:rPr kumimoji="0" lang="en-US" sz="1000" b="0" i="0" u="none" strike="noStrike" kern="1200" cap="none" spc="0" normalizeH="0" baseline="0" noProof="0">
-                <a:ln>
-                  <a:noFill/>
-                </a:ln>
-                <a:solidFill>
-                  <a:srgbClr val="A8BACE"/>
-                </a:solidFill>
-                <a:effectLst/>
-                <a:uLnTx/>
-                <a:uFillTx/>
-                <a:latin typeface="Calibri"/>
-                <a:ea typeface="+mn-ea"/>
-                <a:cs typeface="+mn-cs"/>
-              </a:rPr>
-              <a:t>@SIH Idea submission- Template</a:t>
-            </a:r>
             <a:endParaRPr kumimoji="0" lang="en-US" sz="1200" b="0" i="0" u="none" strike="noStrike" kern="1200" cap="none" spc="0" normalizeH="0" baseline="0" noProof="0" dirty="0">
               <a:ln>
                 <a:noFill/>
@@ -8684,14 +8506,14 @@
       </p:sp>
       <p:sp>
         <p:nvSpPr>
-          <p:cNvPr id="17413" name="TextBox 17412"/>
+          <p:cNvPr id="17411" name="TextBox 17410"/>
           <p:cNvSpPr txBox="1"/>
           <p:nvPr/>
         </p:nvSpPr>
         <p:spPr>
           <a:xfrm>
-            <a:off x="6565392" y="1243584"/>
-            <a:ext cx="4974336" cy="2084831"/>
+            <a:off x="384048" y="6382512"/>
+            <a:ext cx="11430000" cy="310896"/>
           </a:xfrm>
           <a:prstGeom prst="rect">
             <a:avLst/>
@@ -8699,110 +8521,73 @@
           <a:noFill/>
         </p:spPr>
         <p:txBody>
-          <a:bodyPr wrap="square">
+          <a:bodyPr wrap="none">
             <a:spAutoFit/>
           </a:bodyPr>
           <a:lstStyle/>
           <a:p>
-            <a:pPr algn="l" marL="0" indent="0">
-              <a:spcAft>
-                <a:spcPts val="400"/>
-              </a:spcAft>
-              <a:buNone/>
-            </a:pPr>
-            <a:r>
-              <a:rPr sz="1300" b="1">
-                <a:solidFill>
-                  <a:srgbClr val="F28A4C"/>
+            <a:pPr algn="ctr"/>
+            <a:r>
+              <a:rPr sz="900">
+                <a:solidFill>
+                  <a:srgbClr val="475569"/>
                 </a:solidFill>
                 <a:latin typeface="Calibri"/>
               </a:rPr>
-              <a:t>Reproduce the result</a:t>
-            </a:r>
-          </a:p>
-          <a:p>
-            <a:pPr algn="l" marL="0" indent="0">
-              <a:spcAft>
-                <a:spcPts val="400"/>
-              </a:spcAft>
-              <a:buNone/>
-            </a:pPr>
-            <a:r>
-              <a:rPr sz="1050" b="1">
-                <a:solidFill>
-                  <a:srgbClr val="F4F7FA"/>
-                </a:solidFill>
-                <a:latin typeface="Calibri"/>
+              <a:t>Echo-Loop[source: 1]@SIH Idea submission- Template6</a:t>
+            </a:r>
+          </a:p>
+        </p:txBody>
+      </p:sp>
+      <p:sp>
+        <p:nvSpPr>
+          <p:cNvPr id="17413" name="Oval 17412"/>
+          <p:cNvSpPr/>
+          <p:nvPr/>
+        </p:nvSpPr>
+        <p:spPr>
+          <a:xfrm>
+            <a:off x="566928" y="1097280"/>
+            <a:ext cx="402336" cy="402336"/>
+          </a:xfrm>
+          <a:prstGeom prst="ellipse">
+            <a:avLst/>
+          </a:prstGeom>
+          <a:solidFill>
+            <a:srgbClr val="2563EB"/>
+          </a:solidFill>
+          <a:ln>
+            <a:noFill/>
+          </a:ln>
+          <a:effectLst/>
+        </p:spPr>
+        <p:style>
+          <a:lnRef idx="1">
+            <a:schemeClr val="accent1"/>
+          </a:lnRef>
+          <a:fillRef idx="3">
+            <a:schemeClr val="accent1"/>
+          </a:fillRef>
+          <a:effectRef idx="2">
+            <a:schemeClr val="accent1"/>
+          </a:effectRef>
+          <a:fontRef idx="minor">
+            <a:schemeClr val="lt1"/>
+          </a:fontRef>
+        </p:style>
+        <p:txBody>
+          <a:bodyPr rtlCol="0" anchor="ctr" lIns="0" rIns="0" tIns="0" bIns="0"/>
+          <a:lstStyle/>
+          <a:p>
+            <a:pPr algn="ctr"/>
+            <a:r>
+              <a:rPr sz="1400" b="1">
+                <a:solidFill>
+                  <a:srgbClr val="FFFFFF"/>
+                </a:solidFill>
+                <a:latin typeface="Segoe UI"/>
               </a:rPr>
-              <a:t>python main.py prepare</a:t>
-            </a:r>
-          </a:p>
-          <a:p>
-            <a:pPr algn="l" marL="0" indent="0">
-              <a:spcAft>
-                <a:spcPts val="400"/>
-              </a:spcAft>
-              <a:buNone/>
-            </a:pPr>
-            <a:r>
-              <a:rPr sz="1050" b="1">
-                <a:solidFill>
-                  <a:srgbClr val="F4F7FA"/>
-                </a:solidFill>
-                <a:latin typeface="Calibri"/>
-              </a:rPr>
-              <a:t>python main.py run-baseline --start 07-15 --end 07-21</a:t>
-            </a:r>
-          </a:p>
-          <a:p>
-            <a:pPr algn="l" marL="0" indent="0">
-              <a:spcAft>
-                <a:spcPts val="400"/>
-              </a:spcAft>
-              <a:buNone/>
-            </a:pPr>
-            <a:r>
-              <a:rPr sz="1050" b="1">
-                <a:solidFill>
-                  <a:srgbClr val="F4F7FA"/>
-                </a:solidFill>
-                <a:latin typeface="Calibri"/>
-              </a:rPr>
-              <a:t>python main.py run-ai --start 07-15 --end 07-21</a:t>
-            </a:r>
-          </a:p>
-          <a:p>
-            <a:pPr algn="l" marL="0" indent="0">
-              <a:spcAft>
-                <a:spcPts val="400"/>
-              </a:spcAft>
-              <a:buNone/>
-            </a:pPr>
-            <a:r>
-              <a:rPr sz="1050" b="1">
-                <a:solidFill>
-                  <a:srgbClr val="F4F7FA"/>
-                </a:solidFill>
-                <a:latin typeface="Calibri"/>
-              </a:rPr>
-              <a:t>python main.py dashboard</a:t>
-            </a:r>
-          </a:p>
-          <a:p>
-            <a:pPr algn="l" marL="0" indent="0">
-              <a:spcAft>
-                <a:spcPts val="400"/>
-              </a:spcAft>
-              <a:buNone/>
-            </a:pPr>
-            <a:r>
-              <a:rPr sz="1050" b="0">
-                <a:solidFill>
-                  <a:srgbClr val="A8BACE"/>
-                </a:solidFill>
-                <a:latin typeface="Calibri"/>
-              </a:rPr>
-              <a:t>Temperature 0, so repeated runs return identical totals — the comparison is auditable rather than anecdotal.</a:t>
+              <a:t>5</a:t>
             </a:r>
           </a:p>
         </p:txBody>
@@ -8815,8 +8600,8 @@
         </p:nvSpPr>
         <p:spPr>
           <a:xfrm>
-            <a:off x="6565392" y="3255264"/>
-            <a:ext cx="4974336" cy="1371600"/>
+            <a:off x="6565392" y="1060704"/>
+            <a:ext cx="4992624" cy="1956816"/>
           </a:xfrm>
           <a:prstGeom prst="rect">
             <a:avLst/>
@@ -8836,13 +8621,13 @@
               <a:buNone/>
             </a:pPr>
             <a:r>
-              <a:rPr sz="1300" b="1">
-                <a:solidFill>
-                  <a:srgbClr val="F28A4C"/>
-                </a:solidFill>
-                <a:latin typeface="Calibri"/>
+              <a:rPr sz="1250" b="1">
+                <a:solidFill>
+                  <a:srgbClr val="1E3A8A"/>
+                </a:solidFill>
+                <a:latin typeface="Segoe UI"/>
               </a:rPr>
-              <a:t>Honest limitation</a:t>
+              <a:t>REPRODUCE THE RESULT</a:t>
             </a:r>
           </a:p>
           <a:p>
@@ -8853,13 +8638,13 @@
               <a:buNone/>
             </a:pPr>
             <a:r>
-              <a:rPr sz="1100" b="0">
-                <a:solidFill>
-                  <a:srgbClr val="F4F7FA"/>
-                </a:solidFill>
-                <a:latin typeface="Calibri"/>
+              <a:rPr sz="1050" b="0">
+                <a:solidFill>
+                  <a:srgbClr val="1E293B"/>
+                </a:solidFill>
+                <a:latin typeface="Consolas"/>
               </a:rPr>
-              <a:t>One setpoint pair drives five differently-loaded zones. Per zone the agent holds 85–96% of occupied time inside the PMV band; the stricter worst-zone metric is lower.</a:t>
+              <a:t>python main.py prepare</a:t>
             </a:r>
           </a:p>
           <a:p>
@@ -8870,13 +8655,161 @@
               <a:buNone/>
             </a:pPr>
             <a:r>
+              <a:rPr sz="1050" b="0">
+                <a:solidFill>
+                  <a:srgbClr val="1E293B"/>
+                </a:solidFill>
+                <a:latin typeface="Consolas"/>
+              </a:rPr>
+              <a:t>python main.py run-baseline --start 07-15 --end 07-21</a:t>
+            </a:r>
+          </a:p>
+          <a:p>
+            <a:pPr algn="l" marL="0" indent="0">
+              <a:spcAft>
+                <a:spcPts val="400"/>
+              </a:spcAft>
+              <a:buNone/>
+            </a:pPr>
+            <a:r>
+              <a:rPr sz="1050" b="0">
+                <a:solidFill>
+                  <a:srgbClr val="1E293B"/>
+                </a:solidFill>
+                <a:latin typeface="Consolas"/>
+              </a:rPr>
+              <a:t>python main.py run-ai --start 07-15 --end 07-21</a:t>
+            </a:r>
+          </a:p>
+          <a:p>
+            <a:pPr algn="l" marL="0" indent="0">
+              <a:spcAft>
+                <a:spcPts val="400"/>
+              </a:spcAft>
+              <a:buNone/>
+            </a:pPr>
+            <a:r>
+              <a:rPr sz="1050" b="0">
+                <a:solidFill>
+                  <a:srgbClr val="1E293B"/>
+                </a:solidFill>
+                <a:latin typeface="Consolas"/>
+              </a:rPr>
+              <a:t>python main.py dashboard</a:t>
+            </a:r>
+          </a:p>
+        </p:txBody>
+      </p:sp>
+      <p:sp>
+        <p:nvSpPr>
+          <p:cNvPr id="17417" name="TextBox 17416"/>
+          <p:cNvSpPr txBox="1"/>
+          <p:nvPr/>
+        </p:nvSpPr>
+        <p:spPr>
+          <a:xfrm>
+            <a:off x="6565392" y="3328416"/>
+            <a:ext cx="4992624" cy="1316736"/>
+          </a:xfrm>
+          <a:prstGeom prst="rect">
+            <a:avLst/>
+          </a:prstGeom>
+          <a:noFill/>
+        </p:spPr>
+        <p:txBody>
+          <a:bodyPr wrap="square">
+            <a:spAutoFit/>
+          </a:bodyPr>
+          <a:lstStyle/>
+          <a:p>
+            <a:pPr algn="l" marL="0" indent="0">
+              <a:spcAft>
+                <a:spcPts val="500"/>
+              </a:spcAft>
+              <a:buNone/>
+            </a:pPr>
+            <a:r>
+              <a:rPr sz="1250" b="1">
+                <a:solidFill>
+                  <a:srgbClr val="16A34A"/>
+                </a:solidFill>
+                <a:latin typeface="Segoe UI"/>
+              </a:rPr>
+              <a:t>AUDITABLE, NOT ANECDOTAL</a:t>
+            </a:r>
+          </a:p>
+          <a:p>
+            <a:pPr algn="l" marL="0" indent="0">
+              <a:spcAft>
+                <a:spcPts val="500"/>
+              </a:spcAft>
+              <a:buNone/>
+            </a:pPr>
+            <a:r>
               <a:rPr sz="1100" b="0">
                 <a:solidFill>
-                  <a:srgbClr val="A8BACE"/>
+                  <a:srgbClr val="1E293B"/>
                 </a:solidFill>
                 <a:latin typeface="Calibri"/>
               </a:rPr>
-              <a:t>Per-zone setpoints are the next step — the actuator handles and per-zone PMV are already in place.</a:t>
+              <a:t>The controller runs at temperature 0, so repeated runs return identical totals. Anyone can clone the repo and reproduce these exact figures.</a:t>
+            </a:r>
+          </a:p>
+        </p:txBody>
+      </p:sp>
+      <p:sp>
+        <p:nvSpPr>
+          <p:cNvPr id="17419" name="TextBox 17418"/>
+          <p:cNvSpPr txBox="1"/>
+          <p:nvPr/>
+        </p:nvSpPr>
+        <p:spPr>
+          <a:xfrm>
+            <a:off x="658368" y="5047488"/>
+            <a:ext cx="10881360" cy="1024128"/>
+          </a:xfrm>
+          <a:prstGeom prst="rect">
+            <a:avLst/>
+          </a:prstGeom>
+          <a:noFill/>
+        </p:spPr>
+        <p:txBody>
+          <a:bodyPr wrap="square">
+            <a:spAutoFit/>
+          </a:bodyPr>
+          <a:lstStyle/>
+          <a:p>
+            <a:pPr algn="l" marL="0" indent="0">
+              <a:spcAft>
+                <a:spcPts val="500"/>
+              </a:spcAft>
+              <a:buNone/>
+            </a:pPr>
+            <a:r>
+              <a:rPr sz="1250" b="1">
+                <a:solidFill>
+                  <a:srgbClr val="EA580C"/>
+                </a:solidFill>
+                <a:latin typeface="Segoe UI"/>
+              </a:rPr>
+              <a:t>HONEST LIMITATION — AND THE NEXT STEP</a:t>
+            </a:r>
+          </a:p>
+          <a:p>
+            <a:pPr algn="l" marL="0" indent="0">
+              <a:spcAft>
+                <a:spcPts val="500"/>
+              </a:spcAft>
+              <a:buNone/>
+            </a:pPr>
+            <a:r>
+              <a:rPr sz="1150" b="0">
+                <a:solidFill>
+                  <a:srgbClr val="1E293B"/>
+                </a:solidFill>
+                <a:latin typeface="Calibri"/>
+              </a:rPr>
+              <a:t>One setpoint pair drives five differently-loaded zones. Per zone the agent holds 85–96% of occupied time inside the PMV band; the stricter worst-zone metric is lower. Per-zone setpoints are next — the actuator handles and per-zone PMV are already in place.</a:t>
             </a:r>
           </a:p>
         </p:txBody>

--- a/deck/Eco-Loop_Building_Agents_Idea.pptx
+++ b/deck/Eco-Loop_Building_Agents_Idea.pptx
@@ -5282,7 +5282,7 @@
         </p:nvSpPr>
         <p:spPr>
           <a:xfrm>
-            <a:off x="384048" y="6382512"/>
+            <a:off x="384048" y="6364224"/>
             <a:ext cx="11430000" cy="310896"/>
           </a:xfrm>
           <a:prstGeom prst="rect">
@@ -5296,15 +5296,15 @@
           </a:bodyPr>
           <a:lstStyle/>
           <a:p>
-            <a:pPr algn="ctr"/>
-            <a:r>
-              <a:rPr sz="900">
-                <a:solidFill>
-                  <a:srgbClr val="475569"/>
+            <a:pPr algn="r"/>
+            <a:r>
+              <a:rPr sz="1000" b="1">
+                <a:solidFill>
+                  <a:srgbClr val="1E3A8A"/>
                 </a:solidFill>
                 <a:latin typeface="Calibri"/>
               </a:rPr>
-              <a:t>Echo-Loop[source: 1]@SIH Idea submission- Template1</a:t>
+              <a:t>Echo-Loop   ·   1</a:t>
             </a:r>
           </a:p>
         </p:txBody>
@@ -6049,7 +6049,7 @@
         </p:nvSpPr>
         <p:spPr>
           <a:xfrm>
-            <a:off x="384048" y="6382512"/>
+            <a:off x="384048" y="6364224"/>
             <a:ext cx="11430000" cy="310896"/>
           </a:xfrm>
           <a:prstGeom prst="rect">
@@ -6063,15 +6063,15 @@
           </a:bodyPr>
           <a:lstStyle/>
           <a:p>
-            <a:pPr algn="ctr"/>
-            <a:r>
-              <a:rPr sz="900">
-                <a:solidFill>
-                  <a:srgbClr val="475569"/>
+            <a:pPr algn="r"/>
+            <a:r>
+              <a:rPr sz="1000" b="1">
+                <a:solidFill>
+                  <a:srgbClr val="1E3A8A"/>
                 </a:solidFill>
                 <a:latin typeface="Calibri"/>
               </a:rPr>
-              <a:t>Echo-Loop[source: 1]@SIH Idea submission- Template2</a:t>
+              <a:t>Echo-Loop   ·   2</a:t>
             </a:r>
           </a:p>
         </p:txBody>
@@ -6496,7 +6496,7 @@
         </p:nvSpPr>
         <p:spPr>
           <a:xfrm>
-            <a:off x="384048" y="6382512"/>
+            <a:off x="384048" y="6364224"/>
             <a:ext cx="11430000" cy="310896"/>
           </a:xfrm>
           <a:prstGeom prst="rect">
@@ -6510,15 +6510,15 @@
           </a:bodyPr>
           <a:lstStyle/>
           <a:p>
-            <a:pPr algn="ctr"/>
-            <a:r>
-              <a:rPr sz="900">
-                <a:solidFill>
-                  <a:srgbClr val="475569"/>
+            <a:pPr algn="r"/>
+            <a:r>
+              <a:rPr sz="1000" b="1">
+                <a:solidFill>
+                  <a:srgbClr val="1E3A8A"/>
                 </a:solidFill>
                 <a:latin typeface="Calibri"/>
               </a:rPr>
-              <a:t>Echo-Loop[source: 1]@SIH Idea submission- Template3</a:t>
+              <a:t>Echo-Loop   ·   3</a:t>
             </a:r>
           </a:p>
         </p:txBody>
@@ -6592,54 +6592,38 @@
         </p:blipFill>
         <p:spPr>
           <a:xfrm>
-            <a:off x="566928" y="2359152"/>
-            <a:ext cx="11064240" cy="4100015"/>
+            <a:off x="1298448" y="1956816"/>
+            <a:ext cx="9601200" cy="3557864"/>
           </a:xfrm>
           <a:prstGeom prst="rect">
             <a:avLst/>
           </a:prstGeom>
         </p:spPr>
       </p:pic>
-      <p:sp>
-        <p:nvSpPr>
-          <p:cNvPr id="17415" name="TextBox 17414"/>
-          <p:cNvSpPr txBox="1"/>
+      <p:pic>
+        <p:nvPicPr>
+          <p:cNvPr id="17415" name="Picture 17414" descr="timeline.png"/>
+          <p:cNvPicPr>
+            <a:picLocks noChangeAspect="1"/>
+          </p:cNvPicPr>
           <p:nvPr/>
-        </p:nvSpPr>
+        </p:nvPicPr>
+        <p:blipFill>
+          <a:blip r:embed="rId4"/>
+          <a:stretch>
+            <a:fillRect/>
+          </a:stretch>
+        </p:blipFill>
         <p:spPr>
           <a:xfrm>
-            <a:off x="566928" y="5943600"/>
-            <a:ext cx="11064240" cy="365760"/>
+            <a:off x="566928" y="5230368"/>
+            <a:ext cx="11064240" cy="1177806"/>
           </a:xfrm>
           <a:prstGeom prst="rect">
             <a:avLst/>
           </a:prstGeom>
-          <a:noFill/>
-        </p:spPr>
-        <p:txBody>
-          <a:bodyPr wrap="square">
-            <a:spAutoFit/>
-          </a:bodyPr>
-          <a:lstStyle/>
-          <a:p>
-            <a:pPr algn="l" marL="0" indent="0">
-              <a:spcAft>
-                <a:spcPts val="0"/>
-              </a:spcAft>
-              <a:buNone/>
-            </a:pPr>
-            <a:r>
-              <a:rPr sz="1100" b="0">
-                <a:solidFill>
-                  <a:srgbClr val="475569"/>
-                </a:solidFill>
-                <a:latin typeface="Calibri"/>
-              </a:rPr>
-              <a:t>The loop closes inside a single running simulation — 168 agent decisions per simulated week, zero restarts.</a:t>
-            </a:r>
-          </a:p>
-        </p:txBody>
-      </p:sp>
+        </p:spPr>
+      </p:pic>
     </p:spTree>
   </p:cSld>
   <p:clrMapOvr>
@@ -6675,50 +6659,6 @@
       </p:grpSpPr>
       <p:sp>
         <p:nvSpPr>
-          <p:cNvPr id="17421" name="Rounded Rectangle 17420"/>
-          <p:cNvSpPr/>
-          <p:nvPr/>
-        </p:nvSpPr>
-        <p:spPr>
-          <a:xfrm>
-            <a:off x="384048" y="4535424"/>
-            <a:ext cx="11430000" cy="1225296"/>
-          </a:xfrm>
-          <a:prstGeom prst="roundRect">
-            <a:avLst>
-              <a:gd name="adj" fmla="val 3000"/>
-            </a:avLst>
-          </a:prstGeom>
-          <a:solidFill>
-            <a:srgbClr val="ECFDF3"/>
-          </a:solidFill>
-          <a:ln>
-            <a:noFill/>
-          </a:ln>
-          <a:effectLst/>
-        </p:spPr>
-        <p:style>
-          <a:lnRef idx="1">
-            <a:schemeClr val="accent1"/>
-          </a:lnRef>
-          <a:fillRef idx="3">
-            <a:schemeClr val="accent1"/>
-          </a:fillRef>
-          <a:effectRef idx="2">
-            <a:schemeClr val="accent1"/>
-          </a:effectRef>
-          <a:fontRef idx="minor">
-            <a:schemeClr val="lt1"/>
-          </a:fontRef>
-        </p:style>
-        <p:txBody>
-          <a:bodyPr rtlCol="0" anchor="ctr"/>
-          <a:lstStyle/>
-          <a:p/>
-        </p:txBody>
-      </p:sp>
-      <p:sp>
-        <p:nvSpPr>
           <p:cNvPr id="17419" name="Rounded Rectangle 17418"/>
           <p:cNvSpPr/>
           <p:nvPr/>
@@ -7211,7 +7151,7 @@
         </p:nvSpPr>
         <p:spPr>
           <a:xfrm>
-            <a:off x="384048" y="6382512"/>
+            <a:off x="384048" y="6364224"/>
             <a:ext cx="11430000" cy="310896"/>
           </a:xfrm>
           <a:prstGeom prst="rect">
@@ -7225,15 +7165,15 @@
           </a:bodyPr>
           <a:lstStyle/>
           <a:p>
-            <a:pPr algn="ctr"/>
-            <a:r>
-              <a:rPr sz="900">
-                <a:solidFill>
-                  <a:srgbClr val="475569"/>
+            <a:pPr algn="r"/>
+            <a:r>
+              <a:rPr sz="1000" b="1">
+                <a:solidFill>
+                  <a:srgbClr val="1E3A8A"/>
                 </a:solidFill>
                 <a:latin typeface="Calibri"/>
               </a:rPr>
-              <a:t>Echo-Loop[source: 1]@SIH Idea submission- Template4</a:t>
+              <a:t>Echo-Loop   ·   4</a:t>
             </a:r>
           </a:p>
         </p:txBody>
@@ -7487,14 +7427,14 @@
       </p:sp>
       <p:sp>
         <p:nvSpPr>
-          <p:cNvPr id="17422" name="TextBox 17421"/>
+          <p:cNvPr id="17421" name="TextBox 17420"/>
           <p:cNvSpPr txBox="1"/>
           <p:nvPr/>
         </p:nvSpPr>
         <p:spPr>
           <a:xfrm>
-            <a:off x="658368" y="4626864"/>
-            <a:ext cx="10881360" cy="1042415"/>
+            <a:off x="384048" y="4407408"/>
+            <a:ext cx="11430000" cy="402336"/>
           </a:xfrm>
           <a:prstGeom prst="rect">
             <a:avLst/>
@@ -7509,39 +7449,46 @@
           <a:p>
             <a:pPr algn="l" marL="0" indent="0">
               <a:spcAft>
-                <a:spcPts val="500"/>
+                <a:spcPts val="0"/>
               </a:spcAft>
               <a:buNone/>
             </a:pPr>
             <a:r>
-              <a:rPr sz="1300" b="1">
-                <a:solidFill>
-                  <a:srgbClr val="16A34A"/>
-                </a:solidFill>
-                <a:latin typeface="Segoe UI"/>
-              </a:rPr>
-              <a:t>VIABILITY AT SCALE</a:t>
-            </a:r>
-          </a:p>
-          <a:p>
-            <a:pPr algn="l" marL="0" indent="0">
-              <a:spcAft>
-                <a:spcPts val="500"/>
-              </a:spcAft>
-              <a:buNone/>
-            </a:pPr>
-            <a:r>
-              <a:rPr sz="1150" b="0">
-                <a:solidFill>
-                  <a:srgbClr val="1E293B"/>
+              <a:rPr sz="1100" b="0">
+                <a:solidFill>
+                  <a:srgbClr val="475569"/>
                 </a:solidFill>
                 <a:latin typeface="Calibri"/>
               </a:rPr>
-              <a:t>Buildings consume roughly 40% of global energy — a single-digit HVAC reduction is material at portfolio scale. The loop is model-agnostic: any EnergyPlus model with a thermostat works, and swapping in a larger cognitive engine needs no change to the MCP tool layer.</a:t>
-            </a:r>
-          </a:p>
-        </p:txBody>
-      </p:sp>
+              <a:t>VIABILITY AT SCALE   Buildings are ~40% of global energy — a single-digit HVAC reduction is material at portfolio scale. The loop is model-agnostic, and a larger cognitive engine needs no change to the MCP tool layer.</a:t>
+            </a:r>
+          </a:p>
+        </p:txBody>
+      </p:sp>
+      <p:pic>
+        <p:nvPicPr>
+          <p:cNvPr id="17422" name="Picture 17421" descr="pipeline.png"/>
+          <p:cNvPicPr>
+            <a:picLocks noChangeAspect="1"/>
+          </p:cNvPicPr>
+          <p:nvPr/>
+        </p:nvPicPr>
+        <p:blipFill>
+          <a:blip r:embed="rId3"/>
+          <a:stretch>
+            <a:fillRect/>
+          </a:stretch>
+        </p:blipFill>
+        <p:spPr>
+          <a:xfrm>
+            <a:off x="566928" y="4809744"/>
+            <a:ext cx="11064240" cy="1534717"/>
+          </a:xfrm>
+          <a:prstGeom prst="rect">
+            <a:avLst/>
+          </a:prstGeom>
+        </p:spPr>
+      </p:pic>
     </p:spTree>
     <p:extLst>
       <p:ext uri="{BB962C8B-B14F-4D97-AF65-F5344CB8AC3E}">
@@ -7871,7 +7818,7 @@
         </p:nvSpPr>
         <p:spPr>
           <a:xfrm>
-            <a:off x="384048" y="6382512"/>
+            <a:off x="384048" y="6364224"/>
             <a:ext cx="11430000" cy="310896"/>
           </a:xfrm>
           <a:prstGeom prst="rect">
@@ -7885,15 +7832,15 @@
           </a:bodyPr>
           <a:lstStyle/>
           <a:p>
-            <a:pPr algn="ctr"/>
-            <a:r>
-              <a:rPr sz="900">
-                <a:solidFill>
-                  <a:srgbClr val="475569"/>
+            <a:pPr algn="r"/>
+            <a:r>
+              <a:rPr sz="1000" b="1">
+                <a:solidFill>
+                  <a:srgbClr val="1E3A8A"/>
                 </a:solidFill>
                 <a:latin typeface="Calibri"/>
               </a:rPr>
-              <a:t>Echo-Loop[source: 1]@SIH Idea submission- Template5</a:t>
+              <a:t>Echo-Loop   ·   5</a:t>
             </a:r>
           </a:p>
         </p:txBody>
@@ -8015,14 +7962,14 @@
       </p:grpSpPr>
       <p:sp>
         <p:nvSpPr>
-          <p:cNvPr id="17418" name="Rounded Rectangle 17417"/>
+          <p:cNvPr id="17419" name="Rounded Rectangle 17418"/>
           <p:cNvSpPr/>
           <p:nvPr/>
         </p:nvSpPr>
         <p:spPr>
           <a:xfrm>
-            <a:off x="384048" y="4956048"/>
-            <a:ext cx="11430000" cy="1207008"/>
+            <a:off x="6309360" y="4901184"/>
+            <a:ext cx="5504688" cy="1280160"/>
           </a:xfrm>
           <a:prstGeom prst="roundRect">
             <a:avLst>
@@ -8154,7 +8101,7 @@
         <p:spPr>
           <a:xfrm>
             <a:off x="384048" y="969264"/>
-            <a:ext cx="5760720" cy="3310128"/>
+            <a:ext cx="5760720" cy="4626864"/>
           </a:xfrm>
           <a:prstGeom prst="roundRect">
             <a:avLst>
@@ -8512,7 +8459,7 @@
         </p:nvSpPr>
         <p:spPr>
           <a:xfrm>
-            <a:off x="384048" y="6382512"/>
+            <a:off x="384048" y="6364224"/>
             <a:ext cx="11430000" cy="310896"/>
           </a:xfrm>
           <a:prstGeom prst="rect">
@@ -8526,15 +8473,15 @@
           </a:bodyPr>
           <a:lstStyle/>
           <a:p>
-            <a:pPr algn="ctr"/>
-            <a:r>
-              <a:rPr sz="900">
-                <a:solidFill>
-                  <a:srgbClr val="475569"/>
+            <a:pPr algn="r"/>
+            <a:r>
+              <a:rPr sz="1000" b="1">
+                <a:solidFill>
+                  <a:srgbClr val="1E3A8A"/>
                 </a:solidFill>
                 <a:latin typeface="Calibri"/>
               </a:rPr>
-              <a:t>Echo-Loop[source: 1]@SIH Idea submission- Template6</a:t>
+              <a:t>Echo-Loop   ·   6</a:t>
             </a:r>
           </a:p>
         </p:txBody>
@@ -8757,16 +8704,40 @@
           </a:p>
         </p:txBody>
       </p:sp>
-      <p:sp>
-        <p:nvSpPr>
-          <p:cNvPr id="17419" name="TextBox 17418"/>
+      <p:pic>
+        <p:nvPicPr>
+          <p:cNvPr id="17418" name="Picture 17417" descr="comfort_dist.png"/>
+          <p:cNvPicPr>
+            <a:picLocks noChangeAspect="1"/>
+          </p:cNvPicPr>
+          <p:nvPr/>
+        </p:nvPicPr>
+        <p:blipFill>
+          <a:blip r:embed="rId3"/>
+          <a:stretch>
+            <a:fillRect/>
+          </a:stretch>
+        </p:blipFill>
+        <p:spPr>
+          <a:xfrm>
+            <a:off x="621792" y="3054096"/>
+            <a:ext cx="5285232" cy="2382687"/>
+          </a:xfrm>
+          <a:prstGeom prst="rect">
+            <a:avLst/>
+          </a:prstGeom>
+        </p:spPr>
+      </p:pic>
+      <p:sp>
+        <p:nvSpPr>
+          <p:cNvPr id="17420" name="TextBox 17419"/>
           <p:cNvSpPr txBox="1"/>
           <p:nvPr/>
         </p:nvSpPr>
         <p:spPr>
           <a:xfrm>
-            <a:off x="658368" y="5047488"/>
-            <a:ext cx="10881360" cy="1024128"/>
+            <a:off x="6565392" y="4992624"/>
+            <a:ext cx="4992624" cy="1097280"/>
           </a:xfrm>
           <a:prstGeom prst="rect">
             <a:avLst/>
@@ -8792,7 +8763,7 @@
                 </a:solidFill>
                 <a:latin typeface="Segoe UI"/>
               </a:rPr>
-              <a:t>HONEST LIMITATION — AND THE NEXT STEP</a:t>
+              <a:t>HONEST LIMITATION</a:t>
             </a:r>
           </a:p>
           <a:p>
@@ -8803,13 +8774,13 @@
               <a:buNone/>
             </a:pPr>
             <a:r>
-              <a:rPr sz="1150" b="0">
+              <a:rPr sz="1100" b="0">
                 <a:solidFill>
                   <a:srgbClr val="1E293B"/>
                 </a:solidFill>
                 <a:latin typeface="Calibri"/>
               </a:rPr>
-              <a:t>One setpoint pair drives five differently-loaded zones. Per zone the agent holds 85–96% of occupied time inside the PMV band; the stricter worst-zone metric is lower. Per-zone setpoints are next — the actuator handles and per-zone PMV are already in place.</a:t>
+              <a:t>One setpoint pair drives five zones — per zone the agent holds 85–96% of occupied time in band. Per-zone setpoints are next; the actuator handles are already in place.</a:t>
             </a:r>
           </a:p>
         </p:txBody>
